--- a/deck/saatva_affiliate_analysis.pptx
+++ b/deck/saatva_affiliate_analysis.pptx
@@ -20,6 +20,7 @@
     <p:sldId id="265" r:id="rId17"/>
     <p:sldId id="266" r:id="rId18"/>
     <p:sldId id="267" r:id="rId19"/>
+    <p:sldId id="268" r:id="rId20"/>
   </p:sldIdLst>
   <p:sldSz cx="12191695" cy="6858000"/>
   <p:notesSz cx="6858000" cy="9144000"/>
@@ -586,7 +587,7 @@
           <a:lstStyle/>
           <a:p>
             <a:r>
-              <a:t>Full results table. Conservative estimates use the Walmart-calibrated factor for the mattress brands and the population ratio for Walmart.</a:t>
+              <a:t>The recommendations need a tool a partner manager can use every week, so the pipeline also builds one: dashboard/publisher_risk_monitor.html, a single file that opens in any browser. It re-scores every affiliate click under the chosen look-back window, so the 2-to-30-minute sensitivity is a click, not a footnote. It ranks publishers by the commission paid on their flagged orders, with a Hold, Review or OK status, and the average order and commission are inputs. Every number can be traced to the journey behind a click. The strip at the bottom is one of them: a shopper browsed Walmart, reached checkout, and two seconds after a Bizrate redirect an Impact click 'landed' on the order confirmation page, in the same second as the order. The publisher, impact:150372, has 32 credited orders in the panel, 78% of them from flagged clicks. The same view works for Saatva today; with Partnerize's own click and order logs instead of a one-day panel, the counts behind each status would be complete.</a:t>
             </a:r>
           </a:p>
         </p:txBody>
@@ -656,7 +657,7 @@
           <a:lstStyle/>
           <a:p>
             <a:r>
-              <a:t>Each check, what it found, and how the pipeline handles it.</a:t>
+              <a:t>Full results table. Conservative estimates use the Walmart-calibrated factor for the mattress brands and the population ratio for Walmart.</a:t>
             </a:r>
           </a:p>
         </p:txBody>
@@ -682,6 +683,76 @@
 </file>
 
 <file path=ppt/notesSlides/notesSlide12.xml><?xml version="1.0" encoding="utf-8"?>
+<p:notes xmlns:a="http://schemas.openxmlformats.org/drawingml/2006/main" xmlns:p="http://schemas.openxmlformats.org/presentationml/2006/main" xmlns:r="http://schemas.openxmlformats.org/officeDocument/2006/relationships">
+  <p:cSld>
+    <p:spTree>
+      <p:nvGrpSpPr>
+        <p:cNvPr id="1" name=""/>
+        <p:cNvGrpSpPr/>
+        <p:nvPr/>
+      </p:nvGrpSpPr>
+      <p:grpSpPr>
+        <a:xfrm>
+          <a:off x="0" y="0"/>
+          <a:ext cx="0" cy="0"/>
+          <a:chOff x="0" y="0"/>
+          <a:chExt cx="0" cy="0"/>
+        </a:xfrm>
+      </p:grpSpPr>
+      <p:sp>
+        <p:nvSpPr>
+          <p:cNvPr id="2" name="Slide Image Placeholder 1"/>
+          <p:cNvSpPr>
+            <a:spLocks noGrp="1"/>
+          </p:cNvSpPr>
+          <p:nvPr>
+            <p:ph type="sldImg" idx="2"/>
+          </p:nvPr>
+        </p:nvSpPr>
+        <p:spPr/>
+      </p:sp>
+      <p:sp>
+        <p:nvSpPr>
+          <p:cNvPr id="3" name="Notes Placeholder 2"/>
+          <p:cNvSpPr>
+            <a:spLocks noGrp="1"/>
+          </p:cNvSpPr>
+          <p:nvPr>
+            <p:ph type="body" idx="3" sz="quarter"/>
+          </p:nvPr>
+        </p:nvSpPr>
+        <p:spPr/>
+        <p:txBody>
+          <a:bodyPr/>
+          <a:lstStyle/>
+          <a:p>
+            <a:r>
+              <a:t>Each check, what it found, and how the pipeline handles it.</a:t>
+            </a:r>
+          </a:p>
+        </p:txBody>
+      </p:sp>
+      <p:sp>
+        <p:nvSpPr>
+          <p:cNvPr id="4" name="Slide Number Placeholder 3"/>
+          <p:cNvSpPr>
+            <a:spLocks noGrp="1"/>
+          </p:cNvSpPr>
+          <p:nvPr>
+            <p:ph type="sldNum" idx="5" sz="quarter"/>
+          </p:nvPr>
+        </p:nvSpPr>
+        <p:spPr/>
+      </p:sp>
+    </p:spTree>
+  </p:cSld>
+  <p:clrMapOvr>
+    <a:masterClrMapping/>
+  </p:clrMapOvr>
+</p:notes>
+</file>
+
+<file path=ppt/notesSlides/notesSlide13.xml><?xml version="1.0" encoding="utf-8"?>
 <p:notes xmlns:a="http://schemas.openxmlformats.org/drawingml/2006/main" xmlns:p="http://schemas.openxmlformats.org/presentationml/2006/main" xmlns:r="http://schemas.openxmlformats.org/officeDocument/2006/relationships">
   <p:cSld>
     <p:spTree>
@@ -4985,7 +5056,7 @@
                 </a:solidFill>
                 <a:latin typeface="Arial"/>
               </a:rPr>
-              <a:t>BACKUP</a:t>
+              <a:t>FROM ANALYSIS TO MONITORING</a:t>
             </a:r>
           </a:p>
         </p:txBody>
@@ -5027,7 +5098,7 @@
                 </a:solidFill>
                 <a:latin typeface="Georgia"/>
               </a:rPr>
-              <a:t>Results by brand</a:t>
+              <a:t>The indicators, built into a publisher monitor</a:t>
             </a:r>
           </a:p>
         </p:txBody>
@@ -5170,6 +5241,762 @@
                 <a:latin typeface="Arial"/>
               </a:rPr>
               <a:t>10</a:t>
+            </a:r>
+          </a:p>
+        </p:txBody>
+      </p:sp>
+      <p:pic>
+        <p:nvPicPr>
+          <p:cNvPr id="8" name="Picture 7" descr="dashboard_overview.png"/>
+          <p:cNvPicPr>
+            <a:picLocks noChangeAspect="1"/>
+          </p:cNvPicPr>
+          <p:nvPr/>
+        </p:nvPicPr>
+        <p:blipFill>
+          <a:blip r:embed="rId3"/>
+          <a:stretch>
+            <a:fillRect/>
+          </a:stretch>
+        </p:blipFill>
+        <p:spPr>
+          <a:xfrm>
+            <a:off x="548640" y="1463040"/>
+            <a:ext cx="5760720" cy="3577947"/>
+          </a:xfrm>
+          <a:prstGeom prst="rect">
+            <a:avLst/>
+          </a:prstGeom>
+        </p:spPr>
+      </p:pic>
+      <p:sp>
+        <p:nvSpPr>
+          <p:cNvPr id="9" name="Rectangle 8"/>
+          <p:cNvSpPr/>
+          <p:nvPr/>
+        </p:nvSpPr>
+        <p:spPr>
+          <a:xfrm>
+            <a:off x="548640" y="1463040"/>
+            <a:ext cx="5760720" cy="3577947"/>
+          </a:xfrm>
+          <a:prstGeom prst="rect">
+            <a:avLst/>
+          </a:prstGeom>
+          <a:noFill/>
+          <a:ln w="9525">
+            <a:solidFill>
+              <a:srgbClr val="E3E8EE"/>
+            </a:solidFill>
+          </a:ln>
+        </p:spPr>
+        <p:txBody>
+          <a:bodyPr rtlCol="0" anchor="ctr"/>
+          <a:lstStyle/>
+          <a:p>
+            <a:pPr algn="ctr"/>
+          </a:p>
+        </p:txBody>
+      </p:sp>
+      <p:sp>
+        <p:nvSpPr>
+          <p:cNvPr id="10" name="Oval 9"/>
+          <p:cNvSpPr/>
+          <p:nvPr/>
+        </p:nvSpPr>
+        <p:spPr>
+          <a:xfrm>
+            <a:off x="6675120" y="1554480"/>
+            <a:ext cx="329184" cy="329184"/>
+          </a:xfrm>
+          <a:prstGeom prst="ellipse">
+            <a:avLst/>
+          </a:prstGeom>
+          <a:solidFill>
+            <a:srgbClr val="FF9438"/>
+          </a:solidFill>
+          <a:ln>
+            <a:noFill/>
+          </a:ln>
+        </p:spPr>
+        <p:txBody>
+          <a:bodyPr rtlCol="0" anchor="ctr" wrap="square" lIns="0" rIns="0" tIns="18288" bIns="18288">
+            <a:noAutofit/>
+          </a:bodyPr>
+          <a:lstStyle/>
+          <a:p>
+            <a:pPr algn="ctr">
+              <a:lnSpc>
+                <a:spcPct val="110000"/>
+              </a:lnSpc>
+              <a:spcAft>
+                <a:spcPts val="0"/>
+              </a:spcAft>
+            </a:pPr>
+            <a:r>
+              <a:rPr sz="1200" i="0" b="1">
+                <a:solidFill>
+                  <a:srgbClr val="FFFFFF"/>
+                </a:solidFill>
+                <a:latin typeface="Arial"/>
+              </a:rPr>
+              <a:t>1</a:t>
+            </a:r>
+          </a:p>
+        </p:txBody>
+      </p:sp>
+      <p:sp>
+        <p:nvSpPr>
+          <p:cNvPr id="11" name="TextBox 10"/>
+          <p:cNvSpPr txBox="1"/>
+          <p:nvPr/>
+        </p:nvSpPr>
+        <p:spPr>
+          <a:xfrm>
+            <a:off x="7150608" y="1536192"/>
+            <a:ext cx="4492447" cy="292608"/>
+          </a:xfrm>
+          <a:prstGeom prst="rect">
+            <a:avLst/>
+          </a:prstGeom>
+          <a:noFill/>
+        </p:spPr>
+        <p:txBody>
+          <a:bodyPr wrap="square" lIns="0" rIns="0" tIns="0" bIns="0" anchor="t">
+            <a:noAutofit/>
+          </a:bodyPr>
+          <a:lstStyle/>
+          <a:p>
+            <a:pPr algn="l">
+              <a:lnSpc>
+                <a:spcPct val="110000"/>
+              </a:lnSpc>
+              <a:spcAft>
+                <a:spcPts val="0"/>
+              </a:spcAft>
+            </a:pPr>
+            <a:r>
+              <a:rPr sz="1500" i="0" b="1">
+                <a:solidFill>
+                  <a:srgbClr val="0B2A4A"/>
+                </a:solidFill>
+                <a:latin typeface="Arial"/>
+              </a:rPr>
+              <a:t>Any look-back, one click</a:t>
+            </a:r>
+          </a:p>
+        </p:txBody>
+      </p:sp>
+      <p:sp>
+        <p:nvSpPr>
+          <p:cNvPr id="12" name="TextBox 11"/>
+          <p:cNvSpPr txBox="1"/>
+          <p:nvPr/>
+        </p:nvSpPr>
+        <p:spPr>
+          <a:xfrm>
+            <a:off x="7150608" y="1856231"/>
+            <a:ext cx="4492447" cy="685800"/>
+          </a:xfrm>
+          <a:prstGeom prst="rect">
+            <a:avLst/>
+          </a:prstGeom>
+          <a:noFill/>
+        </p:spPr>
+        <p:txBody>
+          <a:bodyPr wrap="square" lIns="0" rIns="0" tIns="0" bIns="0" anchor="t">
+            <a:noAutofit/>
+          </a:bodyPr>
+          <a:lstStyle/>
+          <a:p>
+            <a:pPr algn="l">
+              <a:lnSpc>
+                <a:spcPct val="105000"/>
+              </a:lnSpc>
+              <a:spcAft>
+                <a:spcPts val="0"/>
+              </a:spcAft>
+            </a:pPr>
+            <a:r>
+              <a:rPr sz="1250" i="0" b="0">
+                <a:solidFill>
+                  <a:srgbClr val="647282"/>
+                </a:solidFill>
+                <a:latin typeface="Arial"/>
+              </a:rPr>
+              <a:t>Every click re-scored at 2, 10 or 30 minutes; the sensitivity test becomes a control</a:t>
+            </a:r>
+          </a:p>
+        </p:txBody>
+      </p:sp>
+      <p:sp>
+        <p:nvSpPr>
+          <p:cNvPr id="13" name="Oval 12"/>
+          <p:cNvSpPr/>
+          <p:nvPr/>
+        </p:nvSpPr>
+        <p:spPr>
+          <a:xfrm>
+            <a:off x="6675120" y="2697480"/>
+            <a:ext cx="329184" cy="329184"/>
+          </a:xfrm>
+          <a:prstGeom prst="ellipse">
+            <a:avLst/>
+          </a:prstGeom>
+          <a:solidFill>
+            <a:srgbClr val="FF9438"/>
+          </a:solidFill>
+          <a:ln>
+            <a:noFill/>
+          </a:ln>
+        </p:spPr>
+        <p:txBody>
+          <a:bodyPr rtlCol="0" anchor="ctr" wrap="square" lIns="0" rIns="0" tIns="18288" bIns="18288">
+            <a:noAutofit/>
+          </a:bodyPr>
+          <a:lstStyle/>
+          <a:p>
+            <a:pPr algn="ctr">
+              <a:lnSpc>
+                <a:spcPct val="110000"/>
+              </a:lnSpc>
+              <a:spcAft>
+                <a:spcPts val="0"/>
+              </a:spcAft>
+            </a:pPr>
+            <a:r>
+              <a:rPr sz="1200" i="0" b="1">
+                <a:solidFill>
+                  <a:srgbClr val="FFFFFF"/>
+                </a:solidFill>
+                <a:latin typeface="Arial"/>
+              </a:rPr>
+              <a:t>2</a:t>
+            </a:r>
+          </a:p>
+        </p:txBody>
+      </p:sp>
+      <p:sp>
+        <p:nvSpPr>
+          <p:cNvPr id="14" name="TextBox 13"/>
+          <p:cNvSpPr txBox="1"/>
+          <p:nvPr/>
+        </p:nvSpPr>
+        <p:spPr>
+          <a:xfrm>
+            <a:off x="7150608" y="2679192"/>
+            <a:ext cx="4492447" cy="292608"/>
+          </a:xfrm>
+          <a:prstGeom prst="rect">
+            <a:avLst/>
+          </a:prstGeom>
+          <a:noFill/>
+        </p:spPr>
+        <p:txBody>
+          <a:bodyPr wrap="square" lIns="0" rIns="0" tIns="0" bIns="0" anchor="t">
+            <a:noAutofit/>
+          </a:bodyPr>
+          <a:lstStyle/>
+          <a:p>
+            <a:pPr algn="l">
+              <a:lnSpc>
+                <a:spcPct val="110000"/>
+              </a:lnSpc>
+              <a:spcAft>
+                <a:spcPts val="0"/>
+              </a:spcAft>
+            </a:pPr>
+            <a:r>
+              <a:rPr sz="1500" i="0" b="1">
+                <a:solidFill>
+                  <a:srgbClr val="0B2A4A"/>
+                </a:solidFill>
+                <a:latin typeface="Arial"/>
+              </a:rPr>
+              <a:t>Ranked by money, with a status</a:t>
+            </a:r>
+          </a:p>
+        </p:txBody>
+      </p:sp>
+      <p:sp>
+        <p:nvSpPr>
+          <p:cNvPr id="15" name="TextBox 14"/>
+          <p:cNvSpPr txBox="1"/>
+          <p:nvPr/>
+        </p:nvSpPr>
+        <p:spPr>
+          <a:xfrm>
+            <a:off x="7150608" y="2999232"/>
+            <a:ext cx="4492447" cy="685800"/>
+          </a:xfrm>
+          <a:prstGeom prst="rect">
+            <a:avLst/>
+          </a:prstGeom>
+          <a:noFill/>
+        </p:spPr>
+        <p:txBody>
+          <a:bodyPr wrap="square" lIns="0" rIns="0" tIns="0" bIns="0" anchor="t">
+            <a:noAutofit/>
+          </a:bodyPr>
+          <a:lstStyle/>
+          <a:p>
+            <a:pPr algn="l">
+              <a:lnSpc>
+                <a:spcPct val="105000"/>
+              </a:lnSpc>
+              <a:spcAft>
+                <a:spcPts val="0"/>
+              </a:spcAft>
+            </a:pPr>
+            <a:r>
+              <a:rPr sz="1250" i="0" b="0">
+                <a:solidFill>
+                  <a:srgbClr val="647282"/>
+                </a:solidFill>
+                <a:latin typeface="Arial"/>
+              </a:rPr>
+              <a:t>Hold, Review or OK per publisher, by commission on flagged orders; AOV and rate are inputs</a:t>
+            </a:r>
+          </a:p>
+        </p:txBody>
+      </p:sp>
+      <p:sp>
+        <p:nvSpPr>
+          <p:cNvPr id="16" name="Oval 15"/>
+          <p:cNvSpPr/>
+          <p:nvPr/>
+        </p:nvSpPr>
+        <p:spPr>
+          <a:xfrm>
+            <a:off x="6675120" y="3840480"/>
+            <a:ext cx="329184" cy="329184"/>
+          </a:xfrm>
+          <a:prstGeom prst="ellipse">
+            <a:avLst/>
+          </a:prstGeom>
+          <a:solidFill>
+            <a:srgbClr val="FF9438"/>
+          </a:solidFill>
+          <a:ln>
+            <a:noFill/>
+          </a:ln>
+        </p:spPr>
+        <p:txBody>
+          <a:bodyPr rtlCol="0" anchor="ctr" wrap="square" lIns="0" rIns="0" tIns="18288" bIns="18288">
+            <a:noAutofit/>
+          </a:bodyPr>
+          <a:lstStyle/>
+          <a:p>
+            <a:pPr algn="ctr">
+              <a:lnSpc>
+                <a:spcPct val="110000"/>
+              </a:lnSpc>
+              <a:spcAft>
+                <a:spcPts val="0"/>
+              </a:spcAft>
+            </a:pPr>
+            <a:r>
+              <a:rPr sz="1200" i="0" b="1">
+                <a:solidFill>
+                  <a:srgbClr val="FFFFFF"/>
+                </a:solidFill>
+                <a:latin typeface="Arial"/>
+              </a:rPr>
+              <a:t>3</a:t>
+            </a:r>
+          </a:p>
+        </p:txBody>
+      </p:sp>
+      <p:sp>
+        <p:nvSpPr>
+          <p:cNvPr id="17" name="TextBox 16"/>
+          <p:cNvSpPr txBox="1"/>
+          <p:nvPr/>
+        </p:nvSpPr>
+        <p:spPr>
+          <a:xfrm>
+            <a:off x="7150608" y="3822192"/>
+            <a:ext cx="4492447" cy="292608"/>
+          </a:xfrm>
+          <a:prstGeom prst="rect">
+            <a:avLst/>
+          </a:prstGeom>
+          <a:noFill/>
+        </p:spPr>
+        <p:txBody>
+          <a:bodyPr wrap="square" lIns="0" rIns="0" tIns="0" bIns="0" anchor="t">
+            <a:noAutofit/>
+          </a:bodyPr>
+          <a:lstStyle/>
+          <a:p>
+            <a:pPr algn="l">
+              <a:lnSpc>
+                <a:spcPct val="110000"/>
+              </a:lnSpc>
+              <a:spcAft>
+                <a:spcPts val="0"/>
+              </a:spcAft>
+            </a:pPr>
+            <a:r>
+              <a:rPr sz="1500" i="0" b="1">
+                <a:solidFill>
+                  <a:srgbClr val="0B2A4A"/>
+                </a:solidFill>
+                <a:latin typeface="Arial"/>
+              </a:rPr>
+              <a:t>Every flag has a journey</a:t>
+            </a:r>
+          </a:p>
+        </p:txBody>
+      </p:sp>
+      <p:sp>
+        <p:nvSpPr>
+          <p:cNvPr id="18" name="TextBox 17"/>
+          <p:cNvSpPr txBox="1"/>
+          <p:nvPr/>
+        </p:nvSpPr>
+        <p:spPr>
+          <a:xfrm>
+            <a:off x="7150608" y="4142232"/>
+            <a:ext cx="4492447" cy="685800"/>
+          </a:xfrm>
+          <a:prstGeom prst="rect">
+            <a:avLst/>
+          </a:prstGeom>
+          <a:noFill/>
+        </p:spPr>
+        <p:txBody>
+          <a:bodyPr wrap="square" lIns="0" rIns="0" tIns="0" bIns="0" anchor="t">
+            <a:noAutofit/>
+          </a:bodyPr>
+          <a:lstStyle/>
+          <a:p>
+            <a:pPr algn="l">
+              <a:lnSpc>
+                <a:spcPct val="105000"/>
+              </a:lnSpc>
+              <a:spcAft>
+                <a:spcPts val="0"/>
+              </a:spcAft>
+            </a:pPr>
+            <a:r>
+              <a:rPr sz="1250" i="0" b="0">
+                <a:solidFill>
+                  <a:srgbClr val="647282"/>
+                </a:solidFill>
+                <a:latin typeface="Arial"/>
+              </a:rPr>
+              <a:t>The sites before and after each click, so a reviewer sees the evidence, not a score</a:t>
+            </a:r>
+          </a:p>
+        </p:txBody>
+      </p:sp>
+      <p:sp>
+        <p:nvSpPr>
+          <p:cNvPr id="19" name="TextBox 18"/>
+          <p:cNvSpPr txBox="1"/>
+          <p:nvPr/>
+        </p:nvSpPr>
+        <p:spPr>
+          <a:xfrm>
+            <a:off x="548640" y="5166360"/>
+            <a:ext cx="11094415" cy="256032"/>
+          </a:xfrm>
+          <a:prstGeom prst="rect">
+            <a:avLst/>
+          </a:prstGeom>
+          <a:noFill/>
+        </p:spPr>
+        <p:txBody>
+          <a:bodyPr wrap="square" lIns="0" rIns="0" tIns="0" bIns="0" anchor="t">
+            <a:noAutofit/>
+          </a:bodyPr>
+          <a:lstStyle/>
+          <a:p>
+            <a:pPr algn="l">
+              <a:lnSpc>
+                <a:spcPct val="110000"/>
+              </a:lnSpc>
+              <a:spcAft>
+                <a:spcPts val="0"/>
+              </a:spcAft>
+            </a:pPr>
+            <a:r>
+              <a:rPr sz="1200" i="0" b="1">
+                <a:solidFill>
+                  <a:srgbClr val="647282"/>
+                </a:solidFill>
+                <a:latin typeface="Arial"/>
+              </a:rPr>
+              <a:t>One of impact:150372's 32 orders: the click "lands" on the order confirmation page</a:t>
+            </a:r>
+          </a:p>
+        </p:txBody>
+      </p:sp>
+      <p:pic>
+        <p:nvPicPr>
+          <p:cNvPr id="20" name="Picture 19" descr="dashboard_journey.png"/>
+          <p:cNvPicPr>
+            <a:picLocks noChangeAspect="1"/>
+          </p:cNvPicPr>
+          <p:nvPr/>
+        </p:nvPicPr>
+        <p:blipFill>
+          <a:blip r:embed="rId4"/>
+          <a:stretch>
+            <a:fillRect/>
+          </a:stretch>
+        </p:blipFill>
+        <p:spPr>
+          <a:xfrm>
+            <a:off x="548640" y="5458968"/>
+            <a:ext cx="9430252" cy="733006"/>
+          </a:xfrm>
+          <a:prstGeom prst="rect">
+            <a:avLst/>
+          </a:prstGeom>
+        </p:spPr>
+      </p:pic>
+    </p:spTree>
+  </p:cSld>
+  <p:clrMapOvr>
+    <a:masterClrMapping/>
+  </p:clrMapOvr>
+</p:sld>
+</file>
+
+<file path=ppt/slides/slide11.xml><?xml version="1.0" encoding="utf-8"?>
+<p:sld xmlns:a="http://schemas.openxmlformats.org/drawingml/2006/main" xmlns:p="http://schemas.openxmlformats.org/presentationml/2006/main" xmlns:r="http://schemas.openxmlformats.org/officeDocument/2006/relationships">
+  <p:cSld>
+    <p:spTree>
+      <p:nvGrpSpPr>
+        <p:cNvPr id="1" name=""/>
+        <p:cNvGrpSpPr/>
+        <p:nvPr/>
+      </p:nvGrpSpPr>
+      <p:grpSpPr/>
+      <p:sp>
+        <p:nvSpPr>
+          <p:cNvPr id="2" name="TextBox 1"/>
+          <p:cNvSpPr txBox="1"/>
+          <p:nvPr/>
+        </p:nvSpPr>
+        <p:spPr>
+          <a:xfrm>
+            <a:off x="548640" y="384048"/>
+            <a:ext cx="9144000" cy="274320"/>
+          </a:xfrm>
+          <a:prstGeom prst="rect">
+            <a:avLst/>
+          </a:prstGeom>
+          <a:noFill/>
+        </p:spPr>
+        <p:txBody>
+          <a:bodyPr wrap="square" lIns="0" rIns="0" tIns="0" bIns="0" anchor="t">
+            <a:noAutofit/>
+          </a:bodyPr>
+          <a:lstStyle/>
+          <a:p>
+            <a:pPr algn="l">
+              <a:lnSpc>
+                <a:spcPct val="110000"/>
+              </a:lnSpc>
+              <a:spcAft>
+                <a:spcPts val="0"/>
+              </a:spcAft>
+            </a:pPr>
+            <a:r>
+              <a:rPr sz="1100" i="0" b="1" spc="150">
+                <a:solidFill>
+                  <a:srgbClr val="C9620E"/>
+                </a:solidFill>
+                <a:latin typeface="Arial"/>
+              </a:rPr>
+              <a:t>BACKUP</a:t>
+            </a:r>
+          </a:p>
+        </p:txBody>
+      </p:sp>
+      <p:sp>
+        <p:nvSpPr>
+          <p:cNvPr id="3" name="TextBox 2"/>
+          <p:cNvSpPr txBox="1"/>
+          <p:nvPr/>
+        </p:nvSpPr>
+        <p:spPr>
+          <a:xfrm>
+            <a:off x="548640" y="658368"/>
+            <a:ext cx="11094415" cy="685800"/>
+          </a:xfrm>
+          <a:prstGeom prst="rect">
+            <a:avLst/>
+          </a:prstGeom>
+          <a:noFill/>
+        </p:spPr>
+        <p:txBody>
+          <a:bodyPr wrap="square" lIns="0" rIns="0" tIns="0" bIns="0" anchor="t">
+            <a:noAutofit/>
+          </a:bodyPr>
+          <a:lstStyle/>
+          <a:p>
+            <a:pPr algn="l">
+              <a:lnSpc>
+                <a:spcPct val="100000"/>
+              </a:lnSpc>
+              <a:spcAft>
+                <a:spcPts val="0"/>
+              </a:spcAft>
+            </a:pPr>
+            <a:r>
+              <a:rPr sz="3200" i="0" b="0">
+                <a:solidFill>
+                  <a:srgbClr val="0B2A4A"/>
+                </a:solidFill>
+                <a:latin typeface="Georgia"/>
+              </a:rPr>
+              <a:t>Results by brand</a:t>
+            </a:r>
+          </a:p>
+        </p:txBody>
+      </p:sp>
+      <p:sp>
+        <p:nvSpPr>
+          <p:cNvPr id="4" name="TextBox 3"/>
+          <p:cNvSpPr txBox="1"/>
+          <p:nvPr/>
+        </p:nvSpPr>
+        <p:spPr>
+          <a:xfrm>
+            <a:off x="548640" y="6419088"/>
+            <a:ext cx="8229600" cy="228600"/>
+          </a:xfrm>
+          <a:prstGeom prst="rect">
+            <a:avLst/>
+          </a:prstGeom>
+          <a:noFill/>
+        </p:spPr>
+        <p:txBody>
+          <a:bodyPr wrap="square" lIns="0" rIns="0" tIns="0" bIns="0" anchor="t">
+            <a:noAutofit/>
+          </a:bodyPr>
+          <a:lstStyle/>
+          <a:p>
+            <a:pPr algn="l">
+              <a:lnSpc>
+                <a:spcPct val="110000"/>
+              </a:lnSpc>
+              <a:spcAft>
+                <a:spcPts val="0"/>
+              </a:spcAft>
+            </a:pPr>
+            <a:r>
+              <a:rPr sz="900" i="0" b="0">
+                <a:solidFill>
+                  <a:srgbClr val="647282"/>
+                </a:solidFill>
+                <a:latin typeface="Arial"/>
+              </a:rPr>
+              <a:t>Saatva affiliate analysis  ·  Hagay Gross</a:t>
+            </a:r>
+          </a:p>
+        </p:txBody>
+      </p:sp>
+      <p:sp>
+        <p:nvSpPr>
+          <p:cNvPr id="5" name="Oval 4"/>
+          <p:cNvSpPr/>
+          <p:nvPr/>
+        </p:nvSpPr>
+        <p:spPr>
+          <a:xfrm>
+            <a:off x="11185855" y="6460236"/>
+            <a:ext cx="128016" cy="128016"/>
+          </a:xfrm>
+          <a:prstGeom prst="ellipse">
+            <a:avLst/>
+          </a:prstGeom>
+          <a:solidFill>
+            <a:srgbClr val="FF9438"/>
+          </a:solidFill>
+          <a:ln>
+            <a:noFill/>
+          </a:ln>
+        </p:spPr>
+        <p:txBody>
+          <a:bodyPr rtlCol="0" anchor="ctr"/>
+          <a:lstStyle/>
+          <a:p>
+            <a:pPr algn="ctr"/>
+          </a:p>
+        </p:txBody>
+      </p:sp>
+      <p:sp>
+        <p:nvSpPr>
+          <p:cNvPr id="6" name="Oval 5"/>
+          <p:cNvSpPr/>
+          <p:nvPr/>
+        </p:nvSpPr>
+        <p:spPr>
+          <a:xfrm>
+            <a:off x="11268151" y="6460236"/>
+            <a:ext cx="128016" cy="128016"/>
+          </a:xfrm>
+          <a:prstGeom prst="ellipse">
+            <a:avLst/>
+          </a:prstGeom>
+          <a:solidFill>
+            <a:srgbClr val="368EF8"/>
+          </a:solidFill>
+          <a:ln>
+            <a:noFill/>
+          </a:ln>
+        </p:spPr>
+        <p:txBody>
+          <a:bodyPr rtlCol="0" anchor="ctr"/>
+          <a:lstStyle/>
+          <a:p>
+            <a:pPr algn="ctr"/>
+          </a:p>
+        </p:txBody>
+      </p:sp>
+      <p:sp>
+        <p:nvSpPr>
+          <p:cNvPr id="7" name="TextBox 6"/>
+          <p:cNvSpPr txBox="1"/>
+          <p:nvPr/>
+        </p:nvSpPr>
+        <p:spPr>
+          <a:xfrm>
+            <a:off x="11441887" y="6419088"/>
+            <a:ext cx="201168" cy="228600"/>
+          </a:xfrm>
+          <a:prstGeom prst="rect">
+            <a:avLst/>
+          </a:prstGeom>
+          <a:noFill/>
+        </p:spPr>
+        <p:txBody>
+          <a:bodyPr wrap="square" lIns="0" rIns="0" tIns="0" bIns="0" anchor="t">
+            <a:noAutofit/>
+          </a:bodyPr>
+          <a:lstStyle/>
+          <a:p>
+            <a:pPr algn="r">
+              <a:lnSpc>
+                <a:spcPct val="110000"/>
+              </a:lnSpc>
+              <a:spcAft>
+                <a:spcPts val="0"/>
+              </a:spcAft>
+            </a:pPr>
+            <a:r>
+              <a:rPr sz="900" i="0" b="0">
+                <a:solidFill>
+                  <a:srgbClr val="647282"/>
+                </a:solidFill>
+                <a:latin typeface="Arial"/>
+              </a:rPr>
+              <a:t>11</a:t>
             </a:r>
           </a:p>
         </p:txBody>
@@ -7684,7 +8511,7 @@
 </p:sld>
 </file>
 
-<file path=ppt/slides/slide11.xml><?xml version="1.0" encoding="utf-8"?>
+<file path=ppt/slides/slide12.xml><?xml version="1.0" encoding="utf-8"?>
 <p:sld xmlns:a="http://schemas.openxmlformats.org/drawingml/2006/main" xmlns:p="http://schemas.openxmlformats.org/presentationml/2006/main" xmlns:r="http://schemas.openxmlformats.org/officeDocument/2006/relationships">
   <p:cSld>
     <p:spTree>
@@ -7915,7 +8742,7 @@
                 </a:solidFill>
                 <a:latin typeface="Arial"/>
               </a:rPr>
-              <a:t>11</a:t>
+              <a:t>12</a:t>
             </a:r>
           </a:p>
         </p:txBody>
@@ -9021,7 +9848,7 @@
 </p:sld>
 </file>
 
-<file path=ppt/slides/slide12.xml><?xml version="1.0" encoding="utf-8"?>
+<file path=ppt/slides/slide13.xml><?xml version="1.0" encoding="utf-8"?>
 <p:sld xmlns:a="http://schemas.openxmlformats.org/drawingml/2006/main" xmlns:p="http://schemas.openxmlformats.org/presentationml/2006/main" xmlns:r="http://schemas.openxmlformats.org/officeDocument/2006/relationships">
   <p:cSld>
     <p:spTree>
@@ -9252,7 +10079,7 @@
                 </a:solidFill>
                 <a:latin typeface="Arial"/>
               </a:rPr>
-              <a:t>12</a:t>
+              <a:t>13</a:t>
             </a:r>
           </a:p>
         </p:txBody>
@@ -23406,7 +24233,7 @@
                 </a:solidFill>
                 <a:latin typeface="Arial"/>
               </a:rPr>
-              <a:t>Plus extension stand-down and a PPC and trademark policy</a:t>
+              <a:t>Cart-stage clicks add no orders (slide 7); plus extension stand-down, PPC policy</a:t>
             </a:r>
           </a:p>
         </p:txBody>
@@ -23495,7 +24322,7 @@
                 </a:solidFill>
                 <a:latin typeface="Arial"/>
               </a:rPr>
-              <a:t>Monitor six indicators per publisher</a:t>
+              <a:t>Monitor every publisher (built: next slide)</a:t>
             </a:r>
           </a:p>
         </p:txBody>

--- a/deck/saatva_affiliate_analysis.pptx
+++ b/deck/saatva_affiliate_analysis.pptx
@@ -5262,7 +5262,7 @@
         <p:spPr>
           <a:xfrm>
             <a:off x="548640" y="1463040"/>
-            <a:ext cx="5760720" cy="3577947"/>
+            <a:ext cx="5394960" cy="3624739"/>
           </a:xfrm>
           <a:prstGeom prst="rect">
             <a:avLst/>
@@ -5278,7 +5278,7 @@
         <p:spPr>
           <a:xfrm>
             <a:off x="548640" y="1463040"/>
-            <a:ext cx="5760720" cy="3577947"/>
+            <a:ext cx="5394960" cy="3624738"/>
           </a:xfrm>
           <a:prstGeom prst="rect">
             <a:avLst/>
@@ -5306,7 +5306,7 @@
         </p:nvSpPr>
         <p:spPr>
           <a:xfrm>
-            <a:off x="6675120" y="1554480"/>
+            <a:off x="6400800" y="1554480"/>
             <a:ext cx="329184" cy="329184"/>
           </a:xfrm>
           <a:prstGeom prst="ellipse">
@@ -5353,8 +5353,8 @@
         </p:nvSpPr>
         <p:spPr>
           <a:xfrm>
-            <a:off x="7150608" y="1536192"/>
-            <a:ext cx="4492447" cy="292608"/>
+            <a:off x="6876288" y="1536192"/>
+            <a:ext cx="4766767" cy="292608"/>
           </a:xfrm>
           <a:prstGeom prst="rect">
             <a:avLst/>
@@ -5395,8 +5395,8 @@
         </p:nvSpPr>
         <p:spPr>
           <a:xfrm>
-            <a:off x="7150608" y="1856231"/>
-            <a:ext cx="4492447" cy="685800"/>
+            <a:off x="6876288" y="1856231"/>
+            <a:ext cx="4766767" cy="685800"/>
           </a:xfrm>
           <a:prstGeom prst="rect">
             <a:avLst/>
@@ -5437,7 +5437,7 @@
         </p:nvSpPr>
         <p:spPr>
           <a:xfrm>
-            <a:off x="6675120" y="2697480"/>
+            <a:off x="6400800" y="2697480"/>
             <a:ext cx="329184" cy="329184"/>
           </a:xfrm>
           <a:prstGeom prst="ellipse">
@@ -5484,8 +5484,8 @@
         </p:nvSpPr>
         <p:spPr>
           <a:xfrm>
-            <a:off x="7150608" y="2679192"/>
-            <a:ext cx="4492447" cy="292608"/>
+            <a:off x="6876288" y="2679192"/>
+            <a:ext cx="4766767" cy="292608"/>
           </a:xfrm>
           <a:prstGeom prst="rect">
             <a:avLst/>
@@ -5526,8 +5526,8 @@
         </p:nvSpPr>
         <p:spPr>
           <a:xfrm>
-            <a:off x="7150608" y="2999232"/>
-            <a:ext cx="4492447" cy="685800"/>
+            <a:off x="6876288" y="2999232"/>
+            <a:ext cx="4766767" cy="685800"/>
           </a:xfrm>
           <a:prstGeom prst="rect">
             <a:avLst/>
@@ -5568,7 +5568,7 @@
         </p:nvSpPr>
         <p:spPr>
           <a:xfrm>
-            <a:off x="6675120" y="3840480"/>
+            <a:off x="6400800" y="3840480"/>
             <a:ext cx="329184" cy="329184"/>
           </a:xfrm>
           <a:prstGeom prst="ellipse">
@@ -5615,8 +5615,8 @@
         </p:nvSpPr>
         <p:spPr>
           <a:xfrm>
-            <a:off x="7150608" y="3822192"/>
-            <a:ext cx="4492447" cy="292608"/>
+            <a:off x="6876288" y="3822192"/>
+            <a:ext cx="4766767" cy="292608"/>
           </a:xfrm>
           <a:prstGeom prst="rect">
             <a:avLst/>
@@ -5657,8 +5657,8 @@
         </p:nvSpPr>
         <p:spPr>
           <a:xfrm>
-            <a:off x="7150608" y="4142232"/>
-            <a:ext cx="4492447" cy="685800"/>
+            <a:off x="6876288" y="4142232"/>
+            <a:ext cx="4766767" cy="685800"/>
           </a:xfrm>
           <a:prstGeom prst="rect">
             <a:avLst/>
@@ -5699,7 +5699,7 @@
         </p:nvSpPr>
         <p:spPr>
           <a:xfrm>
-            <a:off x="548640" y="5166360"/>
+            <a:off x="548640" y="5230368"/>
             <a:ext cx="11094415" cy="256032"/>
           </a:xfrm>
           <a:prstGeom prst="rect">
@@ -5749,8 +5749,8 @@
         </p:blipFill>
         <p:spPr>
           <a:xfrm>
-            <a:off x="548640" y="5458968"/>
-            <a:ext cx="9430252" cy="733006"/>
+            <a:off x="548640" y="5522976"/>
+            <a:ext cx="9430252" cy="697646"/>
           </a:xfrm>
           <a:prstGeom prst="rect">
             <a:avLst/>

--- a/deck/saatva_affiliate_analysis.pptx
+++ b/deck/saatva_affiliate_analysis.pptx
@@ -1077,7 +1077,7 @@
           <a:lstStyle/>
           <a:p>
             <a:r>
-              <a:t>Validation changed the answer. 14.7% of rows were exact duplicates, and some people were recorded under two user ids, one a partial copy of the other; left as is, that inflated brand visits by 14–28% and orders by 20%. I merged ids that share three or more identical events. One pass selects the users who touched any of the five brands, so everything runs on 3.4% of the data, in about 30 seconds. Scaling: a factor calibrated on walmart.com recovers only 35–50% of the mattress sites' Similarweb traffic, because the panel under-covers that audience. The mattress brands therefore use a factor calibrated on the mattress sites themselves, which reproduces each brand within 0.89–1.27×. Caveat: Similarweb's latest public month is August, the Labor Day sale season.</a:t>
+              <a:t>Validation changed the answer. 14.7% of rows were exact duplicates, and some people were recorded under two user ids, one a partial copy of the other; left as is, that inflated brand visits by 14–28% and orders by 20%. I merged ids that share three or more identical events. One pass selects the users who touched any of the five brands, so everything runs on 3.4% of the data, in about 30 seconds. Scaling: a factor calibrated on walmart.com recovers only 35–50% of the mattress sites' Similarweb traffic, because the panel under-covers that audience. The mattress brands therefore use a factor calibrated on the mattress sites themselves, which reproduces each brand within 0.89–1.27×. Caveat: Similarweb's latest public month is August, while the panel day is 1 May. Google Trends puts mattress search interest around 1 May at 1.5–2.8× August, so moved to that day the mattress estimates roughly double (Saatva about 33K clicks a day). The headline keeps the August factor as the lower estimate.</a:t>
             </a:r>
           </a:p>
         </p:txBody>
@@ -8469,6 +8469,25 @@
                 <a:spcPct val="110000"/>
               </a:lnSpc>
               <a:spcAft>
+                <a:spcPts val="300"/>
+              </a:spcAft>
+            </a:pPr>
+            <a:r>
+              <a:rPr sz="1150" i="0" b="0">
+                <a:solidFill>
+                  <a:srgbClr val="647282"/>
+                </a:solidFill>
+                <a:latin typeface="Arial"/>
+              </a:rPr>
+              <a:t>Conservative: the Walmart-calibrated factor for the mattress brands, the population ratio for Walmart. 95% CI: Poisson sampling error of the panel count only.</a:t>
+            </a:r>
+          </a:p>
+          <a:p>
+            <a:pPr algn="l">
+              <a:lnSpc>
+                <a:spcPct val="110000"/>
+              </a:lnSpc>
+              <a:spcAft>
                 <a:spcPts val="1000"/>
               </a:spcAft>
             </a:pPr>
@@ -8479,7 +8498,7 @@
                 </a:solidFill>
                 <a:latin typeface="Arial"/>
               </a:rPr>
-              <a:t>Conservative: the Walmart-calibrated factor for the mattress brands, the population ratio for Walmart. 95% CI: Poisson sampling error of the panel count only.</a:t>
+              <a:t>Seasonality: calibrated on August traffic. Google Trends puts mattress search interest around 1 May at 1.5–2.8× August; moved to that day, mattress estimates roughly double (Saatva ~33K a day).</a:t>
             </a:r>
           </a:p>
           <a:p>
@@ -8498,7 +8517,7 @@
                 </a:solidFill>
                 <a:latin typeface="Arial"/>
               </a:rPr>
-              <a:t>Sources: Similarweb website pages (Aug 2026); DataReportal, Digital 2026 (324M US internet users); Grips Intelligence retailer pages (mattress conversion rates).</a:t>
+              <a:t>Sources: Similarweb website pages (Aug 2026); Google Trends (US, daily); DataReportal, Digital 2026 (324M US internet users); Grips Intelligence retailer pages (mattress conversion rates).</a:t>
             </a:r>
           </a:p>
         </p:txBody>

--- a/deck/saatva_affiliate_analysis.pptx
+++ b/deck/saatva_affiliate_analysis.pptx
@@ -24,6 +24,7 @@
     <p:sldId id="269" r:id="rId21"/>
     <p:sldId id="270" r:id="rId22"/>
     <p:sldId id="271" r:id="rId23"/>
+    <p:sldId id="272" r:id="rId24"/>
   </p:sldIdLst>
   <p:sldSz cx="12191695" cy="6858000"/>
   <p:notesSz cx="6858000" cy="9144000"/>
@@ -590,7 +591,7 @@
           <a:lstStyle/>
           <a:p>
             <a:r>
-              <a:t>The obvious objection to slides 8 and 9: shoppers in the cart convert at a high rate anyway, so of course these clicks convert. That is the point, and it can be tested. Take every US Walmart shopper at the moment they first view the cart, and separately the checkout. The stage is fixed before any click, and shoppers an affiliate brought to the cart are left out. Then compare those who got an affiliate click afterwards with those who did not. At the cart, 34.2% vs 31.7% order within two hours; at the checkout, 66.7% vs 75.8%. Across the 56 shoppers who got a click, 25 ordered; 25.7 would have without it. The interval is wide (ratio 0.63–1.44), so at most about 31% of these orders could be incremental, and the best estimate is none. The design favours the click, since a shopper who got one stayed on the site at least until it fired. Clicks fired at the cart carry half of Walmart's affiliate-credited orders. At an average order of $100–125 and 1–4% commission, that is $22.3M–111.3M a year paid for sales that were already happening. Saatva's panel has no orders to measure its share, so the Saatva figure is per 10% of orders hijacked: about $860 per order and 3–10% commission.</a:t>
+              <a:t>Where in the funnel does the affiliate click arrive? A genuine referral starts the visit: the shopper reads a publisher's page and clicks through. A hijacked click arrives at the bottom, once the shopper is already in the cart or at checkout. At Walmart, 78% of affiliate clicks start the visit, but they carry only 31% of the credited orders and convert at 0.7%. Clicks that fire after the cart are 3% of clicks and 42% of the orders, converting at 18–31%. The commission follows the last click, so it flows to the bottom of the funnel, where the publisher did the least. Stage = the furthest point on walmart.com in the 30 minutes before the click, since any earlier affiliate click.</a:t>
             </a:r>
           </a:p>
         </p:txBody>
@@ -660,7 +661,7 @@
           <a:lstStyle/>
           <a:p>
             <a:r>
-              <a:t>Three cases from Saatva's own clicks. One: a 'new tab' browser extension (newtab.club, via tatrck.com) fired a Partnerize click for Saatva (publisher camref 1011laqH9), but saatva.com never loaded; the user was on Sleep Number at the time. If they buy from Saatva within the cookie window, the extension is paid: that is cookie stuffing. Two: brandxemail is listed as an email publisher, but its click came from a Google ad (gad_source=1) and landed on /sale with an auto-applied coupon: a question for the PPC terms. Three: TrafficPoint, a paid-search listicle, sent one user to six brands within a minute. The user really browsed, so this is not stuffing, but nine minutes later they came back through a Google Shopping ad, likely Saatva's own, so Saatva may pay twice. The indicators should trigger a review, not an automatic penalty.</a:t>
+              <a:t>The obvious objection to slides 8 and 9: shoppers in the cart convert at a high rate anyway, so of course these clicks convert. That is the point, and it can be tested. Take every US Walmart shopper at the moment they first view the cart, and separately the checkout. The stage is fixed before any click, and shoppers an affiliate brought to the cart are left out. Then compare those who got an affiliate click afterwards with those who did not. At the cart, 34.2% vs 31.7% order within two hours; at the checkout, 66.7% vs 75.8%. Across the 56 shoppers who got a click, 25 ordered; 25.7 would have without it. The interval is wide (ratio 0.63–1.44), so at most about 31% of these orders could be incremental, and the best estimate is none. The design favours the click, since a shopper who got one stayed on the site at least until it fired. Clicks fired at the cart carry half of Walmart's affiliate-credited orders. At an average order of $100–125 and 1–4% commission, that is $22.3M–111.3M a year paid for sales that were already happening. Saatva's panel has no orders to measure its share, so the Saatva figure is per 10% of orders hijacked: about $860 per order and 3–10% commission.</a:t>
             </a:r>
           </a:p>
         </p:txBody>
@@ -730,7 +731,7 @@
           <a:lstStyle/>
           <a:p>
             <a:r>
-              <a:t>Grow: recruit the partner types the rivals already get traffic from: review sites like Mattress Clarity, buyer's guides like buyersguide.org, and HSA/FSA payment partners like Truemed. Give each publisher its own coupon code: today Mattress Nerd and TrafficPoint landings auto-apply the same code. Tier commissions: more for content and new customers, less for coupon clicks and for clicks after a cart exists. Protect: start by reconciling Partnerize click logs with saatva.com landings, because a click id that never lands is direct evidence. Then no commission overwrite after a cart exists, extension stand-down, a PPC and trademark policy, and weekly per-publisher monitoring of six indicators, with payouts held on flagged orders. Next step: the same pipeline on 90 days of data and on Saatva's own Partnerize logs, to size the impact.</a:t>
+              <a:t>Three cases from Saatva's own clicks. One: a 'new tab' browser extension (newtab.club, via tatrck.com) fired a Partnerize click for Saatva (publisher camref 1011laqH9), but saatva.com never loaded; the user was on Sleep Number at the time. If they buy from Saatva within the cookie window, the extension is paid: that is cookie stuffing. Two: brandxemail is listed as an email publisher, but its click came from a Google ad (gad_source=1) and landed on /sale with an auto-applied coupon: a question for the PPC terms. Three: TrafficPoint, a paid-search listicle, sent one user to six brands within a minute. The user really browsed, so this is not stuffing, but nine minutes later they came back through a Google Shopping ad, likely Saatva's own, so Saatva may pay twice. The indicators should trigger a review, not an automatic penalty.</a:t>
             </a:r>
           </a:p>
         </p:txBody>
@@ -800,7 +801,7 @@
           <a:lstStyle/>
           <a:p>
             <a:r>
-              <a:t>The recommendations need a tool a partner manager can use every week, so the pipeline also builds one: dashboard/publisher_risk_monitor.html, a single file that opens in any browser. It re-scores every affiliate click under the chosen look-back window, so the 2-to-30-minute sensitivity is a click, not a footnote. It ranks publishers by the commission paid on their flagged orders, with a Hold, Review or OK status, and the average order and commission are inputs. Every number can be traced to the journey behind a click. The strip at the bottom is one of them: a shopper browsed Walmart, reached checkout, and two seconds after a Bizrate redirect an Impact click 'landed' on the order confirmation page, in the same second as the order. The publisher, impact:150372, has 32 credited orders in the panel, 78% of them from flagged clicks. The same view works for Saatva today; with Partnerize's own click and order logs instead of a one-day panel, the counts behind each status would be complete.</a:t>
+              <a:t>Grow: recruit the partner types the rivals already get traffic from: review sites like Mattress Clarity, buyer's guides like buyersguide.org, and HSA/FSA payment partners like Truemed. Give each publisher its own coupon code: today Mattress Nerd and TrafficPoint landings auto-apply the same code. Tier commissions: more for content and new customers, less for coupon clicks and for clicks after a cart exists. Protect: start by reconciling Partnerize click logs with saatva.com landings, because a click id that never lands is direct evidence. Then no commission overwrite after a cart exists, extension stand-down, a PPC and trademark policy, and weekly per-publisher monitoring of six indicators, with payouts held on flagged orders. Next step: the same pipeline on 90 days of data and on Saatva's own Partnerize logs, to size the impact.</a:t>
             </a:r>
           </a:p>
         </p:txBody>
@@ -870,7 +871,7 @@
           <a:lstStyle/>
           <a:p>
             <a:r>
-              <a:t>Full results table. Conservative estimates use the Walmart-calibrated factor for the mattress brands and the population ratio for Walmart.</a:t>
+              <a:t>The recommendations need a tool a partner manager can use every week, so the pipeline also builds one: dashboard/publisher_risk_monitor.html, a single file that opens in any browser. It re-scores every affiliate click under the chosen look-back window, so the 2-to-30-minute sensitivity is a click, not a footnote. It ranks publishers by the commission paid on their flagged orders, with a Hold, Review or OK status, and the average order and commission are inputs. Every number can be traced to the journey behind a click. The strip at the bottom is one of them: a shopper browsed Walmart, reached checkout, and two seconds after a Bizrate redirect an Impact click 'landed' on the order confirmation page, in the same second as the order. The publisher, impact:150372, has 32 credited orders in the panel, 78% of them from flagged clicks. The same view works for Saatva today; with Partnerize's own click and order logs instead of a one-day panel, the counts behind each status would be complete.</a:t>
             </a:r>
           </a:p>
         </p:txBody>
@@ -940,7 +941,7 @@
           <a:lstStyle/>
           <a:p>
             <a:r>
-              <a:t>Each check, what it found, and how the pipeline handles it.</a:t>
+              <a:t>Full results table. Conservative estimates use the Walmart-calibrated factor for the mattress brands and the population ratio for Walmart.</a:t>
             </a:r>
           </a:p>
         </p:txBody>
@@ -1010,6 +1011,76 @@
           <a:lstStyle/>
           <a:p>
             <a:r>
+              <a:t>Each check, what it found, and how the pipeline handles it.</a:t>
+            </a:r>
+          </a:p>
+        </p:txBody>
+      </p:sp>
+      <p:sp>
+        <p:nvSpPr>
+          <p:cNvPr id="4" name="Slide Number Placeholder 3"/>
+          <p:cNvSpPr>
+            <a:spLocks noGrp="1"/>
+          </p:cNvSpPr>
+          <p:nvPr>
+            <p:ph type="sldNum" idx="5" sz="quarter"/>
+          </p:nvPr>
+        </p:nvSpPr>
+        <p:spPr/>
+      </p:sp>
+    </p:spTree>
+  </p:cSld>
+  <p:clrMapOvr>
+    <a:masterClrMapping/>
+  </p:clrMapOvr>
+</p:notes>
+</file>
+
+<file path=ppt/notesSlides/notesSlide17.xml><?xml version="1.0" encoding="utf-8"?>
+<p:notes xmlns:a="http://schemas.openxmlformats.org/drawingml/2006/main" xmlns:p="http://schemas.openxmlformats.org/presentationml/2006/main" xmlns:r="http://schemas.openxmlformats.org/officeDocument/2006/relationships">
+  <p:cSld>
+    <p:spTree>
+      <p:nvGrpSpPr>
+        <p:cNvPr id="1" name=""/>
+        <p:cNvGrpSpPr/>
+        <p:nvPr/>
+      </p:nvGrpSpPr>
+      <p:grpSpPr>
+        <a:xfrm>
+          <a:off x="0" y="0"/>
+          <a:ext cx="0" cy="0"/>
+          <a:chOff x="0" y="0"/>
+          <a:chExt cx="0" cy="0"/>
+        </a:xfrm>
+      </p:grpSpPr>
+      <p:sp>
+        <p:nvSpPr>
+          <p:cNvPr id="2" name="Slide Image Placeholder 1"/>
+          <p:cNvSpPr>
+            <a:spLocks noGrp="1"/>
+          </p:cNvSpPr>
+          <p:nvPr>
+            <p:ph type="sldImg" idx="2"/>
+          </p:nvPr>
+        </p:nvSpPr>
+        <p:spPr/>
+      </p:sp>
+      <p:sp>
+        <p:nvSpPr>
+          <p:cNvPr id="3" name="Notes Placeholder 2"/>
+          <p:cNvSpPr>
+            <a:spLocks noGrp="1"/>
+          </p:cNvSpPr>
+          <p:nvPr>
+            <p:ph type="body" idx="3" sz="quarter"/>
+          </p:nvPr>
+        </p:nvSpPr>
+        <p:spPr/>
+        <p:txBody>
+          <a:bodyPr/>
+          <a:lstStyle/>
+          <a:p>
+            <a:r>
               <a:t>Each click counts once, under its first-ranked indicator, so the Walmart columns add up to all 6,449 clicks. Strong indicators are highlighted.</a:t>
             </a:r>
           </a:p>
@@ -1080,7 +1151,7 @@
           <a:lstStyle/>
           <a:p>
             <a:r>
-              <a:t>Three numbers. First, 16% of Saatva's visits start with an affiliate click, against 4–11% for the other mattress brands, and Similarweb independently ranks affiliate as Saatva's #1 channel. Second, scaled to the US, that is about 16.7K affiliate clicks a day. The range is wide, 6.1K–36.4K, because it rests on six panel clicks; at category conversion rates it means roughly 84–334 orders a day. Third, where the data has volume (Walmart), the 13–24% of clicks that carry a hijack signal take 52–79% of the affiliate-credited orders, and Saatva's own clicks already show the same patterns. So the recommendations split in two: grow the channel, and stop paying for credit that was taken, not earned.</a:t>
+              <a:t>Three numbers. First, 16% of Saatva's visits start with an affiliate click, against 4–11% for the other mattress brands, and Similarweb independently ranks affiliate as Saatva's #1 channel. Second, scaled to the US, that is about 16.7K affiliate clicks a day. The range is wide, 6.1K–36.4K, because it rests on six panel clicks; at category conversion rates it means roughly 84–334 orders a day. Third, where the data has volume (Walmart), the clicks that carry a hijack signal take 51–79% of the affiliate-credited orders, though they are only 26–41% of ordinary shoppers' clicks; most of the remaining click volume is click flooding by a few dozen people. Saatva's own clicks already show the same hijacking patterns. So the recommendations split in two: grow the channel, and stop paying for credit that was taken, not earned.</a:t>
             </a:r>
           </a:p>
         </p:txBody>
@@ -1220,7 +1291,7 @@
           <a:lstStyle/>
           <a:p>
             <a:r>
-              <a:t>US estimate = panel clicks × a scale factor calibrated on the mattress audience (slide 6). Saatva comes to about 16.7K clicks a day, with a 95% interval of 6.1K–36.4K; with the Walmart-calibrated factor the conservative estimate is 6.5K. The four intervals overlap, so one day can't rank the mattress brands by volume. No mattress order followed an affiliate click within the day, which is expected for a considered purchase, so orders use a 0.5–2% category conversion rate: 84–334 a day for Saatva. Walmart has the volume to measure directly: 6,449 panel clicks, 1.72% converting, so about 7.0M clicks and 121K converting clicks a day.</a:t>
+              <a:t>US estimate = panel clicks × a scale factor calibrated on the mattress audience (slide 6). Saatva comes to about 16.7K clicks a day, with a 95% interval of 6.1K–36.4K; with the Walmart-calibrated factor the conservative estimate is 6.5K. The four intervals overlap, so one day can't rank the mattress brands by volume. No mattress order followed an affiliate click within the day, which is expected for a considered purchase, so orders use a 0.5–2% category conversion rate: 84–334 a day for Saatva. Walmart has the volume to measure directly: 6,449 panel clicks, 1.72% converting, so about 7.0M recorded clicks and 121K converting clicks a day. 71% of those clicks come from 58 panel people who click 13–15 times an hour and almost never order (click flooding, slide 9); without them Walmart has about 2.0M clicks a day.</a:t>
             </a:r>
           </a:p>
         </p:txBody>
@@ -1500,7 +1571,7 @@
           <a:lstStyle/>
           <a:p>
             <a:r>
-              <a:t>Walmart has the volume to test the indicators. Flagged clicks are clicks without a landing, clicks fired while the shopper was already in the cart or on the site, and clicks from a publisher-bought search ad. They are 13–24% of clicks but take 52–79% of the affiliate-credited orders, depending on how strict the look-back window is, from 2 to 30 minutes. Clicks fired after the shopper had already viewed the cart convert at 13%, against 0.4% for clicks with no signal, and the order follows a median 2.3 minutes later: these clicks close sales that were already happening. Mechanisms: 258 clicks fired from walmart.com itself a median 2 seconds after a walmart.com page, with no publisher page in between; price-comparison redirects (rd.bizrate.com, 461 flagged clicks); and coupon and cash-back extensions (Capital One Shopping, Slickdeals, Rakuten).</a:t>
+              <a:t>Walmart has the volume to test the indicators. Flagged clicks are clicks without a landing, clicks fired while the shopper was already in the cart or on the site, and clicks from a publisher-bought search ad. Click-flooding clicks (next slide) are left out: they are most of the volume and almost never convert, so they would make the flagged share look smaller than it is. Among ordinary shoppers' clicks, flagged clicks are 26–41% of clicks but take 51–79% of the affiliate-credited orders, depending on how strict the look-back window is, from 2 to 30 minutes. Counted over all clicks, the same flags are 13–24%. Clicks fired after the shopper had already viewed the cart convert at 13%, against 0.4% for clicks with no signal, and the order follows a median 2.3 minutes later: these clicks close sales that were already happening. Mechanisms: 258 clicks fired from walmart.com itself a median 2 seconds after a walmart.com page, with no publisher page in between; price-comparison redirects (rd.bizrate.com, 461 flagged clicks); and coupon and cash-back extensions (Capital One Shopping, Slickdeals, Rakuten).</a:t>
             </a:r>
           </a:p>
         </p:txBody>
@@ -1570,7 +1641,7 @@
           <a:lstStyle/>
           <a:p>
             <a:r>
-              <a:t>Where in the funnel does the affiliate click arrive? A genuine referral starts the visit: the shopper reads a publisher's page and clicks through. A hijacked click arrives at the bottom, once the shopper is already in the cart or at checkout. At Walmart, 78% of affiliate clicks start the visit, but they carry only 31% of the credited orders and convert at 0.7%. Clicks that fire after the cart are 3% of clicks and 42% of the orders, converting at 18–31%. The commission follows the last click, so it flows to the bottom of the funnel, where the publisher did the least. Stage = the furthest point on walmart.com in the 30 minutes before the click, since any earlier affiliate click.</a:t>
+              <a:t>A second fraud pattern, beside hijacking. 58 US panel people, 6% of Walmart's affiliate clickers, make 4,594 of its 6,449 affiliate clicks and 4 of its affiliate orders. The line sits at 20 clicks a day, where behaviour changes: below it people click under twice an hour across 13–15 sites; above it 13–15 times an hour across 6–9 sites. The top one loops go.sylikes.com, rd.bizrate.com and a walmart.com product page about once a minute for 24 hours. Three publishers take 98% of these clicks. In a CPA program this costs little directly, but it inflates click counts and EPC rankings, any per-click payout, and it plants cookies that can win the last click later. Without it Walmart has about 2.0M affiliate clicks a day, not 7.0M; the threshold moves that between 1.7M and 2.7M. No Saatva or other mattress-brand user crosses the line in this day.</a:t>
             </a:r>
           </a:p>
         </p:txBody>
@@ -5269,7 +5340,7 @@
                 </a:solidFill>
                 <a:latin typeface="Arial"/>
               </a:rPr>
-              <a:t>ATTRIBUTION HIJACKING · IS THE CLICK INCREMENTAL?</a:t>
+              <a:t>ATTRIBUTION HIJACKING · THE FUNNEL VIEW</a:t>
             </a:r>
           </a:p>
         </p:txBody>
@@ -5311,7 +5382,7 @@
                 </a:solidFill>
                 <a:latin typeface="Georgia"/>
               </a:rPr>
-              <a:t>A click fired at the cart adds no orders</a:t>
+              <a:t>3% of clicks land after the cart and take 42% of orders</a:t>
             </a:r>
           </a:p>
         </p:txBody>
@@ -5495,7 +5566,7 @@
                 </a:solidFill>
                 <a:latin typeface="Arial"/>
               </a:rPr>
-              <a:t>Walmart shoppers who order within 2 hours, by the stage already reached</a:t>
+              <a:t>Walmart affiliate clicks, by the stage the shopper had reached</a:t>
             </a:r>
           </a:p>
         </p:txBody>
@@ -5566,7 +5637,7 @@
                 </a:solidFill>
                 <a:latin typeface="Arial"/>
               </a:rPr>
-              <a:t>No affiliate click</a:t>
+              <a:t>Share of clicks</a:t>
             </a:r>
           </a:p>
         </p:txBody>
@@ -5579,7 +5650,7 @@
         </p:nvSpPr>
         <p:spPr>
           <a:xfrm>
-            <a:off x="2591409" y="1847088"/>
+            <a:off x="2350008" y="1847088"/>
             <a:ext cx="146304" cy="146304"/>
           </a:xfrm>
           <a:prstGeom prst="rect">
@@ -5608,7 +5679,7 @@
         </p:nvSpPr>
         <p:spPr>
           <a:xfrm>
-            <a:off x="2820009" y="1810512"/>
+            <a:off x="2578608" y="1810512"/>
             <a:ext cx="4572000" cy="237744"/>
           </a:xfrm>
           <a:prstGeom prst="rect">
@@ -5637,7 +5708,7 @@
                 </a:solidFill>
                 <a:latin typeface="Arial"/>
               </a:rPr>
-              <a:t>Affiliate click fired afterwards</a:t>
+              <a:t>Share of affiliate orders</a:t>
             </a:r>
           </a:p>
         </p:txBody>
@@ -5650,8 +5721,8 @@
         </p:nvSpPr>
         <p:spPr>
           <a:xfrm>
-            <a:off x="548640" y="2697479"/>
-            <a:ext cx="1783080" cy="274320"/>
+            <a:off x="548640" y="2468880"/>
+            <a:ext cx="1920240" cy="274320"/>
           </a:xfrm>
           <a:prstGeom prst="rect">
             <a:avLst/>
@@ -5679,7 +5750,7 @@
                 </a:solidFill>
                 <a:latin typeface="Arial"/>
               </a:rPr>
-              <a:t>Viewed the cart</a:t>
+              <a:t>Click starts the visit</a:t>
             </a:r>
           </a:p>
         </p:txBody>
@@ -5692,8 +5763,8 @@
         </p:nvSpPr>
         <p:spPr>
           <a:xfrm rot="5400000">
-            <a:off x="2881091" y="1919508"/>
-            <a:ext cx="384048" cy="1391351"/>
+            <a:off x="4259458" y="632581"/>
+            <a:ext cx="228600" cy="3718316"/>
           </a:xfrm>
           <a:prstGeom prst="round2SameRect">
             <a:avLst>
@@ -5724,8 +5795,8 @@
         </p:nvSpPr>
         <p:spPr>
           <a:xfrm>
-            <a:off x="3860231" y="2478024"/>
-            <a:ext cx="1600200" cy="274320"/>
+            <a:off x="6324356" y="2359152"/>
+            <a:ext cx="822960" cy="256032"/>
           </a:xfrm>
           <a:prstGeom prst="rect">
             <a:avLst/>
@@ -5753,7 +5824,7 @@
                 </a:solidFill>
                 <a:latin typeface="Arial"/>
               </a:rPr>
-              <a:t>32%   (n = 1,280)</a:t>
+              <a:t>78%</a:t>
             </a:r>
           </a:p>
         </p:txBody>
@@ -5766,8 +5837,8 @@
         </p:nvSpPr>
         <p:spPr>
           <a:xfrm rot="5400000">
-            <a:off x="2935955" y="2303556"/>
-            <a:ext cx="384048" cy="1501079"/>
+            <a:off x="3127796" y="2029419"/>
+            <a:ext cx="228600" cy="1454993"/>
           </a:xfrm>
           <a:prstGeom prst="round2SameRect">
             <a:avLst>
@@ -5798,8 +5869,8 @@
         </p:nvSpPr>
         <p:spPr>
           <a:xfrm>
-            <a:off x="3969959" y="2916936"/>
-            <a:ext cx="1600200" cy="274320"/>
+            <a:off x="4061033" y="2624328"/>
+            <a:ext cx="822960" cy="256032"/>
           </a:xfrm>
           <a:prstGeom prst="rect">
             <a:avLst/>
@@ -5827,7 +5898,7 @@
                 </a:solidFill>
                 <a:latin typeface="Arial"/>
               </a:rPr>
-              <a:t>34%   (n = 38)</a:t>
+              <a:t>31%</a:t>
             </a:r>
           </a:p>
         </p:txBody>
@@ -5840,8 +5911,8 @@
         </p:nvSpPr>
         <p:spPr>
           <a:xfrm>
-            <a:off x="548640" y="4114800"/>
-            <a:ext cx="1783080" cy="274320"/>
+            <a:off x="548640" y="3182112"/>
+            <a:ext cx="1920240" cy="274320"/>
           </a:xfrm>
           <a:prstGeom prst="rect">
             <a:avLst/>
@@ -5869,27 +5940,24 @@
                 </a:solidFill>
                 <a:latin typeface="Arial"/>
               </a:rPr>
-              <a:t>Reached checkout</a:t>
-            </a:r>
-          </a:p>
-        </p:txBody>
-      </p:sp>
-      <p:sp>
-        <p:nvSpPr>
-          <p:cNvPr id="19" name="Round Same Side Corner Rectangle 18"/>
+              <a:t>Already browsing</a:t>
+            </a:r>
+          </a:p>
+        </p:txBody>
+      </p:sp>
+      <p:sp>
+        <p:nvSpPr>
+          <p:cNvPr id="19" name="Rectangle 18"/>
           <p:cNvSpPr/>
           <p:nvPr/>
         </p:nvSpPr>
         <p:spPr>
-          <a:xfrm rot="5400000">
-            <a:off x="3848892" y="2369027"/>
-            <a:ext cx="384048" cy="3326952"/>
-          </a:xfrm>
-          <a:prstGeom prst="round2SameRect">
-            <a:avLst>
-              <a:gd name="adj1" fmla="val 14000"/>
-              <a:gd name="adj2" fmla="val 0"/>
-            </a:avLst>
+          <a:xfrm>
+            <a:off x="2514600" y="3090672"/>
+            <a:ext cx="194950" cy="228600"/>
+          </a:xfrm>
+          <a:prstGeom prst="rect">
+            <a:avLst/>
           </a:prstGeom>
           <a:solidFill>
             <a:srgbClr val="B7C1CC"/>
@@ -5914,8 +5982,8 @@
         </p:nvSpPr>
         <p:spPr>
           <a:xfrm>
-            <a:off x="5795832" y="3895344"/>
-            <a:ext cx="1600200" cy="274320"/>
+            <a:off x="2800990" y="3072384"/>
+            <a:ext cx="822960" cy="256032"/>
           </a:xfrm>
           <a:prstGeom prst="rect">
             <a:avLst/>
@@ -5943,7 +6011,7 @@
                 </a:solidFill>
                 <a:latin typeface="Arial"/>
               </a:rPr>
-              <a:t>76%   (n = 759)</a:t>
+              <a:t>4%</a:t>
             </a:r>
           </a:p>
         </p:txBody>
@@ -5956,8 +6024,8 @@
         </p:nvSpPr>
         <p:spPr>
           <a:xfrm rot="5400000">
-            <a:off x="3649187" y="3007644"/>
-            <a:ext cx="384048" cy="2927543"/>
+            <a:off x="2721254" y="3149193"/>
+            <a:ext cx="228600" cy="641908"/>
           </a:xfrm>
           <a:prstGeom prst="round2SameRect">
             <a:avLst>
@@ -5988,8 +6056,8 @@
         </p:nvSpPr>
         <p:spPr>
           <a:xfrm>
-            <a:off x="5396423" y="4334255"/>
-            <a:ext cx="1600200" cy="274320"/>
+            <a:off x="3247948" y="3337560"/>
+            <a:ext cx="822960" cy="256032"/>
           </a:xfrm>
           <a:prstGeom prst="rect">
             <a:avLst/>
@@ -6017,21 +6085,585 @@
                 </a:solidFill>
                 <a:latin typeface="Arial"/>
               </a:rPr>
-              <a:t>67%   (n = 18)</a:t>
+              <a:t>14%</a:t>
+            </a:r>
+          </a:p>
+        </p:txBody>
+      </p:sp>
+      <p:sp>
+        <p:nvSpPr>
+          <p:cNvPr id="23" name="TextBox 22"/>
+          <p:cNvSpPr txBox="1"/>
+          <p:nvPr/>
+        </p:nvSpPr>
+        <p:spPr>
+          <a:xfrm>
+            <a:off x="548640" y="3895344"/>
+            <a:ext cx="1920240" cy="274320"/>
+          </a:xfrm>
+          <a:prstGeom prst="rect">
+            <a:avLst/>
+          </a:prstGeom>
+          <a:noFill/>
+        </p:spPr>
+        <p:txBody>
+          <a:bodyPr wrap="square" lIns="0" rIns="0" tIns="0" bIns="0" anchor="t">
+            <a:noAutofit/>
+          </a:bodyPr>
+          <a:lstStyle/>
+          <a:p>
+            <a:pPr algn="l">
+              <a:lnSpc>
+                <a:spcPct val="110000"/>
+              </a:lnSpc>
+              <a:spcAft>
+                <a:spcPts val="0"/>
+              </a:spcAft>
+            </a:pPr>
+            <a:r>
+              <a:rPr sz="1400" i="0" b="0">
+                <a:solidFill>
+                  <a:srgbClr val="1E2833"/>
+                </a:solidFill>
+                <a:latin typeface="Arial"/>
+              </a:rPr>
+              <a:t>On a product page</a:t>
+            </a:r>
+          </a:p>
+        </p:txBody>
+      </p:sp>
+      <p:sp>
+        <p:nvSpPr>
+          <p:cNvPr id="24" name="Round Same Side Corner Rectangle 23"/>
+          <p:cNvSpPr/>
+          <p:nvPr/>
+        </p:nvSpPr>
+        <p:spPr>
+          <a:xfrm rot="5400000">
+            <a:off x="2747406" y="3571097"/>
+            <a:ext cx="228600" cy="694212"/>
+          </a:xfrm>
+          <a:prstGeom prst="round2SameRect">
+            <a:avLst>
+              <a:gd name="adj1" fmla="val 14000"/>
+              <a:gd name="adj2" fmla="val 0"/>
+            </a:avLst>
+          </a:prstGeom>
+          <a:solidFill>
+            <a:srgbClr val="B7C1CC"/>
+          </a:solidFill>
+          <a:ln>
+            <a:noFill/>
+          </a:ln>
+        </p:spPr>
+        <p:txBody>
+          <a:bodyPr rtlCol="0" anchor="ctr"/>
+          <a:lstStyle/>
+          <a:p>
+            <a:pPr algn="ctr"/>
+          </a:p>
+        </p:txBody>
+      </p:sp>
+      <p:sp>
+        <p:nvSpPr>
+          <p:cNvPr id="25" name="TextBox 24"/>
+          <p:cNvSpPr txBox="1"/>
+          <p:nvPr/>
+        </p:nvSpPr>
+        <p:spPr>
+          <a:xfrm>
+            <a:off x="3300252" y="3785616"/>
+            <a:ext cx="822960" cy="256032"/>
+          </a:xfrm>
+          <a:prstGeom prst="rect">
+            <a:avLst/>
+          </a:prstGeom>
+          <a:noFill/>
+        </p:spPr>
+        <p:txBody>
+          <a:bodyPr wrap="square" lIns="0" rIns="0" tIns="0" bIns="0" anchor="t">
+            <a:noAutofit/>
+          </a:bodyPr>
+          <a:lstStyle/>
+          <a:p>
+            <a:pPr algn="l">
+              <a:lnSpc>
+                <a:spcPct val="110000"/>
+              </a:lnSpc>
+              <a:spcAft>
+                <a:spcPts val="0"/>
+              </a:spcAft>
+            </a:pPr>
+            <a:r>
+              <a:rPr sz="1300" i="0" b="0">
+                <a:solidFill>
+                  <a:srgbClr val="1E2833"/>
+                </a:solidFill>
+                <a:latin typeface="Arial"/>
+              </a:rPr>
+              <a:t>15%</a:t>
+            </a:r>
+          </a:p>
+        </p:txBody>
+      </p:sp>
+      <p:sp>
+        <p:nvSpPr>
+          <p:cNvPr id="26" name="Round Same Side Corner Rectangle 25"/>
+          <p:cNvSpPr/>
+          <p:nvPr/>
+        </p:nvSpPr>
+        <p:spPr>
+          <a:xfrm rot="5400000">
+            <a:off x="2721254" y="3862425"/>
+            <a:ext cx="228600" cy="641908"/>
+          </a:xfrm>
+          <a:prstGeom prst="round2SameRect">
+            <a:avLst>
+              <a:gd name="adj1" fmla="val 14000"/>
+              <a:gd name="adj2" fmla="val 0"/>
+            </a:avLst>
+          </a:prstGeom>
+          <a:solidFill>
+            <a:srgbClr val="FF9438"/>
+          </a:solidFill>
+          <a:ln>
+            <a:noFill/>
+          </a:ln>
+        </p:spPr>
+        <p:txBody>
+          <a:bodyPr rtlCol="0" anchor="ctr"/>
+          <a:lstStyle/>
+          <a:p>
+            <a:pPr algn="ctr"/>
+          </a:p>
+        </p:txBody>
+      </p:sp>
+      <p:sp>
+        <p:nvSpPr>
+          <p:cNvPr id="27" name="TextBox 26"/>
+          <p:cNvSpPr txBox="1"/>
+          <p:nvPr/>
+        </p:nvSpPr>
+        <p:spPr>
+          <a:xfrm>
+            <a:off x="3247948" y="4050792"/>
+            <a:ext cx="822960" cy="256032"/>
+          </a:xfrm>
+          <a:prstGeom prst="rect">
+            <a:avLst/>
+          </a:prstGeom>
+          <a:noFill/>
+        </p:spPr>
+        <p:txBody>
+          <a:bodyPr wrap="square" lIns="0" rIns="0" tIns="0" bIns="0" anchor="t">
+            <a:noAutofit/>
+          </a:bodyPr>
+          <a:lstStyle/>
+          <a:p>
+            <a:pPr algn="l">
+              <a:lnSpc>
+                <a:spcPct val="110000"/>
+              </a:lnSpc>
+              <a:spcAft>
+                <a:spcPts val="0"/>
+              </a:spcAft>
+            </a:pPr>
+            <a:r>
+              <a:rPr sz="1300" i="0" b="1">
+                <a:solidFill>
+                  <a:srgbClr val="1E2833"/>
+                </a:solidFill>
+                <a:latin typeface="Arial"/>
+              </a:rPr>
+              <a:t>14%</a:t>
+            </a:r>
+          </a:p>
+        </p:txBody>
+      </p:sp>
+      <p:sp>
+        <p:nvSpPr>
+          <p:cNvPr id="28" name="TextBox 27"/>
+          <p:cNvSpPr txBox="1"/>
+          <p:nvPr/>
+        </p:nvSpPr>
+        <p:spPr>
+          <a:xfrm>
+            <a:off x="548640" y="4608575"/>
+            <a:ext cx="1920240" cy="274320"/>
+          </a:xfrm>
+          <a:prstGeom prst="rect">
+            <a:avLst/>
+          </a:prstGeom>
+          <a:noFill/>
+        </p:spPr>
+        <p:txBody>
+          <a:bodyPr wrap="square" lIns="0" rIns="0" tIns="0" bIns="0" anchor="t">
+            <a:noAutofit/>
+          </a:bodyPr>
+          <a:lstStyle/>
+          <a:p>
+            <a:pPr algn="l">
+              <a:lnSpc>
+                <a:spcPct val="110000"/>
+              </a:lnSpc>
+              <a:spcAft>
+                <a:spcPts val="0"/>
+              </a:spcAft>
+            </a:pPr>
+            <a:r>
+              <a:rPr sz="1400" i="0" b="1">
+                <a:solidFill>
+                  <a:srgbClr val="1E2833"/>
+                </a:solidFill>
+                <a:latin typeface="Arial"/>
+              </a:rPr>
+              <a:t>In the cart</a:t>
+            </a:r>
+          </a:p>
+        </p:txBody>
+      </p:sp>
+      <p:sp>
+        <p:nvSpPr>
+          <p:cNvPr id="29" name="Rectangle 28"/>
+          <p:cNvSpPr/>
+          <p:nvPr/>
+        </p:nvSpPr>
+        <p:spPr>
+          <a:xfrm>
+            <a:off x="2514600" y="4517136"/>
+            <a:ext cx="80832" cy="228600"/>
+          </a:xfrm>
+          <a:prstGeom prst="rect">
+            <a:avLst/>
+          </a:prstGeom>
+          <a:solidFill>
+            <a:srgbClr val="B7C1CC"/>
+          </a:solidFill>
+          <a:ln>
+            <a:noFill/>
+          </a:ln>
+        </p:spPr>
+        <p:txBody>
+          <a:bodyPr rtlCol="0" anchor="ctr"/>
+          <a:lstStyle/>
+          <a:p>
+            <a:pPr algn="ctr"/>
+          </a:p>
+        </p:txBody>
+      </p:sp>
+      <p:sp>
+        <p:nvSpPr>
+          <p:cNvPr id="30" name="TextBox 29"/>
+          <p:cNvSpPr txBox="1"/>
+          <p:nvPr/>
+        </p:nvSpPr>
+        <p:spPr>
+          <a:xfrm>
+            <a:off x="2686872" y="4498848"/>
+            <a:ext cx="822960" cy="256032"/>
+          </a:xfrm>
+          <a:prstGeom prst="rect">
+            <a:avLst/>
+          </a:prstGeom>
+          <a:noFill/>
+        </p:spPr>
+        <p:txBody>
+          <a:bodyPr wrap="square" lIns="0" rIns="0" tIns="0" bIns="0" anchor="t">
+            <a:noAutofit/>
+          </a:bodyPr>
+          <a:lstStyle/>
+          <a:p>
+            <a:pPr algn="l">
+              <a:lnSpc>
+                <a:spcPct val="110000"/>
+              </a:lnSpc>
+              <a:spcAft>
+                <a:spcPts val="0"/>
+              </a:spcAft>
+            </a:pPr>
+            <a:r>
+              <a:rPr sz="1300" i="0" b="0">
+                <a:solidFill>
+                  <a:srgbClr val="1E2833"/>
+                </a:solidFill>
+                <a:latin typeface="Arial"/>
+              </a:rPr>
+              <a:t>2%</a:t>
+            </a:r>
+          </a:p>
+        </p:txBody>
+      </p:sp>
+      <p:sp>
+        <p:nvSpPr>
+          <p:cNvPr id="31" name="Round Same Side Corner Rectangle 30"/>
+          <p:cNvSpPr/>
+          <p:nvPr/>
+        </p:nvSpPr>
+        <p:spPr>
+          <a:xfrm rot="5400000">
+            <a:off x="2806842" y="4490069"/>
+            <a:ext cx="228600" cy="813084"/>
+          </a:xfrm>
+          <a:prstGeom prst="round2SameRect">
+            <a:avLst>
+              <a:gd name="adj1" fmla="val 14000"/>
+              <a:gd name="adj2" fmla="val 0"/>
+            </a:avLst>
+          </a:prstGeom>
+          <a:solidFill>
+            <a:srgbClr val="FF9438"/>
+          </a:solidFill>
+          <a:ln>
+            <a:noFill/>
+          </a:ln>
+        </p:spPr>
+        <p:txBody>
+          <a:bodyPr rtlCol="0" anchor="ctr"/>
+          <a:lstStyle/>
+          <a:p>
+            <a:pPr algn="ctr"/>
+          </a:p>
+        </p:txBody>
+      </p:sp>
+      <p:sp>
+        <p:nvSpPr>
+          <p:cNvPr id="32" name="TextBox 31"/>
+          <p:cNvSpPr txBox="1"/>
+          <p:nvPr/>
+        </p:nvSpPr>
+        <p:spPr>
+          <a:xfrm>
+            <a:off x="3419124" y="4764024"/>
+            <a:ext cx="822960" cy="256032"/>
+          </a:xfrm>
+          <a:prstGeom prst="rect">
+            <a:avLst/>
+          </a:prstGeom>
+          <a:noFill/>
+        </p:spPr>
+        <p:txBody>
+          <a:bodyPr wrap="square" lIns="0" rIns="0" tIns="0" bIns="0" anchor="t">
+            <a:noAutofit/>
+          </a:bodyPr>
+          <a:lstStyle/>
+          <a:p>
+            <a:pPr algn="l">
+              <a:lnSpc>
+                <a:spcPct val="110000"/>
+              </a:lnSpc>
+              <a:spcAft>
+                <a:spcPts val="0"/>
+              </a:spcAft>
+            </a:pPr>
+            <a:r>
+              <a:rPr sz="1300" i="0" b="1">
+                <a:solidFill>
+                  <a:srgbClr val="1E2833"/>
+                </a:solidFill>
+                <a:latin typeface="Arial"/>
+              </a:rPr>
+              <a:t>17%</a:t>
+            </a:r>
+          </a:p>
+        </p:txBody>
+      </p:sp>
+      <p:sp>
+        <p:nvSpPr>
+          <p:cNvPr id="33" name="TextBox 32"/>
+          <p:cNvSpPr txBox="1"/>
+          <p:nvPr/>
+        </p:nvSpPr>
+        <p:spPr>
+          <a:xfrm>
+            <a:off x="548640" y="5321808"/>
+            <a:ext cx="1920240" cy="274320"/>
+          </a:xfrm>
+          <a:prstGeom prst="rect">
+            <a:avLst/>
+          </a:prstGeom>
+          <a:noFill/>
+        </p:spPr>
+        <p:txBody>
+          <a:bodyPr wrap="square" lIns="0" rIns="0" tIns="0" bIns="0" anchor="t">
+            <a:noAutofit/>
+          </a:bodyPr>
+          <a:lstStyle/>
+          <a:p>
+            <a:pPr algn="l">
+              <a:lnSpc>
+                <a:spcPct val="110000"/>
+              </a:lnSpc>
+              <a:spcAft>
+                <a:spcPts val="0"/>
+              </a:spcAft>
+            </a:pPr>
+            <a:r>
+              <a:rPr sz="1400" i="0" b="1">
+                <a:solidFill>
+                  <a:srgbClr val="1E2833"/>
+                </a:solidFill>
+                <a:latin typeface="Arial"/>
+              </a:rPr>
+              <a:t>At checkout</a:t>
+            </a:r>
+          </a:p>
+        </p:txBody>
+      </p:sp>
+      <p:sp>
+        <p:nvSpPr>
+          <p:cNvPr id="34" name="Rectangle 33"/>
+          <p:cNvSpPr/>
+          <p:nvPr/>
+        </p:nvSpPr>
+        <p:spPr>
+          <a:xfrm>
+            <a:off x="2514600" y="5230368"/>
+            <a:ext cx="66568" cy="228600"/>
+          </a:xfrm>
+          <a:prstGeom prst="rect">
+            <a:avLst/>
+          </a:prstGeom>
+          <a:solidFill>
+            <a:srgbClr val="B7C1CC"/>
+          </a:solidFill>
+          <a:ln>
+            <a:noFill/>
+          </a:ln>
+        </p:spPr>
+        <p:txBody>
+          <a:bodyPr rtlCol="0" anchor="ctr"/>
+          <a:lstStyle/>
+          <a:p>
+            <a:pPr algn="ctr"/>
+          </a:p>
+        </p:txBody>
+      </p:sp>
+      <p:sp>
+        <p:nvSpPr>
+          <p:cNvPr id="35" name="TextBox 34"/>
+          <p:cNvSpPr txBox="1"/>
+          <p:nvPr/>
+        </p:nvSpPr>
+        <p:spPr>
+          <a:xfrm>
+            <a:off x="2672608" y="5212080"/>
+            <a:ext cx="822960" cy="256032"/>
+          </a:xfrm>
+          <a:prstGeom prst="rect">
+            <a:avLst/>
+          </a:prstGeom>
+          <a:noFill/>
+        </p:spPr>
+        <p:txBody>
+          <a:bodyPr wrap="square" lIns="0" rIns="0" tIns="0" bIns="0" anchor="t">
+            <a:noAutofit/>
+          </a:bodyPr>
+          <a:lstStyle/>
+          <a:p>
+            <a:pPr algn="l">
+              <a:lnSpc>
+                <a:spcPct val="110000"/>
+              </a:lnSpc>
+              <a:spcAft>
+                <a:spcPts val="0"/>
+              </a:spcAft>
+            </a:pPr>
+            <a:r>
+              <a:rPr sz="1300" i="0" b="0">
+                <a:solidFill>
+                  <a:srgbClr val="1E2833"/>
+                </a:solidFill>
+                <a:latin typeface="Arial"/>
+              </a:rPr>
+              <a:t>1%</a:t>
+            </a:r>
+          </a:p>
+        </p:txBody>
+      </p:sp>
+      <p:sp>
+        <p:nvSpPr>
+          <p:cNvPr id="36" name="Round Same Side Corner Rectangle 35"/>
+          <p:cNvSpPr/>
+          <p:nvPr/>
+        </p:nvSpPr>
+        <p:spPr>
+          <a:xfrm rot="5400000">
+            <a:off x="2999414" y="5010729"/>
+            <a:ext cx="228600" cy="1198229"/>
+          </a:xfrm>
+          <a:prstGeom prst="round2SameRect">
+            <a:avLst>
+              <a:gd name="adj1" fmla="val 14000"/>
+              <a:gd name="adj2" fmla="val 0"/>
+            </a:avLst>
+          </a:prstGeom>
+          <a:solidFill>
+            <a:srgbClr val="FF9438"/>
+          </a:solidFill>
+          <a:ln>
+            <a:noFill/>
+          </a:ln>
+        </p:spPr>
+        <p:txBody>
+          <a:bodyPr rtlCol="0" anchor="ctr"/>
+          <a:lstStyle/>
+          <a:p>
+            <a:pPr algn="ctr"/>
+          </a:p>
+        </p:txBody>
+      </p:sp>
+      <p:sp>
+        <p:nvSpPr>
+          <p:cNvPr id="37" name="TextBox 36"/>
+          <p:cNvSpPr txBox="1"/>
+          <p:nvPr/>
+        </p:nvSpPr>
+        <p:spPr>
+          <a:xfrm>
+            <a:off x="3804269" y="5477256"/>
+            <a:ext cx="822960" cy="256032"/>
+          </a:xfrm>
+          <a:prstGeom prst="rect">
+            <a:avLst/>
+          </a:prstGeom>
+          <a:noFill/>
+        </p:spPr>
+        <p:txBody>
+          <a:bodyPr wrap="square" lIns="0" rIns="0" tIns="0" bIns="0" anchor="t">
+            <a:noAutofit/>
+          </a:bodyPr>
+          <a:lstStyle/>
+          <a:p>
+            <a:pPr algn="l">
+              <a:lnSpc>
+                <a:spcPct val="110000"/>
+              </a:lnSpc>
+              <a:spcAft>
+                <a:spcPts val="0"/>
+              </a:spcAft>
+            </a:pPr>
+            <a:r>
+              <a:rPr sz="1300" i="0" b="1">
+                <a:solidFill>
+                  <a:srgbClr val="1E2833"/>
+                </a:solidFill>
+                <a:latin typeface="Arial"/>
+              </a:rPr>
+              <a:t>25%</a:t>
             </a:r>
           </a:p>
         </p:txBody>
       </p:sp>
       <p:cxnSp>
         <p:nvCxnSpPr>
-          <p:cNvPr id="23" name="Connector 22"/>
+          <p:cNvPr id="38" name="Connector 37"/>
           <p:cNvCxnSpPr/>
           <p:nvPr/>
         </p:nvCxnSpPr>
         <p:spPr>
           <a:xfrm>
-            <a:off x="2377440" y="2286000"/>
-            <a:ext cx="0" cy="2551176"/>
+            <a:off x="2514600" y="2267712"/>
+            <a:ext cx="0" cy="3529584"/>
           </a:xfrm>
           <a:prstGeom prst="line">
             <a:avLst/>
@@ -6045,49 +6677,7 @@
       </p:cxnSp>
       <p:sp>
         <p:nvSpPr>
-          <p:cNvPr id="24" name="TextBox 23"/>
-          <p:cNvSpPr txBox="1"/>
-          <p:nvPr/>
-        </p:nvSpPr>
-        <p:spPr>
-          <a:xfrm>
-            <a:off x="548640" y="5440680"/>
-            <a:ext cx="6583680" cy="548640"/>
-          </a:xfrm>
-          <a:prstGeom prst="rect">
-            <a:avLst/>
-          </a:prstGeom>
-          <a:noFill/>
-        </p:spPr>
-        <p:txBody>
-          <a:bodyPr wrap="square" lIns="0" rIns="0" tIns="0" bIns="0" anchor="t">
-            <a:noAutofit/>
-          </a:bodyPr>
-          <a:lstStyle/>
-          <a:p>
-            <a:pPr algn="l">
-              <a:lnSpc>
-                <a:spcPct val="105000"/>
-              </a:lnSpc>
-              <a:spcAft>
-                <a:spcPts val="0"/>
-              </a:spcAft>
-            </a:pPr>
-            <a:r>
-              <a:rPr sz="1200" i="0" b="0">
-                <a:solidFill>
-                  <a:srgbClr val="647282"/>
-                </a:solidFill>
-                <a:latin typeface="Arial"/>
-              </a:rPr>
-              <a:t>Stage fixed at the first cart or checkout view, before any click. Shoppers an affiliate brought to the cart are excluded.</a:t>
-            </a:r>
-          </a:p>
-        </p:txBody>
-      </p:sp>
-      <p:sp>
-        <p:nvSpPr>
-          <p:cNvPr id="25" name="Rectangle 24"/>
+          <p:cNvPr id="39" name="Rectangle 38"/>
           <p:cNvSpPr/>
           <p:nvPr/>
         </p:nvSpPr>
@@ -6116,7 +6706,7 @@
       </p:sp>
       <p:sp>
         <p:nvSpPr>
-          <p:cNvPr id="26" name="Oval 25"/>
+          <p:cNvPr id="40" name="Oval 39"/>
           <p:cNvSpPr/>
           <p:nvPr/>
         </p:nvSpPr>
@@ -6145,7 +6735,7 @@
       </p:sp>
       <p:sp>
         <p:nvSpPr>
-          <p:cNvPr id="27" name="TextBox 26"/>
+          <p:cNvPr id="41" name="TextBox 40"/>
           <p:cNvSpPr txBox="1"/>
           <p:nvPr/>
         </p:nvSpPr>
@@ -6180,14 +6770,14 @@
                 </a:solidFill>
                 <a:latin typeface="Arial"/>
               </a:rPr>
-              <a:t>56 shoppers who got a click</a:t>
-            </a:r>
-          </a:p>
-        </p:txBody>
-      </p:sp>
-      <p:sp>
-        <p:nvSpPr>
-          <p:cNvPr id="28" name="TextBox 27"/>
+              <a:t>Conversion of the click</a:t>
+            </a:r>
+          </a:p>
+        </p:txBody>
+      </p:sp>
+      <p:sp>
+        <p:nvSpPr>
+          <p:cNvPr id="42" name="TextBox 41"/>
           <p:cNvSpPr txBox="1"/>
           <p:nvPr/>
         </p:nvSpPr>
@@ -6222,14 +6812,14 @@
                 </a:solidFill>
                 <a:latin typeface="Arial"/>
               </a:rPr>
-              <a:t>25 vs 25.7</a:t>
-            </a:r>
-          </a:p>
-        </p:txBody>
-      </p:sp>
-      <p:sp>
-        <p:nvSpPr>
-          <p:cNvPr id="29" name="TextBox 28"/>
+              <a:t>31% vs 0.7%</a:t>
+            </a:r>
+          </a:p>
+        </p:txBody>
+      </p:sp>
+      <p:sp>
+        <p:nvSpPr>
+          <p:cNvPr id="43" name="TextBox 42"/>
           <p:cNvSpPr txBox="1"/>
           <p:nvPr/>
         </p:nvSpPr>
@@ -6264,14 +6854,14 @@
                 </a:solidFill>
                 <a:latin typeface="Arial"/>
               </a:rPr>
-              <a:t>orders, vs expected without the click</a:t>
-            </a:r>
-          </a:p>
-        </p:txBody>
-      </p:sp>
-      <p:sp>
-        <p:nvSpPr>
-          <p:cNvPr id="30" name="TextBox 29"/>
+              <a:t>at checkout vs starting the visit</a:t>
+            </a:r>
+          </a:p>
+        </p:txBody>
+      </p:sp>
+      <p:sp>
+        <p:nvSpPr>
+          <p:cNvPr id="44" name="TextBox 43"/>
           <p:cNvSpPr txBox="1"/>
           <p:nvPr/>
         </p:nvSpPr>
@@ -6306,27 +6896,69 @@
                 </a:solidFill>
                 <a:latin typeface="Arial"/>
               </a:rPr>
-              <a:t>At most ~31% incremental (95% upper bound)</a:t>
-            </a:r>
-          </a:p>
-        </p:txBody>
-      </p:sp>
-      <p:sp>
-        <p:nvSpPr>
-          <p:cNvPr id="31" name="Rectangle 30"/>
+              <a:t>and the next slide shows the click adds no orders</a:t>
+            </a:r>
+          </a:p>
+        </p:txBody>
+      </p:sp>
+      <p:sp>
+        <p:nvSpPr>
+          <p:cNvPr id="45" name="TextBox 44"/>
+          <p:cNvSpPr txBox="1"/>
+          <p:nvPr/>
+        </p:nvSpPr>
+        <p:spPr>
+          <a:xfrm>
+            <a:off x="7452360" y="4023360"/>
+            <a:ext cx="4190695" cy="274320"/>
+          </a:xfrm>
+          <a:prstGeom prst="rect">
+            <a:avLst/>
+          </a:prstGeom>
+          <a:noFill/>
+        </p:spPr>
+        <p:txBody>
+          <a:bodyPr wrap="square" lIns="0" rIns="0" tIns="0" bIns="0" anchor="t">
+            <a:noAutofit/>
+          </a:bodyPr>
+          <a:lstStyle/>
+          <a:p>
+            <a:pPr algn="l">
+              <a:lnSpc>
+                <a:spcPct val="110000"/>
+              </a:lnSpc>
+              <a:spcAft>
+                <a:spcPts val="0"/>
+              </a:spcAft>
+            </a:pPr>
+            <a:r>
+              <a:rPr sz="1400" i="0" b="1">
+                <a:solidFill>
+                  <a:srgbClr val="0B2A4A"/>
+                </a:solidFill>
+                <a:latin typeface="Arial"/>
+              </a:rPr>
+              <a:t>What it means for a program</a:t>
+            </a:r>
+          </a:p>
+        </p:txBody>
+      </p:sp>
+      <p:sp>
+        <p:nvSpPr>
+          <p:cNvPr id="46" name="Oval 45"/>
           <p:cNvSpPr/>
           <p:nvPr/>
         </p:nvSpPr>
         <p:spPr>
           <a:xfrm>
-            <a:off x="7452360" y="3840480"/>
-            <a:ext cx="4190695" cy="2331720"/>
-          </a:xfrm>
-          <a:prstGeom prst="rect">
+            <a:off x="7470648" y="4498848"/>
+            <a:ext cx="128016" cy="128016"/>
+          </a:xfrm>
+          <a:prstGeom prst="ellipse">
             <a:avLst/>
           </a:prstGeom>
           <a:solidFill>
-            <a:srgbClr val="FFF1E5"/>
+            <a:srgbClr val="FF9438"/>
           </a:solidFill>
           <a:ln>
             <a:noFill/>
@@ -6342,14 +6974,14 @@
       </p:sp>
       <p:sp>
         <p:nvSpPr>
-          <p:cNvPr id="32" name="TextBox 31"/>
-          <p:cNvSpPr txBox="1"/>
-          <p:nvPr/>
-        </p:nvSpPr>
-        <p:spPr>
-          <a:xfrm>
-            <a:off x="7726680" y="4041648"/>
-            <a:ext cx="3642055" cy="256032"/>
+          <p:cNvPr id="47" name="TextBox 46"/>
+          <p:cNvSpPr txBox="1"/>
+          <p:nvPr/>
+        </p:nvSpPr>
+        <p:spPr>
+          <a:xfrm>
+            <a:off x="7726680" y="4434840"/>
+            <a:ext cx="3916375" cy="274320"/>
           </a:xfrm>
           <a:prstGeom prst="rect">
             <a:avLst/>
@@ -6371,27 +7003,56 @@
               </a:spcAft>
             </a:pPr>
             <a:r>
-              <a:rPr sz="1200" i="0" b="1">
-                <a:solidFill>
-                  <a:srgbClr val="647282"/>
-                </a:solidFill>
-                <a:latin typeface="Arial"/>
-              </a:rPr>
-              <a:t>Commission on clicks fired at the cart</a:t>
-            </a:r>
-          </a:p>
-        </p:txBody>
-      </p:sp>
-      <p:sp>
-        <p:nvSpPr>
-          <p:cNvPr id="33" name="TextBox 32"/>
-          <p:cNvSpPr txBox="1"/>
-          <p:nvPr/>
-        </p:nvSpPr>
-        <p:spPr>
-          <a:xfrm>
-            <a:off x="7726680" y="4343400"/>
-            <a:ext cx="3642055" cy="640080"/>
+              <a:rPr sz="1400" i="0" b="0">
+                <a:solidFill>
+                  <a:srgbClr val="1E2833"/>
+                </a:solidFill>
+                <a:latin typeface="Arial"/>
+              </a:rPr>
+              <a:t>Pay on the stage the click arrived at</a:t>
+            </a:r>
+          </a:p>
+        </p:txBody>
+      </p:sp>
+      <p:sp>
+        <p:nvSpPr>
+          <p:cNvPr id="48" name="Oval 47"/>
+          <p:cNvSpPr/>
+          <p:nvPr/>
+        </p:nvSpPr>
+        <p:spPr>
+          <a:xfrm>
+            <a:off x="7470648" y="4919472"/>
+            <a:ext cx="128016" cy="128016"/>
+          </a:xfrm>
+          <a:prstGeom prst="ellipse">
+            <a:avLst/>
+          </a:prstGeom>
+          <a:solidFill>
+            <a:srgbClr val="FF9438"/>
+          </a:solidFill>
+          <a:ln>
+            <a:noFill/>
+          </a:ln>
+        </p:spPr>
+        <p:txBody>
+          <a:bodyPr rtlCol="0" anchor="ctr"/>
+          <a:lstStyle/>
+          <a:p>
+            <a:pPr algn="ctr"/>
+          </a:p>
+        </p:txBody>
+      </p:sp>
+      <p:sp>
+        <p:nvSpPr>
+          <p:cNvPr id="49" name="TextBox 48"/>
+          <p:cNvSpPr txBox="1"/>
+          <p:nvPr/>
+        </p:nvSpPr>
+        <p:spPr>
+          <a:xfrm>
+            <a:off x="7726680" y="4855464"/>
+            <a:ext cx="3916375" cy="274320"/>
           </a:xfrm>
           <a:prstGeom prst="rect">
             <a:avLst/>
@@ -6413,27 +7074,56 @@
               </a:spcAft>
             </a:pPr>
             <a:r>
-              <a:rPr sz="3600" i="0" b="1">
-                <a:solidFill>
-                  <a:srgbClr val="0B2A4A"/>
-                </a:solidFill>
-                <a:latin typeface="Arial"/>
-              </a:rPr>
-              <a:t>$22–111M</a:t>
-            </a:r>
-          </a:p>
-        </p:txBody>
-      </p:sp>
-      <p:sp>
-        <p:nvSpPr>
-          <p:cNvPr id="34" name="TextBox 33"/>
-          <p:cNvSpPr txBox="1"/>
-          <p:nvPr/>
-        </p:nvSpPr>
-        <p:spPr>
-          <a:xfrm>
-            <a:off x="7726680" y="4983480"/>
-            <a:ext cx="3642055" cy="274320"/>
+              <a:rPr sz="1400" i="0" b="0">
+                <a:solidFill>
+                  <a:srgbClr val="1E2833"/>
+                </a:solidFill>
+                <a:latin typeface="Arial"/>
+              </a:rPr>
+              <a:t>Lock credit once a cart exists</a:t>
+            </a:r>
+          </a:p>
+        </p:txBody>
+      </p:sp>
+      <p:sp>
+        <p:nvSpPr>
+          <p:cNvPr id="50" name="Oval 49"/>
+          <p:cNvSpPr/>
+          <p:nvPr/>
+        </p:nvSpPr>
+        <p:spPr>
+          <a:xfrm>
+            <a:off x="7470648" y="5340096"/>
+            <a:ext cx="128016" cy="128016"/>
+          </a:xfrm>
+          <a:prstGeom prst="ellipse">
+            <a:avLst/>
+          </a:prstGeom>
+          <a:solidFill>
+            <a:srgbClr val="FF9438"/>
+          </a:solidFill>
+          <a:ln>
+            <a:noFill/>
+          </a:ln>
+        </p:spPr>
+        <p:txBody>
+          <a:bodyPr rtlCol="0" anchor="ctr"/>
+          <a:lstStyle/>
+          <a:p>
+            <a:pPr algn="ctr"/>
+          </a:p>
+        </p:txBody>
+      </p:sp>
+      <p:sp>
+        <p:nvSpPr>
+          <p:cNvPr id="51" name="TextBox 50"/>
+          <p:cNvSpPr txBox="1"/>
+          <p:nvPr/>
+        </p:nvSpPr>
+        <p:spPr>
+          <a:xfrm>
+            <a:off x="7726680" y="5276088"/>
+            <a:ext cx="3916375" cy="274320"/>
           </a:xfrm>
           <a:prstGeom prst="rect">
             <a:avLst/>
@@ -6455,55 +7145,13 @@
               </a:spcAft>
             </a:pPr>
             <a:r>
-              <a:rPr sz="1400" i="0" b="1">
+              <a:rPr sz="1400" i="0" b="0">
                 <a:solidFill>
                   <a:srgbClr val="1E2833"/>
                 </a:solidFill>
                 <a:latin typeface="Arial"/>
               </a:rPr>
-              <a:t>a year at Walmart (half its affiliate orders)</a:t>
-            </a:r>
-          </a:p>
-        </p:txBody>
-      </p:sp>
-      <p:sp>
-        <p:nvSpPr>
-          <p:cNvPr id="35" name="TextBox 34"/>
-          <p:cNvSpPr txBox="1"/>
-          <p:nvPr/>
-        </p:nvSpPr>
-        <p:spPr>
-          <a:xfrm>
-            <a:off x="7726680" y="5349240"/>
-            <a:ext cx="3642055" cy="731520"/>
-          </a:xfrm>
-          <a:prstGeom prst="rect">
-            <a:avLst/>
-          </a:prstGeom>
-          <a:noFill/>
-        </p:spPr>
-        <p:txBody>
-          <a:bodyPr wrap="square" lIns="0" rIns="0" tIns="0" bIns="0" anchor="t">
-            <a:noAutofit/>
-          </a:bodyPr>
-          <a:lstStyle/>
-          <a:p>
-            <a:pPr algn="l">
-              <a:lnSpc>
-                <a:spcPct val="105000"/>
-              </a:lnSpc>
-              <a:spcAft>
-                <a:spcPts val="0"/>
-              </a:spcAft>
-            </a:pPr>
-            <a:r>
-              <a:rPr sz="1250" i="0" b="0">
-                <a:solidFill>
-                  <a:srgbClr val="647282"/>
-                </a:solidFill>
-                <a:latin typeface="Arial"/>
-              </a:rPr>
-              <a:t>Saatva: $80K–1.05M a year for every 10% of affiliate orders hijacked</a:t>
+              <a:t>Report the funnel stage per publisher</a:t>
             </a:r>
           </a:p>
         </p:txBody>
@@ -6563,7 +7211,7 @@
                 </a:solidFill>
                 <a:latin typeface="Arial"/>
               </a:rPr>
-              <a:t>ATTRIBUTION HIJACKING · SAATVA</a:t>
+              <a:t>ATTRIBUTION HIJACKING · IS THE CLICK INCREMENTAL?</a:t>
             </a:r>
           </a:p>
         </p:txBody>
@@ -6605,7 +7253,7 @@
                 </a:solidFill>
                 <a:latin typeface="Georgia"/>
               </a:rPr>
-              <a:t>The same patterns already appear at Saatva</a:t>
+              <a:t>A click fired at the cart adds no orders</a:t>
             </a:r>
           </a:p>
         </p:txBody>
@@ -6754,14 +7402,641 @@
       </p:sp>
       <p:sp>
         <p:nvSpPr>
-          <p:cNvPr id="8" name="Rectangle 7"/>
+          <p:cNvPr id="8" name="TextBox 7"/>
+          <p:cNvSpPr txBox="1"/>
+          <p:nvPr/>
+        </p:nvSpPr>
+        <p:spPr>
+          <a:xfrm>
+            <a:off x="548640" y="1508760"/>
+            <a:ext cx="6400800" cy="237744"/>
+          </a:xfrm>
+          <a:prstGeom prst="rect">
+            <a:avLst/>
+          </a:prstGeom>
+          <a:noFill/>
+        </p:spPr>
+        <p:txBody>
+          <a:bodyPr wrap="square" lIns="0" rIns="0" tIns="0" bIns="0" anchor="t">
+            <a:noAutofit/>
+          </a:bodyPr>
+          <a:lstStyle/>
+          <a:p>
+            <a:pPr algn="l">
+              <a:lnSpc>
+                <a:spcPct val="110000"/>
+              </a:lnSpc>
+              <a:spcAft>
+                <a:spcPts val="0"/>
+              </a:spcAft>
+            </a:pPr>
+            <a:r>
+              <a:rPr sz="1200" i="0" b="1">
+                <a:solidFill>
+                  <a:srgbClr val="647282"/>
+                </a:solidFill>
+                <a:latin typeface="Arial"/>
+              </a:rPr>
+              <a:t>Walmart shoppers who order within 2 hours, by the stage already reached</a:t>
+            </a:r>
+          </a:p>
+        </p:txBody>
+      </p:sp>
+      <p:sp>
+        <p:nvSpPr>
+          <p:cNvPr id="9" name="Rectangle 8"/>
           <p:cNvSpPr/>
           <p:nvPr/>
         </p:nvSpPr>
         <p:spPr>
           <a:xfrm>
-            <a:off x="548640" y="1508760"/>
-            <a:ext cx="3515258" cy="4663440"/>
+            <a:off x="548640" y="1847088"/>
+            <a:ext cx="146304" cy="146304"/>
+          </a:xfrm>
+          <a:prstGeom prst="rect">
+            <a:avLst/>
+          </a:prstGeom>
+          <a:solidFill>
+            <a:srgbClr val="B7C1CC"/>
+          </a:solidFill>
+          <a:ln>
+            <a:noFill/>
+          </a:ln>
+        </p:spPr>
+        <p:txBody>
+          <a:bodyPr rtlCol="0" anchor="ctr"/>
+          <a:lstStyle/>
+          <a:p>
+            <a:pPr algn="ctr"/>
+          </a:p>
+        </p:txBody>
+      </p:sp>
+      <p:sp>
+        <p:nvSpPr>
+          <p:cNvPr id="10" name="TextBox 9"/>
+          <p:cNvSpPr txBox="1"/>
+          <p:nvPr/>
+        </p:nvSpPr>
+        <p:spPr>
+          <a:xfrm>
+            <a:off x="777240" y="1810512"/>
+            <a:ext cx="4572000" cy="237744"/>
+          </a:xfrm>
+          <a:prstGeom prst="rect">
+            <a:avLst/>
+          </a:prstGeom>
+          <a:noFill/>
+        </p:spPr>
+        <p:txBody>
+          <a:bodyPr wrap="square" lIns="0" rIns="0" tIns="0" bIns="0" anchor="t">
+            <a:noAutofit/>
+          </a:bodyPr>
+          <a:lstStyle/>
+          <a:p>
+            <a:pPr algn="l">
+              <a:lnSpc>
+                <a:spcPct val="110000"/>
+              </a:lnSpc>
+              <a:spcAft>
+                <a:spcPts val="0"/>
+              </a:spcAft>
+            </a:pPr>
+            <a:r>
+              <a:rPr sz="1200" i="0" b="0">
+                <a:solidFill>
+                  <a:srgbClr val="647282"/>
+                </a:solidFill>
+                <a:latin typeface="Arial"/>
+              </a:rPr>
+              <a:t>No affiliate click</a:t>
+            </a:r>
+          </a:p>
+        </p:txBody>
+      </p:sp>
+      <p:sp>
+        <p:nvSpPr>
+          <p:cNvPr id="11" name="Rectangle 10"/>
+          <p:cNvSpPr/>
+          <p:nvPr/>
+        </p:nvSpPr>
+        <p:spPr>
+          <a:xfrm>
+            <a:off x="2591409" y="1847088"/>
+            <a:ext cx="146304" cy="146304"/>
+          </a:xfrm>
+          <a:prstGeom prst="rect">
+            <a:avLst/>
+          </a:prstGeom>
+          <a:solidFill>
+            <a:srgbClr val="FF9438"/>
+          </a:solidFill>
+          <a:ln>
+            <a:noFill/>
+          </a:ln>
+        </p:spPr>
+        <p:txBody>
+          <a:bodyPr rtlCol="0" anchor="ctr"/>
+          <a:lstStyle/>
+          <a:p>
+            <a:pPr algn="ctr"/>
+          </a:p>
+        </p:txBody>
+      </p:sp>
+      <p:sp>
+        <p:nvSpPr>
+          <p:cNvPr id="12" name="TextBox 11"/>
+          <p:cNvSpPr txBox="1"/>
+          <p:nvPr/>
+        </p:nvSpPr>
+        <p:spPr>
+          <a:xfrm>
+            <a:off x="2820009" y="1810512"/>
+            <a:ext cx="4572000" cy="237744"/>
+          </a:xfrm>
+          <a:prstGeom prst="rect">
+            <a:avLst/>
+          </a:prstGeom>
+          <a:noFill/>
+        </p:spPr>
+        <p:txBody>
+          <a:bodyPr wrap="square" lIns="0" rIns="0" tIns="0" bIns="0" anchor="t">
+            <a:noAutofit/>
+          </a:bodyPr>
+          <a:lstStyle/>
+          <a:p>
+            <a:pPr algn="l">
+              <a:lnSpc>
+                <a:spcPct val="110000"/>
+              </a:lnSpc>
+              <a:spcAft>
+                <a:spcPts val="0"/>
+              </a:spcAft>
+            </a:pPr>
+            <a:r>
+              <a:rPr sz="1200" i="0" b="0">
+                <a:solidFill>
+                  <a:srgbClr val="647282"/>
+                </a:solidFill>
+                <a:latin typeface="Arial"/>
+              </a:rPr>
+              <a:t>Affiliate click fired afterwards</a:t>
+            </a:r>
+          </a:p>
+        </p:txBody>
+      </p:sp>
+      <p:sp>
+        <p:nvSpPr>
+          <p:cNvPr id="13" name="TextBox 12"/>
+          <p:cNvSpPr txBox="1"/>
+          <p:nvPr/>
+        </p:nvSpPr>
+        <p:spPr>
+          <a:xfrm>
+            <a:off x="548640" y="2697479"/>
+            <a:ext cx="1783080" cy="274320"/>
+          </a:xfrm>
+          <a:prstGeom prst="rect">
+            <a:avLst/>
+          </a:prstGeom>
+          <a:noFill/>
+        </p:spPr>
+        <p:txBody>
+          <a:bodyPr wrap="square" lIns="0" rIns="0" tIns="0" bIns="0" anchor="t">
+            <a:noAutofit/>
+          </a:bodyPr>
+          <a:lstStyle/>
+          <a:p>
+            <a:pPr algn="l">
+              <a:lnSpc>
+                <a:spcPct val="110000"/>
+              </a:lnSpc>
+              <a:spcAft>
+                <a:spcPts val="0"/>
+              </a:spcAft>
+            </a:pPr>
+            <a:r>
+              <a:rPr sz="1400" i="0" b="0">
+                <a:solidFill>
+                  <a:srgbClr val="1E2833"/>
+                </a:solidFill>
+                <a:latin typeface="Arial"/>
+              </a:rPr>
+              <a:t>Viewed the cart</a:t>
+            </a:r>
+          </a:p>
+        </p:txBody>
+      </p:sp>
+      <p:sp>
+        <p:nvSpPr>
+          <p:cNvPr id="14" name="Round Same Side Corner Rectangle 13"/>
+          <p:cNvSpPr/>
+          <p:nvPr/>
+        </p:nvSpPr>
+        <p:spPr>
+          <a:xfrm rot="5400000">
+            <a:off x="2881091" y="1919508"/>
+            <a:ext cx="384048" cy="1391351"/>
+          </a:xfrm>
+          <a:prstGeom prst="round2SameRect">
+            <a:avLst>
+              <a:gd name="adj1" fmla="val 14000"/>
+              <a:gd name="adj2" fmla="val 0"/>
+            </a:avLst>
+          </a:prstGeom>
+          <a:solidFill>
+            <a:srgbClr val="B7C1CC"/>
+          </a:solidFill>
+          <a:ln>
+            <a:noFill/>
+          </a:ln>
+        </p:spPr>
+        <p:txBody>
+          <a:bodyPr rtlCol="0" anchor="ctr"/>
+          <a:lstStyle/>
+          <a:p>
+            <a:pPr algn="ctr"/>
+          </a:p>
+        </p:txBody>
+      </p:sp>
+      <p:sp>
+        <p:nvSpPr>
+          <p:cNvPr id="15" name="TextBox 14"/>
+          <p:cNvSpPr txBox="1"/>
+          <p:nvPr/>
+        </p:nvSpPr>
+        <p:spPr>
+          <a:xfrm>
+            <a:off x="3860231" y="2478024"/>
+            <a:ext cx="1600200" cy="274320"/>
+          </a:xfrm>
+          <a:prstGeom prst="rect">
+            <a:avLst/>
+          </a:prstGeom>
+          <a:noFill/>
+        </p:spPr>
+        <p:txBody>
+          <a:bodyPr wrap="square" lIns="0" rIns="0" tIns="0" bIns="0" anchor="t">
+            <a:noAutofit/>
+          </a:bodyPr>
+          <a:lstStyle/>
+          <a:p>
+            <a:pPr algn="l">
+              <a:lnSpc>
+                <a:spcPct val="110000"/>
+              </a:lnSpc>
+              <a:spcAft>
+                <a:spcPts val="0"/>
+              </a:spcAft>
+            </a:pPr>
+            <a:r>
+              <a:rPr sz="1300" i="0" b="0">
+                <a:solidFill>
+                  <a:srgbClr val="1E2833"/>
+                </a:solidFill>
+                <a:latin typeface="Arial"/>
+              </a:rPr>
+              <a:t>32%   (n = 1,280)</a:t>
+            </a:r>
+          </a:p>
+        </p:txBody>
+      </p:sp>
+      <p:sp>
+        <p:nvSpPr>
+          <p:cNvPr id="16" name="Round Same Side Corner Rectangle 15"/>
+          <p:cNvSpPr/>
+          <p:nvPr/>
+        </p:nvSpPr>
+        <p:spPr>
+          <a:xfrm rot="5400000">
+            <a:off x="2935955" y="2303556"/>
+            <a:ext cx="384048" cy="1501079"/>
+          </a:xfrm>
+          <a:prstGeom prst="round2SameRect">
+            <a:avLst>
+              <a:gd name="adj1" fmla="val 14000"/>
+              <a:gd name="adj2" fmla="val 0"/>
+            </a:avLst>
+          </a:prstGeom>
+          <a:solidFill>
+            <a:srgbClr val="FF9438"/>
+          </a:solidFill>
+          <a:ln>
+            <a:noFill/>
+          </a:ln>
+        </p:spPr>
+        <p:txBody>
+          <a:bodyPr rtlCol="0" anchor="ctr"/>
+          <a:lstStyle/>
+          <a:p>
+            <a:pPr algn="ctr"/>
+          </a:p>
+        </p:txBody>
+      </p:sp>
+      <p:sp>
+        <p:nvSpPr>
+          <p:cNvPr id="17" name="TextBox 16"/>
+          <p:cNvSpPr txBox="1"/>
+          <p:nvPr/>
+        </p:nvSpPr>
+        <p:spPr>
+          <a:xfrm>
+            <a:off x="3969959" y="2916936"/>
+            <a:ext cx="1600200" cy="274320"/>
+          </a:xfrm>
+          <a:prstGeom prst="rect">
+            <a:avLst/>
+          </a:prstGeom>
+          <a:noFill/>
+        </p:spPr>
+        <p:txBody>
+          <a:bodyPr wrap="square" lIns="0" rIns="0" tIns="0" bIns="0" anchor="t">
+            <a:noAutofit/>
+          </a:bodyPr>
+          <a:lstStyle/>
+          <a:p>
+            <a:pPr algn="l">
+              <a:lnSpc>
+                <a:spcPct val="110000"/>
+              </a:lnSpc>
+              <a:spcAft>
+                <a:spcPts val="0"/>
+              </a:spcAft>
+            </a:pPr>
+            <a:r>
+              <a:rPr sz="1300" i="0" b="1">
+                <a:solidFill>
+                  <a:srgbClr val="1E2833"/>
+                </a:solidFill>
+                <a:latin typeface="Arial"/>
+              </a:rPr>
+              <a:t>34%   (n = 38)</a:t>
+            </a:r>
+          </a:p>
+        </p:txBody>
+      </p:sp>
+      <p:sp>
+        <p:nvSpPr>
+          <p:cNvPr id="18" name="TextBox 17"/>
+          <p:cNvSpPr txBox="1"/>
+          <p:nvPr/>
+        </p:nvSpPr>
+        <p:spPr>
+          <a:xfrm>
+            <a:off x="548640" y="4114800"/>
+            <a:ext cx="1783080" cy="274320"/>
+          </a:xfrm>
+          <a:prstGeom prst="rect">
+            <a:avLst/>
+          </a:prstGeom>
+          <a:noFill/>
+        </p:spPr>
+        <p:txBody>
+          <a:bodyPr wrap="square" lIns="0" rIns="0" tIns="0" bIns="0" anchor="t">
+            <a:noAutofit/>
+          </a:bodyPr>
+          <a:lstStyle/>
+          <a:p>
+            <a:pPr algn="l">
+              <a:lnSpc>
+                <a:spcPct val="110000"/>
+              </a:lnSpc>
+              <a:spcAft>
+                <a:spcPts val="0"/>
+              </a:spcAft>
+            </a:pPr>
+            <a:r>
+              <a:rPr sz="1400" i="0" b="0">
+                <a:solidFill>
+                  <a:srgbClr val="1E2833"/>
+                </a:solidFill>
+                <a:latin typeface="Arial"/>
+              </a:rPr>
+              <a:t>Reached checkout</a:t>
+            </a:r>
+          </a:p>
+        </p:txBody>
+      </p:sp>
+      <p:sp>
+        <p:nvSpPr>
+          <p:cNvPr id="19" name="Round Same Side Corner Rectangle 18"/>
+          <p:cNvSpPr/>
+          <p:nvPr/>
+        </p:nvSpPr>
+        <p:spPr>
+          <a:xfrm rot="5400000">
+            <a:off x="3848892" y="2369027"/>
+            <a:ext cx="384048" cy="3326952"/>
+          </a:xfrm>
+          <a:prstGeom prst="round2SameRect">
+            <a:avLst>
+              <a:gd name="adj1" fmla="val 14000"/>
+              <a:gd name="adj2" fmla="val 0"/>
+            </a:avLst>
+          </a:prstGeom>
+          <a:solidFill>
+            <a:srgbClr val="B7C1CC"/>
+          </a:solidFill>
+          <a:ln>
+            <a:noFill/>
+          </a:ln>
+        </p:spPr>
+        <p:txBody>
+          <a:bodyPr rtlCol="0" anchor="ctr"/>
+          <a:lstStyle/>
+          <a:p>
+            <a:pPr algn="ctr"/>
+          </a:p>
+        </p:txBody>
+      </p:sp>
+      <p:sp>
+        <p:nvSpPr>
+          <p:cNvPr id="20" name="TextBox 19"/>
+          <p:cNvSpPr txBox="1"/>
+          <p:nvPr/>
+        </p:nvSpPr>
+        <p:spPr>
+          <a:xfrm>
+            <a:off x="5795832" y="3895344"/>
+            <a:ext cx="1600200" cy="274320"/>
+          </a:xfrm>
+          <a:prstGeom prst="rect">
+            <a:avLst/>
+          </a:prstGeom>
+          <a:noFill/>
+        </p:spPr>
+        <p:txBody>
+          <a:bodyPr wrap="square" lIns="0" rIns="0" tIns="0" bIns="0" anchor="t">
+            <a:noAutofit/>
+          </a:bodyPr>
+          <a:lstStyle/>
+          <a:p>
+            <a:pPr algn="l">
+              <a:lnSpc>
+                <a:spcPct val="110000"/>
+              </a:lnSpc>
+              <a:spcAft>
+                <a:spcPts val="0"/>
+              </a:spcAft>
+            </a:pPr>
+            <a:r>
+              <a:rPr sz="1300" i="0" b="0">
+                <a:solidFill>
+                  <a:srgbClr val="1E2833"/>
+                </a:solidFill>
+                <a:latin typeface="Arial"/>
+              </a:rPr>
+              <a:t>76%   (n = 759)</a:t>
+            </a:r>
+          </a:p>
+        </p:txBody>
+      </p:sp>
+      <p:sp>
+        <p:nvSpPr>
+          <p:cNvPr id="21" name="Round Same Side Corner Rectangle 20"/>
+          <p:cNvSpPr/>
+          <p:nvPr/>
+        </p:nvSpPr>
+        <p:spPr>
+          <a:xfrm rot="5400000">
+            <a:off x="3649187" y="3007644"/>
+            <a:ext cx="384048" cy="2927543"/>
+          </a:xfrm>
+          <a:prstGeom prst="round2SameRect">
+            <a:avLst>
+              <a:gd name="adj1" fmla="val 14000"/>
+              <a:gd name="adj2" fmla="val 0"/>
+            </a:avLst>
+          </a:prstGeom>
+          <a:solidFill>
+            <a:srgbClr val="FF9438"/>
+          </a:solidFill>
+          <a:ln>
+            <a:noFill/>
+          </a:ln>
+        </p:spPr>
+        <p:txBody>
+          <a:bodyPr rtlCol="0" anchor="ctr"/>
+          <a:lstStyle/>
+          <a:p>
+            <a:pPr algn="ctr"/>
+          </a:p>
+        </p:txBody>
+      </p:sp>
+      <p:sp>
+        <p:nvSpPr>
+          <p:cNvPr id="22" name="TextBox 21"/>
+          <p:cNvSpPr txBox="1"/>
+          <p:nvPr/>
+        </p:nvSpPr>
+        <p:spPr>
+          <a:xfrm>
+            <a:off x="5396423" y="4334255"/>
+            <a:ext cx="1600200" cy="274320"/>
+          </a:xfrm>
+          <a:prstGeom prst="rect">
+            <a:avLst/>
+          </a:prstGeom>
+          <a:noFill/>
+        </p:spPr>
+        <p:txBody>
+          <a:bodyPr wrap="square" lIns="0" rIns="0" tIns="0" bIns="0" anchor="t">
+            <a:noAutofit/>
+          </a:bodyPr>
+          <a:lstStyle/>
+          <a:p>
+            <a:pPr algn="l">
+              <a:lnSpc>
+                <a:spcPct val="110000"/>
+              </a:lnSpc>
+              <a:spcAft>
+                <a:spcPts val="0"/>
+              </a:spcAft>
+            </a:pPr>
+            <a:r>
+              <a:rPr sz="1300" i="0" b="1">
+                <a:solidFill>
+                  <a:srgbClr val="1E2833"/>
+                </a:solidFill>
+                <a:latin typeface="Arial"/>
+              </a:rPr>
+              <a:t>67%   (n = 18)</a:t>
+            </a:r>
+          </a:p>
+        </p:txBody>
+      </p:sp>
+      <p:cxnSp>
+        <p:nvCxnSpPr>
+          <p:cNvPr id="23" name="Connector 22"/>
+          <p:cNvCxnSpPr/>
+          <p:nvPr/>
+        </p:nvCxnSpPr>
+        <p:spPr>
+          <a:xfrm>
+            <a:off x="2377440" y="2286000"/>
+            <a:ext cx="0" cy="2551176"/>
+          </a:xfrm>
+          <a:prstGeom prst="line">
+            <a:avLst/>
+          </a:prstGeom>
+          <a:ln w="9525">
+            <a:solidFill>
+              <a:srgbClr val="1E2833"/>
+            </a:solidFill>
+          </a:ln>
+        </p:spPr>
+      </p:cxnSp>
+      <p:sp>
+        <p:nvSpPr>
+          <p:cNvPr id="24" name="TextBox 23"/>
+          <p:cNvSpPr txBox="1"/>
+          <p:nvPr/>
+        </p:nvSpPr>
+        <p:spPr>
+          <a:xfrm>
+            <a:off x="548640" y="5440680"/>
+            <a:ext cx="6583680" cy="548640"/>
+          </a:xfrm>
+          <a:prstGeom prst="rect">
+            <a:avLst/>
+          </a:prstGeom>
+          <a:noFill/>
+        </p:spPr>
+        <p:txBody>
+          <a:bodyPr wrap="square" lIns="0" rIns="0" tIns="0" bIns="0" anchor="t">
+            <a:noAutofit/>
+          </a:bodyPr>
+          <a:lstStyle/>
+          <a:p>
+            <a:pPr algn="l">
+              <a:lnSpc>
+                <a:spcPct val="105000"/>
+              </a:lnSpc>
+              <a:spcAft>
+                <a:spcPts val="0"/>
+              </a:spcAft>
+            </a:pPr>
+            <a:r>
+              <a:rPr sz="1200" i="0" b="0">
+                <a:solidFill>
+                  <a:srgbClr val="647282"/>
+                </a:solidFill>
+                <a:latin typeface="Arial"/>
+              </a:rPr>
+              <a:t>Stage fixed at the first cart or checkout view, before any click. Shoppers an affiliate brought to the cart are excluded.</a:t>
+            </a:r>
+          </a:p>
+        </p:txBody>
+      </p:sp>
+      <p:sp>
+        <p:nvSpPr>
+          <p:cNvPr id="25" name="Rectangle 24"/>
+          <p:cNvSpPr/>
+          <p:nvPr/>
+        </p:nvSpPr>
+        <p:spPr>
+          <a:xfrm>
+            <a:off x="7452360" y="1508760"/>
+            <a:ext cx="4190695" cy="2148840"/>
           </a:xfrm>
           <a:prstGeom prst="rect">
             <a:avLst/>
@@ -6783,19 +8058,17 @@
       </p:sp>
       <p:sp>
         <p:nvSpPr>
-          <p:cNvPr id="9" name="Rounded Rectangle 8"/>
+          <p:cNvPr id="26" name="Oval 25"/>
           <p:cNvSpPr/>
           <p:nvPr/>
         </p:nvSpPr>
         <p:spPr>
           <a:xfrm>
-            <a:off x="822959" y="1755648"/>
-            <a:ext cx="1645919" cy="310896"/>
-          </a:xfrm>
-          <a:prstGeom prst="roundRect">
-            <a:avLst>
-              <a:gd name="adj" fmla="val 50000"/>
-            </a:avLst>
+            <a:off x="7726680" y="1810512"/>
+            <a:ext cx="146304" cy="146304"/>
+          </a:xfrm>
+          <a:prstGeom prst="ellipse">
+            <a:avLst/>
           </a:prstGeom>
           <a:solidFill>
             <a:srgbClr val="FF9438"/>
@@ -6805,12 +8078,36 @@
           </a:ln>
         </p:spPr>
         <p:txBody>
-          <a:bodyPr rtlCol="0" anchor="ctr" wrap="square" lIns="73152" rIns="73152" tIns="18288" bIns="18288">
-            <a:noAutofit/>
-          </a:bodyPr>
-          <a:lstStyle/>
-          <a:p>
-            <a:pPr algn="ctr">
+          <a:bodyPr rtlCol="0" anchor="ctr"/>
+          <a:lstStyle/>
+          <a:p>
+            <a:pPr algn="ctr"/>
+          </a:p>
+        </p:txBody>
+      </p:sp>
+      <p:sp>
+        <p:nvSpPr>
+          <p:cNvPr id="27" name="TextBox 26"/>
+          <p:cNvSpPr txBox="1"/>
+          <p:nvPr/>
+        </p:nvSpPr>
+        <p:spPr>
+          <a:xfrm>
+            <a:off x="7955280" y="1755648"/>
+            <a:ext cx="3459175" cy="256032"/>
+          </a:xfrm>
+          <a:prstGeom prst="rect">
+            <a:avLst/>
+          </a:prstGeom>
+          <a:noFill/>
+        </p:spPr>
+        <p:txBody>
+          <a:bodyPr wrap="square" lIns="0" rIns="0" tIns="0" bIns="0" anchor="t">
+            <a:noAutofit/>
+          </a:bodyPr>
+          <a:lstStyle/>
+          <a:p>
+            <a:pPr algn="l">
               <a:lnSpc>
                 <a:spcPct val="110000"/>
               </a:lnSpc>
@@ -6821,340 +8118,154 @@
             <a:r>
               <a:rPr sz="1200" i="0" b="1">
                 <a:solidFill>
-                  <a:srgbClr val="FFFFFF"/>
-                </a:solidFill>
-                <a:latin typeface="Arial"/>
-              </a:rPr>
-              <a:t>Cookie stuffing</a:t>
-            </a:r>
-          </a:p>
-        </p:txBody>
-      </p:sp>
-      <p:sp>
-        <p:nvSpPr>
-          <p:cNvPr id="10" name="Rounded Rectangle 9"/>
+                  <a:srgbClr val="647282"/>
+                </a:solidFill>
+                <a:latin typeface="Arial"/>
+              </a:rPr>
+              <a:t>56 shoppers who got a click</a:t>
+            </a:r>
+          </a:p>
+        </p:txBody>
+      </p:sp>
+      <p:sp>
+        <p:nvSpPr>
+          <p:cNvPr id="28" name="TextBox 27"/>
+          <p:cNvSpPr txBox="1"/>
+          <p:nvPr/>
+        </p:nvSpPr>
+        <p:spPr>
+          <a:xfrm>
+            <a:off x="7726680" y="2075688"/>
+            <a:ext cx="3642055" cy="685800"/>
+          </a:xfrm>
+          <a:prstGeom prst="rect">
+            <a:avLst/>
+          </a:prstGeom>
+          <a:noFill/>
+        </p:spPr>
+        <p:txBody>
+          <a:bodyPr wrap="square" lIns="0" rIns="0" tIns="0" bIns="0" anchor="t">
+            <a:noAutofit/>
+          </a:bodyPr>
+          <a:lstStyle/>
+          <a:p>
+            <a:pPr algn="l">
+              <a:lnSpc>
+                <a:spcPct val="110000"/>
+              </a:lnSpc>
+              <a:spcAft>
+                <a:spcPts val="0"/>
+              </a:spcAft>
+            </a:pPr>
+            <a:r>
+              <a:rPr sz="4000" i="0" b="1">
+                <a:solidFill>
+                  <a:srgbClr val="0B2A4A"/>
+                </a:solidFill>
+                <a:latin typeface="Arial"/>
+              </a:rPr>
+              <a:t>25 vs 25.7</a:t>
+            </a:r>
+          </a:p>
+        </p:txBody>
+      </p:sp>
+      <p:sp>
+        <p:nvSpPr>
+          <p:cNvPr id="29" name="TextBox 28"/>
+          <p:cNvSpPr txBox="1"/>
+          <p:nvPr/>
+        </p:nvSpPr>
+        <p:spPr>
+          <a:xfrm>
+            <a:off x="7726680" y="2788920"/>
+            <a:ext cx="3642055" cy="274320"/>
+          </a:xfrm>
+          <a:prstGeom prst="rect">
+            <a:avLst/>
+          </a:prstGeom>
+          <a:noFill/>
+        </p:spPr>
+        <p:txBody>
+          <a:bodyPr wrap="square" lIns="0" rIns="0" tIns="0" bIns="0" anchor="t">
+            <a:noAutofit/>
+          </a:bodyPr>
+          <a:lstStyle/>
+          <a:p>
+            <a:pPr algn="l">
+              <a:lnSpc>
+                <a:spcPct val="110000"/>
+              </a:lnSpc>
+              <a:spcAft>
+                <a:spcPts val="0"/>
+              </a:spcAft>
+            </a:pPr>
+            <a:r>
+              <a:rPr sz="1400" i="0" b="1">
+                <a:solidFill>
+                  <a:srgbClr val="1E2833"/>
+                </a:solidFill>
+                <a:latin typeface="Arial"/>
+              </a:rPr>
+              <a:t>orders, vs expected without the click</a:t>
+            </a:r>
+          </a:p>
+        </p:txBody>
+      </p:sp>
+      <p:sp>
+        <p:nvSpPr>
+          <p:cNvPr id="30" name="TextBox 29"/>
+          <p:cNvSpPr txBox="1"/>
+          <p:nvPr/>
+        </p:nvSpPr>
+        <p:spPr>
+          <a:xfrm>
+            <a:off x="7726680" y="3154680"/>
+            <a:ext cx="3642055" cy="274320"/>
+          </a:xfrm>
+          <a:prstGeom prst="rect">
+            <a:avLst/>
+          </a:prstGeom>
+          <a:noFill/>
+        </p:spPr>
+        <p:txBody>
+          <a:bodyPr wrap="square" lIns="0" rIns="0" tIns="0" bIns="0" anchor="t">
+            <a:noAutofit/>
+          </a:bodyPr>
+          <a:lstStyle/>
+          <a:p>
+            <a:pPr algn="l">
+              <a:lnSpc>
+                <a:spcPct val="110000"/>
+              </a:lnSpc>
+              <a:spcAft>
+                <a:spcPts val="0"/>
+              </a:spcAft>
+            </a:pPr>
+            <a:r>
+              <a:rPr sz="1250" i="0" b="0">
+                <a:solidFill>
+                  <a:srgbClr val="647282"/>
+                </a:solidFill>
+                <a:latin typeface="Arial"/>
+              </a:rPr>
+              <a:t>At most ~31% incremental (95% upper bound)</a:t>
+            </a:r>
+          </a:p>
+        </p:txBody>
+      </p:sp>
+      <p:sp>
+        <p:nvSpPr>
+          <p:cNvPr id="31" name="Rectangle 30"/>
           <p:cNvSpPr/>
           <p:nvPr/>
         </p:nvSpPr>
         <p:spPr>
           <a:xfrm>
-            <a:off x="822959" y="2377440"/>
-            <a:ext cx="2966618" cy="512064"/>
-          </a:xfrm>
-          <a:prstGeom prst="roundRect">
-            <a:avLst>
-              <a:gd name="adj" fmla="val 15000"/>
-            </a:avLst>
-          </a:prstGeom>
-          <a:solidFill>
-            <a:srgbClr val="FFFFFF"/>
-          </a:solidFill>
-          <a:ln w="9525">
-            <a:solidFill>
-              <a:srgbClr val="E3E8EE"/>
-            </a:solidFill>
-          </a:ln>
-        </p:spPr>
-        <p:txBody>
-          <a:bodyPr rtlCol="0" anchor="ctr" wrap="square" lIns="109728" rIns="109728" tIns="18288" bIns="18288">
-            <a:noAutofit/>
-          </a:bodyPr>
-          <a:lstStyle/>
-          <a:p>
-            <a:pPr algn="ctr">
-              <a:lnSpc>
-                <a:spcPct val="110000"/>
-              </a:lnSpc>
-              <a:spcAft>
-                <a:spcPts val="0"/>
-              </a:spcAft>
-            </a:pPr>
-            <a:r>
-              <a:rPr sz="1300" i="0" b="0">
-                <a:solidFill>
-                  <a:srgbClr val="1E2833"/>
-                </a:solidFill>
-                <a:latin typeface="Arial"/>
-              </a:rPr>
-              <a:t>"New tab" browser extension</a:t>
-            </a:r>
-          </a:p>
-        </p:txBody>
-      </p:sp>
-      <p:cxnSp>
-        <p:nvCxnSpPr>
-          <p:cNvPr id="11" name="Connector 10"/>
-          <p:cNvCxnSpPr/>
-          <p:nvPr/>
-        </p:nvCxnSpPr>
-        <p:spPr>
-          <a:xfrm>
-            <a:off x="2306269" y="2926080"/>
-            <a:ext cx="0" cy="201168"/>
-          </a:xfrm>
-          <a:prstGeom prst="line">
-            <a:avLst/>
-          </a:prstGeom>
-          <a:ln w="15875">
-            <a:solidFill>
-              <a:srgbClr val="647282"/>
-            </a:solidFill>
-            <a:tailEnd type="triangle" w="med" len="med"/>
-          </a:ln>
-        </p:spPr>
-      </p:cxnSp>
-      <p:sp>
-        <p:nvSpPr>
-          <p:cNvPr id="12" name="Rounded Rectangle 11"/>
-          <p:cNvSpPr/>
-          <p:nvPr/>
-        </p:nvSpPr>
-        <p:spPr>
-          <a:xfrm>
-            <a:off x="822959" y="3163824"/>
-            <a:ext cx="2966618" cy="512064"/>
-          </a:xfrm>
-          <a:prstGeom prst="roundRect">
-            <a:avLst>
-              <a:gd name="adj" fmla="val 15000"/>
-            </a:avLst>
-          </a:prstGeom>
-          <a:solidFill>
-            <a:srgbClr val="FFFFFF"/>
-          </a:solidFill>
-          <a:ln w="9525">
-            <a:solidFill>
-              <a:srgbClr val="E3E8EE"/>
-            </a:solidFill>
-          </a:ln>
-        </p:spPr>
-        <p:txBody>
-          <a:bodyPr rtlCol="0" anchor="ctr" wrap="square" lIns="109728" rIns="109728" tIns="18288" bIns="18288">
-            <a:noAutofit/>
-          </a:bodyPr>
-          <a:lstStyle/>
-          <a:p>
-            <a:pPr algn="ctr">
-              <a:lnSpc>
-                <a:spcPct val="110000"/>
-              </a:lnSpc>
-              <a:spcAft>
-                <a:spcPts val="0"/>
-              </a:spcAft>
-            </a:pPr>
-            <a:r>
-              <a:rPr sz="1300" i="0" b="0">
-                <a:solidFill>
-                  <a:srgbClr val="1E2833"/>
-                </a:solidFill>
-                <a:latin typeface="Arial"/>
-              </a:rPr>
-              <a:t>Partnerize click registered</a:t>
-            </a:r>
-          </a:p>
-        </p:txBody>
-      </p:sp>
-      <p:cxnSp>
-        <p:nvCxnSpPr>
-          <p:cNvPr id="13" name="Connector 12"/>
-          <p:cNvCxnSpPr/>
-          <p:nvPr/>
-        </p:nvCxnSpPr>
-        <p:spPr>
-          <a:xfrm>
-            <a:off x="2306269" y="3712463"/>
-            <a:ext cx="0" cy="201169"/>
-          </a:xfrm>
-          <a:prstGeom prst="line">
-            <a:avLst/>
-          </a:prstGeom>
-          <a:ln w="15875">
-            <a:solidFill>
-              <a:srgbClr val="647282"/>
-            </a:solidFill>
-            <a:tailEnd type="triangle" w="med" len="med"/>
-          </a:ln>
-        </p:spPr>
-      </p:cxnSp>
-      <p:sp>
-        <p:nvSpPr>
-          <p:cNvPr id="14" name="Rounded Rectangle 13"/>
-          <p:cNvSpPr/>
-          <p:nvPr/>
-        </p:nvSpPr>
-        <p:spPr>
-          <a:xfrm>
-            <a:off x="822959" y="3950208"/>
-            <a:ext cx="2966618" cy="512064"/>
-          </a:xfrm>
-          <a:prstGeom prst="roundRect">
-            <a:avLst>
-              <a:gd name="adj" fmla="val 15000"/>
-            </a:avLst>
-          </a:prstGeom>
-          <a:solidFill>
-            <a:srgbClr val="FFF1E5"/>
-          </a:solidFill>
-          <a:ln w="15875">
-            <a:solidFill>
-              <a:srgbClr val="FF9438"/>
-            </a:solidFill>
-          </a:ln>
-        </p:spPr>
-        <p:txBody>
-          <a:bodyPr rtlCol="0" anchor="ctr" wrap="square" lIns="109728" rIns="109728" tIns="18288" bIns="18288">
-            <a:noAutofit/>
-          </a:bodyPr>
-          <a:lstStyle/>
-          <a:p>
-            <a:pPr algn="ctr">
-              <a:lnSpc>
-                <a:spcPct val="110000"/>
-              </a:lnSpc>
-              <a:spcAft>
-                <a:spcPts val="0"/>
-              </a:spcAft>
-            </a:pPr>
-            <a:r>
-              <a:rPr sz="1300" i="0" b="1">
-                <a:solidFill>
-                  <a:srgbClr val="C9620E"/>
-                </a:solidFill>
-                <a:latin typeface="Arial"/>
-              </a:rPr>
-              <a:t>saatva.com never loads</a:t>
-            </a:r>
-          </a:p>
-        </p:txBody>
-      </p:sp>
-      <p:sp>
-        <p:nvSpPr>
-          <p:cNvPr id="15" name="TextBox 14"/>
-          <p:cNvSpPr txBox="1"/>
-          <p:nvPr/>
-        </p:nvSpPr>
-        <p:spPr>
-          <a:xfrm>
-            <a:off x="822959" y="4892040"/>
-            <a:ext cx="2966618" cy="566928"/>
-          </a:xfrm>
-          <a:prstGeom prst="rect">
-            <a:avLst/>
-          </a:prstGeom>
-          <a:noFill/>
-        </p:spPr>
-        <p:txBody>
-          <a:bodyPr wrap="square" lIns="0" rIns="0" tIns="0" bIns="0" anchor="t">
-            <a:noAutofit/>
-          </a:bodyPr>
-          <a:lstStyle/>
-          <a:p>
-            <a:pPr algn="l">
-              <a:lnSpc>
-                <a:spcPct val="105000"/>
-              </a:lnSpc>
-              <a:spcAft>
-                <a:spcPts val="0"/>
-              </a:spcAft>
-            </a:pPr>
-            <a:r>
-              <a:rPr sz="1500" i="0" b="1">
-                <a:solidFill>
-                  <a:srgbClr val="0B2A4A"/>
-                </a:solidFill>
-                <a:latin typeface="Arial"/>
-              </a:rPr>
-              <a:t>A commission without a visit</a:t>
-            </a:r>
-          </a:p>
-        </p:txBody>
-      </p:sp>
-      <p:sp>
-        <p:nvSpPr>
-          <p:cNvPr id="16" name="TextBox 15"/>
-          <p:cNvSpPr txBox="1"/>
-          <p:nvPr/>
-        </p:nvSpPr>
-        <p:spPr>
-          <a:xfrm>
-            <a:off x="822959" y="5532120"/>
-            <a:ext cx="2966618" cy="457200"/>
-          </a:xfrm>
-          <a:prstGeom prst="rect">
-            <a:avLst/>
-          </a:prstGeom>
-          <a:noFill/>
-        </p:spPr>
-        <p:txBody>
-          <a:bodyPr wrap="square" lIns="0" rIns="0" tIns="0" bIns="0" anchor="t">
-            <a:noAutofit/>
-          </a:bodyPr>
-          <a:lstStyle/>
-          <a:p>
-            <a:pPr algn="l">
-              <a:lnSpc>
-                <a:spcPct val="110000"/>
-              </a:lnSpc>
-              <a:spcAft>
-                <a:spcPts val="0"/>
-              </a:spcAft>
-            </a:pPr>
-            <a:r>
-              <a:rPr sz="1300" i="0" b="0">
-                <a:solidFill>
-                  <a:srgbClr val="1E2833"/>
-                </a:solidFill>
-                <a:latin typeface="Arial"/>
-              </a:rPr>
-              <a:t>→  Reconcile clicks with landings</a:t>
-            </a:r>
-          </a:p>
-        </p:txBody>
-      </p:sp>
-      <p:sp>
-        <p:nvSpPr>
-          <p:cNvPr id="17" name="Rectangle 16"/>
-          <p:cNvSpPr/>
-          <p:nvPr/>
-        </p:nvSpPr>
-        <p:spPr>
-          <a:xfrm>
-            <a:off x="4338218" y="1508760"/>
-            <a:ext cx="3515258" cy="4663440"/>
-          </a:xfrm>
-          <a:prstGeom prst="rect">
-            <a:avLst/>
-          </a:prstGeom>
-          <a:solidFill>
-            <a:srgbClr val="F3F6F9"/>
-          </a:solidFill>
-          <a:ln>
-            <a:noFill/>
-          </a:ln>
-        </p:spPr>
-        <p:txBody>
-          <a:bodyPr rtlCol="0" anchor="ctr"/>
-          <a:lstStyle/>
-          <a:p>
-            <a:pPr algn="ctr"/>
-          </a:p>
-        </p:txBody>
-      </p:sp>
-      <p:sp>
-        <p:nvSpPr>
-          <p:cNvPr id="18" name="Rounded Rectangle 17"/>
-          <p:cNvSpPr/>
-          <p:nvPr/>
-        </p:nvSpPr>
-        <p:spPr>
-          <a:xfrm>
-            <a:off x="4612538" y="1755648"/>
-            <a:ext cx="2350008" cy="310896"/>
-          </a:xfrm>
-          <a:prstGeom prst="roundRect">
-            <a:avLst>
-              <a:gd name="adj" fmla="val 50000"/>
-            </a:avLst>
+            <a:off x="7452360" y="3840480"/>
+            <a:ext cx="4190695" cy="2331720"/>
+          </a:xfrm>
+          <a:prstGeom prst="rect">
+            <a:avLst/>
           </a:prstGeom>
           <a:solidFill>
             <a:srgbClr val="FFF1E5"/>
@@ -7164,12 +8275,36 @@
           </a:ln>
         </p:spPr>
         <p:txBody>
-          <a:bodyPr rtlCol="0" anchor="ctr" wrap="square" lIns="73152" rIns="73152" tIns="18288" bIns="18288">
-            <a:noAutofit/>
-          </a:bodyPr>
-          <a:lstStyle/>
-          <a:p>
-            <a:pPr algn="ctr">
+          <a:bodyPr rtlCol="0" anchor="ctr"/>
+          <a:lstStyle/>
+          <a:p>
+            <a:pPr algn="ctr"/>
+          </a:p>
+        </p:txBody>
+      </p:sp>
+      <p:sp>
+        <p:nvSpPr>
+          <p:cNvPr id="32" name="TextBox 31"/>
+          <p:cNvSpPr txBox="1"/>
+          <p:nvPr/>
+        </p:nvSpPr>
+        <p:spPr>
+          <a:xfrm>
+            <a:off x="7726680" y="4041648"/>
+            <a:ext cx="3642055" cy="256032"/>
+          </a:xfrm>
+          <a:prstGeom prst="rect">
+            <a:avLst/>
+          </a:prstGeom>
+          <a:noFill/>
+        </p:spPr>
+        <p:txBody>
+          <a:bodyPr wrap="square" lIns="0" rIns="0" tIns="0" bIns="0" anchor="t">
+            <a:noAutofit/>
+          </a:bodyPr>
+          <a:lstStyle/>
+          <a:p>
+            <a:pPr algn="l">
               <a:lnSpc>
                 <a:spcPct val="110000"/>
               </a:lnSpc>
@@ -7180,47 +8315,38 @@
             <a:r>
               <a:rPr sz="1200" i="0" b="1">
                 <a:solidFill>
-                  <a:srgbClr val="C9620E"/>
-                </a:solidFill>
-                <a:latin typeface="Arial"/>
-              </a:rPr>
-              <a:t>Undeclared paid search</a:t>
-            </a:r>
-          </a:p>
-        </p:txBody>
-      </p:sp>
-      <p:sp>
-        <p:nvSpPr>
-          <p:cNvPr id="19" name="Rounded Rectangle 18"/>
-          <p:cNvSpPr/>
-          <p:nvPr/>
-        </p:nvSpPr>
-        <p:spPr>
-          <a:xfrm>
-            <a:off x="4612538" y="2377440"/>
-            <a:ext cx="2966618" cy="512064"/>
-          </a:xfrm>
-          <a:prstGeom prst="roundRect">
-            <a:avLst>
-              <a:gd name="adj" fmla="val 15000"/>
-            </a:avLst>
-          </a:prstGeom>
-          <a:solidFill>
-            <a:srgbClr val="FFFFFF"/>
-          </a:solidFill>
-          <a:ln w="9525">
-            <a:solidFill>
-              <a:srgbClr val="E3E8EE"/>
-            </a:solidFill>
-          </a:ln>
-        </p:spPr>
-        <p:txBody>
-          <a:bodyPr rtlCol="0" anchor="ctr" wrap="square" lIns="109728" rIns="109728" tIns="18288" bIns="18288">
-            <a:noAutofit/>
-          </a:bodyPr>
-          <a:lstStyle/>
-          <a:p>
-            <a:pPr algn="ctr">
+                  <a:srgbClr val="647282"/>
+                </a:solidFill>
+                <a:latin typeface="Arial"/>
+              </a:rPr>
+              <a:t>Commission on clicks fired at the cart</a:t>
+            </a:r>
+          </a:p>
+        </p:txBody>
+      </p:sp>
+      <p:sp>
+        <p:nvSpPr>
+          <p:cNvPr id="33" name="TextBox 32"/>
+          <p:cNvSpPr txBox="1"/>
+          <p:nvPr/>
+        </p:nvSpPr>
+        <p:spPr>
+          <a:xfrm>
+            <a:off x="7726680" y="4343400"/>
+            <a:ext cx="3642055" cy="640080"/>
+          </a:xfrm>
+          <a:prstGeom prst="rect">
+            <a:avLst/>
+          </a:prstGeom>
+          <a:noFill/>
+        </p:spPr>
+        <p:txBody>
+          <a:bodyPr wrap="square" lIns="0" rIns="0" tIns="0" bIns="0" anchor="t">
+            <a:noAutofit/>
+          </a:bodyPr>
+          <a:lstStyle/>
+          <a:p>
+            <a:pPr algn="l">
               <a:lnSpc>
                 <a:spcPct val="110000"/>
               </a:lnSpc>
@@ -7229,173 +8355,69 @@
               </a:spcAft>
             </a:pPr>
             <a:r>
-              <a:rPr sz="1300" i="0" b="0">
+              <a:rPr sz="3600" i="0" b="1">
+                <a:solidFill>
+                  <a:srgbClr val="0B2A4A"/>
+                </a:solidFill>
+                <a:latin typeface="Arial"/>
+              </a:rPr>
+              <a:t>$22–111M</a:t>
+            </a:r>
+          </a:p>
+        </p:txBody>
+      </p:sp>
+      <p:sp>
+        <p:nvSpPr>
+          <p:cNvPr id="34" name="TextBox 33"/>
+          <p:cNvSpPr txBox="1"/>
+          <p:nvPr/>
+        </p:nvSpPr>
+        <p:spPr>
+          <a:xfrm>
+            <a:off x="7726680" y="4983480"/>
+            <a:ext cx="3642055" cy="274320"/>
+          </a:xfrm>
+          <a:prstGeom prst="rect">
+            <a:avLst/>
+          </a:prstGeom>
+          <a:noFill/>
+        </p:spPr>
+        <p:txBody>
+          <a:bodyPr wrap="square" lIns="0" rIns="0" tIns="0" bIns="0" anchor="t">
+            <a:noAutofit/>
+          </a:bodyPr>
+          <a:lstStyle/>
+          <a:p>
+            <a:pPr algn="l">
+              <a:lnSpc>
+                <a:spcPct val="110000"/>
+              </a:lnSpc>
+              <a:spcAft>
+                <a:spcPts val="0"/>
+              </a:spcAft>
+            </a:pPr>
+            <a:r>
+              <a:rPr sz="1400" i="0" b="1">
                 <a:solidFill>
                   <a:srgbClr val="1E2833"/>
                 </a:solidFill>
                 <a:latin typeface="Arial"/>
               </a:rPr>
-              <a:t>Google ad (gad_source=1)</a:t>
-            </a:r>
-          </a:p>
-        </p:txBody>
-      </p:sp>
-      <p:cxnSp>
-        <p:nvCxnSpPr>
-          <p:cNvPr id="20" name="Connector 19"/>
-          <p:cNvCxnSpPr/>
-          <p:nvPr/>
-        </p:nvCxnSpPr>
-        <p:spPr>
-          <a:xfrm>
-            <a:off x="6095847" y="2926080"/>
-            <a:ext cx="0" cy="201168"/>
-          </a:xfrm>
-          <a:prstGeom prst="line">
-            <a:avLst/>
-          </a:prstGeom>
-          <a:ln w="15875">
-            <a:solidFill>
-              <a:srgbClr val="647282"/>
-            </a:solidFill>
-            <a:tailEnd type="triangle" w="med" len="med"/>
-          </a:ln>
-        </p:spPr>
-      </p:cxnSp>
-      <p:sp>
-        <p:nvSpPr>
-          <p:cNvPr id="21" name="Rounded Rectangle 20"/>
-          <p:cNvSpPr/>
-          <p:nvPr/>
-        </p:nvSpPr>
-        <p:spPr>
-          <a:xfrm>
-            <a:off x="4612538" y="3163824"/>
-            <a:ext cx="2966618" cy="512064"/>
-          </a:xfrm>
-          <a:prstGeom prst="roundRect">
-            <a:avLst>
-              <a:gd name="adj" fmla="val 15000"/>
-            </a:avLst>
-          </a:prstGeom>
-          <a:solidFill>
-            <a:srgbClr val="FFFFFF"/>
-          </a:solidFill>
-          <a:ln w="9525">
-            <a:solidFill>
-              <a:srgbClr val="E3E8EE"/>
-            </a:solidFill>
-          </a:ln>
-        </p:spPr>
-        <p:txBody>
-          <a:bodyPr rtlCol="0" anchor="ctr" wrap="square" lIns="109728" rIns="109728" tIns="18288" bIns="18288">
-            <a:noAutofit/>
-          </a:bodyPr>
-          <a:lstStyle/>
-          <a:p>
-            <a:pPr algn="ctr">
-              <a:lnSpc>
-                <a:spcPct val="110000"/>
-              </a:lnSpc>
-              <a:spcAft>
-                <a:spcPts val="0"/>
-              </a:spcAft>
-            </a:pPr>
-            <a:r>
-              <a:rPr sz="1300" i="0" b="0">
-                <a:solidFill>
-                  <a:srgbClr val="1E2833"/>
-                </a:solidFill>
-                <a:latin typeface="Arial"/>
-              </a:rPr>
-              <a:t>brandxemail, listed as "email"</a:t>
-            </a:r>
-          </a:p>
-        </p:txBody>
-      </p:sp>
-      <p:cxnSp>
-        <p:nvCxnSpPr>
-          <p:cNvPr id="22" name="Connector 21"/>
-          <p:cNvCxnSpPr/>
-          <p:nvPr/>
-        </p:nvCxnSpPr>
-        <p:spPr>
-          <a:xfrm>
-            <a:off x="6095847" y="3712463"/>
-            <a:ext cx="0" cy="201169"/>
-          </a:xfrm>
-          <a:prstGeom prst="line">
-            <a:avLst/>
-          </a:prstGeom>
-          <a:ln w="15875">
-            <a:solidFill>
-              <a:srgbClr val="647282"/>
-            </a:solidFill>
-            <a:tailEnd type="triangle" w="med" len="med"/>
-          </a:ln>
-        </p:spPr>
-      </p:cxnSp>
-      <p:sp>
-        <p:nvSpPr>
-          <p:cNvPr id="23" name="Rounded Rectangle 22"/>
-          <p:cNvSpPr/>
-          <p:nvPr/>
-        </p:nvSpPr>
-        <p:spPr>
-          <a:xfrm>
-            <a:off x="4612538" y="3950208"/>
-            <a:ext cx="2966618" cy="512064"/>
-          </a:xfrm>
-          <a:prstGeom prst="roundRect">
-            <a:avLst>
-              <a:gd name="adj" fmla="val 15000"/>
-            </a:avLst>
-          </a:prstGeom>
-          <a:solidFill>
-            <a:srgbClr val="FFFFFF"/>
-          </a:solidFill>
-          <a:ln w="9525">
-            <a:solidFill>
-              <a:srgbClr val="E3E8EE"/>
-            </a:solidFill>
-          </a:ln>
-        </p:spPr>
-        <p:txBody>
-          <a:bodyPr rtlCol="0" anchor="ctr" wrap="square" lIns="109728" rIns="109728" tIns="18288" bIns="18288">
-            <a:noAutofit/>
-          </a:bodyPr>
-          <a:lstStyle/>
-          <a:p>
-            <a:pPr algn="ctr">
-              <a:lnSpc>
-                <a:spcPct val="110000"/>
-              </a:lnSpc>
-              <a:spcAft>
-                <a:spcPts val="0"/>
-              </a:spcAft>
-            </a:pPr>
-            <a:r>
-              <a:rPr sz="1300" i="0" b="1">
-                <a:solidFill>
-                  <a:srgbClr val="1E2833"/>
-                </a:solidFill>
-                <a:latin typeface="Arial"/>
-              </a:rPr>
-              <a:t>saatva.com/sale + auto-coupon</a:t>
-            </a:r>
-          </a:p>
-        </p:txBody>
-      </p:sp>
-      <p:sp>
-        <p:nvSpPr>
-          <p:cNvPr id="24" name="TextBox 23"/>
-          <p:cNvSpPr txBox="1"/>
-          <p:nvPr/>
-        </p:nvSpPr>
-        <p:spPr>
-          <a:xfrm>
-            <a:off x="4612538" y="4892040"/>
-            <a:ext cx="2966618" cy="566928"/>
+              <a:t>a year at Walmart (half its affiliate orders)</a:t>
+            </a:r>
+          </a:p>
+        </p:txBody>
+      </p:sp>
+      <p:sp>
+        <p:nvSpPr>
+          <p:cNvPr id="35" name="TextBox 34"/>
+          <p:cNvSpPr txBox="1"/>
+          <p:nvPr/>
+        </p:nvSpPr>
+        <p:spPr>
+          <a:xfrm>
+            <a:off x="7726680" y="5349240"/>
+            <a:ext cx="3642055" cy="731520"/>
           </a:xfrm>
           <a:prstGeom prst="rect">
             <a:avLst/>
@@ -7417,414 +8439,13 @@
               </a:spcAft>
             </a:pPr>
             <a:r>
-              <a:rPr sz="1500" i="0" b="1">
-                <a:solidFill>
-                  <a:srgbClr val="0B2A4A"/>
-                </a:solidFill>
-                <a:latin typeface="Arial"/>
-              </a:rPr>
-              <a:t>Paid search under an email listing</a:t>
-            </a:r>
-          </a:p>
-        </p:txBody>
-      </p:sp>
-      <p:sp>
-        <p:nvSpPr>
-          <p:cNvPr id="25" name="TextBox 24"/>
-          <p:cNvSpPr txBox="1"/>
-          <p:nvPr/>
-        </p:nvSpPr>
-        <p:spPr>
-          <a:xfrm>
-            <a:off x="4612538" y="5532120"/>
-            <a:ext cx="2966618" cy="457200"/>
-          </a:xfrm>
-          <a:prstGeom prst="rect">
-            <a:avLst/>
-          </a:prstGeom>
-          <a:noFill/>
-        </p:spPr>
-        <p:txBody>
-          <a:bodyPr wrap="square" lIns="0" rIns="0" tIns="0" bIns="0" anchor="t">
-            <a:noAutofit/>
-          </a:bodyPr>
-          <a:lstStyle/>
-          <a:p>
-            <a:pPr algn="l">
-              <a:lnSpc>
-                <a:spcPct val="110000"/>
-              </a:lnSpc>
-              <a:spcAft>
-                <a:spcPts val="0"/>
-              </a:spcAft>
-            </a:pPr>
-            <a:r>
-              <a:rPr sz="1300" i="0" b="0">
-                <a:solidFill>
-                  <a:srgbClr val="1E2833"/>
-                </a:solidFill>
-                <a:latin typeface="Arial"/>
-              </a:rPr>
-              <a:t>→  Check it against the PPC terms</a:t>
-            </a:r>
-          </a:p>
-        </p:txBody>
-      </p:sp>
-      <p:sp>
-        <p:nvSpPr>
-          <p:cNvPr id="26" name="Rectangle 25"/>
-          <p:cNvSpPr/>
-          <p:nvPr/>
-        </p:nvSpPr>
-        <p:spPr>
-          <a:xfrm>
-            <a:off x="8127796" y="1508760"/>
-            <a:ext cx="3515258" cy="4663440"/>
-          </a:xfrm>
-          <a:prstGeom prst="rect">
-            <a:avLst/>
-          </a:prstGeom>
-          <a:solidFill>
-            <a:srgbClr val="F3F6F9"/>
-          </a:solidFill>
-          <a:ln>
-            <a:noFill/>
-          </a:ln>
-        </p:spPr>
-        <p:txBody>
-          <a:bodyPr rtlCol="0" anchor="ctr"/>
-          <a:lstStyle/>
-          <a:p>
-            <a:pPr algn="ctr"/>
-          </a:p>
-        </p:txBody>
-      </p:sp>
-      <p:sp>
-        <p:nvSpPr>
-          <p:cNvPr id="27" name="Rounded Rectangle 26"/>
-          <p:cNvSpPr/>
-          <p:nvPr/>
-        </p:nvSpPr>
-        <p:spPr>
-          <a:xfrm>
-            <a:off x="8402116" y="1755648"/>
-            <a:ext cx="2148840" cy="310896"/>
-          </a:xfrm>
-          <a:prstGeom prst="roundRect">
-            <a:avLst>
-              <a:gd name="adj" fmla="val 50000"/>
-            </a:avLst>
-          </a:prstGeom>
-          <a:solidFill>
-            <a:srgbClr val="EAF2FE"/>
-          </a:solidFill>
-          <a:ln>
-            <a:noFill/>
-          </a:ln>
-        </p:spPr>
-        <p:txBody>
-          <a:bodyPr rtlCol="0" anchor="ctr" wrap="square" lIns="73152" rIns="73152" tIns="18288" bIns="18288">
-            <a:noAutofit/>
-          </a:bodyPr>
-          <a:lstStyle/>
-          <a:p>
-            <a:pPr algn="ctr">
-              <a:lnSpc>
-                <a:spcPct val="110000"/>
-              </a:lnSpc>
-              <a:spcAft>
-                <a:spcPts val="0"/>
-              </a:spcAft>
-            </a:pPr>
-            <a:r>
-              <a:rPr sz="1200" i="0" b="1">
-                <a:solidFill>
-                  <a:srgbClr val="006BA1"/>
-                </a:solidFill>
-                <a:latin typeface="Arial"/>
-              </a:rPr>
-              <a:t>Review before acting</a:t>
-            </a:r>
-          </a:p>
-        </p:txBody>
-      </p:sp>
-      <p:sp>
-        <p:nvSpPr>
-          <p:cNvPr id="28" name="Rounded Rectangle 27"/>
-          <p:cNvSpPr/>
-          <p:nvPr/>
-        </p:nvSpPr>
-        <p:spPr>
-          <a:xfrm>
-            <a:off x="8402116" y="2377440"/>
-            <a:ext cx="2966618" cy="512064"/>
-          </a:xfrm>
-          <a:prstGeom prst="roundRect">
-            <a:avLst>
-              <a:gd name="adj" fmla="val 15000"/>
-            </a:avLst>
-          </a:prstGeom>
-          <a:solidFill>
-            <a:srgbClr val="FFFFFF"/>
-          </a:solidFill>
-          <a:ln w="9525">
-            <a:solidFill>
-              <a:srgbClr val="E3E8EE"/>
-            </a:solidFill>
-          </a:ln>
-        </p:spPr>
-        <p:txBody>
-          <a:bodyPr rtlCol="0" anchor="ctr" wrap="square" lIns="109728" rIns="109728" tIns="18288" bIns="18288">
-            <a:noAutofit/>
-          </a:bodyPr>
-          <a:lstStyle/>
-          <a:p>
-            <a:pPr algn="ctr">
-              <a:lnSpc>
-                <a:spcPct val="110000"/>
-              </a:lnSpc>
-              <a:spcAft>
-                <a:spcPts val="0"/>
-              </a:spcAft>
-            </a:pPr>
-            <a:r>
-              <a:rPr sz="1300" i="0" b="0">
-                <a:solidFill>
-                  <a:srgbClr val="1E2833"/>
-                </a:solidFill>
-                <a:latin typeface="Arial"/>
-              </a:rPr>
-              <a:t>Search ad → TrafficPoint listicle</a:t>
-            </a:r>
-          </a:p>
-        </p:txBody>
-      </p:sp>
-      <p:cxnSp>
-        <p:nvCxnSpPr>
-          <p:cNvPr id="29" name="Connector 28"/>
-          <p:cNvCxnSpPr/>
-          <p:nvPr/>
-        </p:nvCxnSpPr>
-        <p:spPr>
-          <a:xfrm>
-            <a:off x="9885426" y="2926080"/>
-            <a:ext cx="0" cy="201168"/>
-          </a:xfrm>
-          <a:prstGeom prst="line">
-            <a:avLst/>
-          </a:prstGeom>
-          <a:ln w="15875">
-            <a:solidFill>
-              <a:srgbClr val="647282"/>
-            </a:solidFill>
-            <a:tailEnd type="triangle" w="med" len="med"/>
-          </a:ln>
-        </p:spPr>
-      </p:cxnSp>
-      <p:sp>
-        <p:nvSpPr>
-          <p:cNvPr id="30" name="Rounded Rectangle 29"/>
-          <p:cNvSpPr/>
-          <p:nvPr/>
-        </p:nvSpPr>
-        <p:spPr>
-          <a:xfrm>
-            <a:off x="8402116" y="3163824"/>
-            <a:ext cx="2966618" cy="512064"/>
-          </a:xfrm>
-          <a:prstGeom prst="roundRect">
-            <a:avLst>
-              <a:gd name="adj" fmla="val 15000"/>
-            </a:avLst>
-          </a:prstGeom>
-          <a:solidFill>
-            <a:srgbClr val="FFFFFF"/>
-          </a:solidFill>
-          <a:ln w="9525">
-            <a:solidFill>
-              <a:srgbClr val="E3E8EE"/>
-            </a:solidFill>
-          </a:ln>
-        </p:spPr>
-        <p:txBody>
-          <a:bodyPr rtlCol="0" anchor="ctr" wrap="square" lIns="109728" rIns="109728" tIns="18288" bIns="18288">
-            <a:noAutofit/>
-          </a:bodyPr>
-          <a:lstStyle/>
-          <a:p>
-            <a:pPr algn="ctr">
-              <a:lnSpc>
-                <a:spcPct val="110000"/>
-              </a:lnSpc>
-              <a:spcAft>
-                <a:spcPts val="0"/>
-              </a:spcAft>
-            </a:pPr>
-            <a:r>
-              <a:rPr sz="1300" i="0" b="0">
-                <a:solidFill>
-                  <a:srgbClr val="1E2833"/>
-                </a:solidFill>
-                <a:latin typeface="Arial"/>
-              </a:rPr>
-              <a:t>6 brands opened in ~1 minute</a:t>
-            </a:r>
-          </a:p>
-        </p:txBody>
-      </p:sp>
-      <p:cxnSp>
-        <p:nvCxnSpPr>
-          <p:cNvPr id="31" name="Connector 30"/>
-          <p:cNvCxnSpPr/>
-          <p:nvPr/>
-        </p:nvCxnSpPr>
-        <p:spPr>
-          <a:xfrm>
-            <a:off x="9885426" y="3712463"/>
-            <a:ext cx="0" cy="201169"/>
-          </a:xfrm>
-          <a:prstGeom prst="line">
-            <a:avLst/>
-          </a:prstGeom>
-          <a:ln w="15875">
-            <a:solidFill>
-              <a:srgbClr val="647282"/>
-            </a:solidFill>
-            <a:tailEnd type="triangle" w="med" len="med"/>
-          </a:ln>
-        </p:spPr>
-      </p:cxnSp>
-      <p:sp>
-        <p:nvSpPr>
-          <p:cNvPr id="32" name="Rounded Rectangle 31"/>
-          <p:cNvSpPr/>
-          <p:nvPr/>
-        </p:nvSpPr>
-        <p:spPr>
-          <a:xfrm>
-            <a:off x="8402116" y="3950208"/>
-            <a:ext cx="2966618" cy="512064"/>
-          </a:xfrm>
-          <a:prstGeom prst="roundRect">
-            <a:avLst>
-              <a:gd name="adj" fmla="val 15000"/>
-            </a:avLst>
-          </a:prstGeom>
-          <a:solidFill>
-            <a:srgbClr val="FFFFFF"/>
-          </a:solidFill>
-          <a:ln w="9525">
-            <a:solidFill>
-              <a:srgbClr val="E3E8EE"/>
-            </a:solidFill>
-          </a:ln>
-        </p:spPr>
-        <p:txBody>
-          <a:bodyPr rtlCol="0" anchor="ctr" wrap="square" lIns="109728" rIns="109728" tIns="18288" bIns="18288">
-            <a:noAutofit/>
-          </a:bodyPr>
-          <a:lstStyle/>
-          <a:p>
-            <a:pPr algn="ctr">
-              <a:lnSpc>
-                <a:spcPct val="110000"/>
-              </a:lnSpc>
-              <a:spcAft>
-                <a:spcPts val="0"/>
-              </a:spcAft>
-            </a:pPr>
-            <a:r>
-              <a:rPr sz="1300" i="0" b="1">
-                <a:solidFill>
-                  <a:srgbClr val="1E2833"/>
-                </a:solidFill>
-                <a:latin typeface="Arial"/>
-              </a:rPr>
-              <a:t>Back 9 min later via a Shopping ad</a:t>
-            </a:r>
-          </a:p>
-        </p:txBody>
-      </p:sp>
-      <p:sp>
-        <p:nvSpPr>
-          <p:cNvPr id="33" name="TextBox 32"/>
-          <p:cNvSpPr txBox="1"/>
-          <p:nvPr/>
-        </p:nvSpPr>
-        <p:spPr>
-          <a:xfrm>
-            <a:off x="8402116" y="4892040"/>
-            <a:ext cx="2966618" cy="566928"/>
-          </a:xfrm>
-          <a:prstGeom prst="rect">
-            <a:avLst/>
-          </a:prstGeom>
-          <a:noFill/>
-        </p:spPr>
-        <p:txBody>
-          <a:bodyPr wrap="square" lIns="0" rIns="0" tIns="0" bIns="0" anchor="t">
-            <a:noAutofit/>
-          </a:bodyPr>
-          <a:lstStyle/>
-          <a:p>
-            <a:pPr algn="l">
-              <a:lnSpc>
-                <a:spcPct val="105000"/>
-              </a:lnSpc>
-              <a:spcAft>
-                <a:spcPts val="0"/>
-              </a:spcAft>
-            </a:pPr>
-            <a:r>
-              <a:rPr sz="1500" i="0" b="1">
-                <a:solidFill>
-                  <a:srgbClr val="0B2A4A"/>
-                </a:solidFill>
-                <a:latin typeface="Arial"/>
-              </a:rPr>
-              <a:t>Real browsing, but Saatva may pay twice</a:t>
-            </a:r>
-          </a:p>
-        </p:txBody>
-      </p:sp>
-      <p:sp>
-        <p:nvSpPr>
-          <p:cNvPr id="34" name="TextBox 33"/>
-          <p:cNvSpPr txBox="1"/>
-          <p:nvPr/>
-        </p:nvSpPr>
-        <p:spPr>
-          <a:xfrm>
-            <a:off x="8402116" y="5532120"/>
-            <a:ext cx="2966618" cy="457200"/>
-          </a:xfrm>
-          <a:prstGeom prst="rect">
-            <a:avLst/>
-          </a:prstGeom>
-          <a:noFill/>
-        </p:spPr>
-        <p:txBody>
-          <a:bodyPr wrap="square" lIns="0" rIns="0" tIns="0" bIns="0" anchor="t">
-            <a:noAutofit/>
-          </a:bodyPr>
-          <a:lstStyle/>
-          <a:p>
-            <a:pPr algn="l">
-              <a:lnSpc>
-                <a:spcPct val="110000"/>
-              </a:lnSpc>
-              <a:spcAft>
-                <a:spcPts val="0"/>
-              </a:spcAft>
-            </a:pPr>
-            <a:r>
-              <a:rPr sz="1300" i="0" b="0">
-                <a:solidFill>
-                  <a:srgbClr val="1E2833"/>
-                </a:solidFill>
-                <a:latin typeface="Arial"/>
-              </a:rPr>
-              <a:t>→  De-duplicate with paid search</a:t>
+              <a:rPr sz="1250" i="0" b="0">
+                <a:solidFill>
+                  <a:srgbClr val="647282"/>
+                </a:solidFill>
+                <a:latin typeface="Arial"/>
+              </a:rPr>
+              <a:t>Saatva: $80K–1.05M a year for every 10% of affiliate orders hijacked</a:t>
             </a:r>
           </a:p>
         </p:txBody>
@@ -7884,7 +8505,7 @@
                 </a:solidFill>
                 <a:latin typeface="Arial"/>
               </a:rPr>
-              <a:t>RECOMMENDATIONS</a:t>
+              <a:t>ATTRIBUTION HIJACKING · SAATVA</a:t>
             </a:r>
           </a:p>
         </p:txBody>
@@ -7926,7 +8547,7 @@
                 </a:solidFill>
                 <a:latin typeface="Georgia"/>
               </a:rPr>
-              <a:t>Pay for the assist, not the last touch</a:t>
+              <a:t>The same patterns already appear at Saatva</a:t>
             </a:r>
           </a:p>
         </p:txBody>
@@ -8075,20 +8696,20 @@
       </p:sp>
       <p:sp>
         <p:nvSpPr>
-          <p:cNvPr id="8" name="Oval 7"/>
+          <p:cNvPr id="8" name="Rectangle 7"/>
           <p:cNvSpPr/>
           <p:nvPr/>
         </p:nvSpPr>
         <p:spPr>
           <a:xfrm>
-            <a:off x="548640" y="1645920"/>
-            <a:ext cx="182880" cy="182880"/>
-          </a:xfrm>
-          <a:prstGeom prst="ellipse">
+            <a:off x="548640" y="1508760"/>
+            <a:ext cx="3515258" cy="4663440"/>
+          </a:xfrm>
+          <a:prstGeom prst="rect">
             <a:avLst/>
           </a:prstGeom>
           <a:solidFill>
-            <a:srgbClr val="B5793F"/>
+            <a:srgbClr val="F3F6F9"/>
           </a:solidFill>
           <a:ln>
             <a:noFill/>
@@ -8104,452 +8725,19 @@
       </p:sp>
       <p:sp>
         <p:nvSpPr>
-          <p:cNvPr id="9" name="TextBox 8"/>
-          <p:cNvSpPr txBox="1"/>
-          <p:nvPr/>
-        </p:nvSpPr>
-        <p:spPr>
-          <a:xfrm>
-            <a:off x="868680" y="1554480"/>
-            <a:ext cx="4952847" cy="347472"/>
-          </a:xfrm>
-          <a:prstGeom prst="rect">
-            <a:avLst/>
-          </a:prstGeom>
-          <a:noFill/>
-        </p:spPr>
-        <p:txBody>
-          <a:bodyPr wrap="square" lIns="0" rIns="0" tIns="0" bIns="0" anchor="t">
-            <a:noAutofit/>
-          </a:bodyPr>
-          <a:lstStyle/>
-          <a:p>
-            <a:pPr algn="l">
-              <a:lnSpc>
-                <a:spcPct val="110000"/>
-              </a:lnSpc>
-              <a:spcAft>
-                <a:spcPts val="0"/>
-              </a:spcAft>
-            </a:pPr>
-            <a:r>
-              <a:rPr sz="1900" i="0" b="1">
-                <a:solidFill>
-                  <a:srgbClr val="0B2A4A"/>
-                </a:solidFill>
-                <a:latin typeface="Arial"/>
-              </a:rPr>
-              <a:t>Grow the program</a:t>
-            </a:r>
-          </a:p>
-        </p:txBody>
-      </p:sp>
-      <p:sp>
-        <p:nvSpPr>
-          <p:cNvPr id="10" name="Oval 9"/>
+          <p:cNvPr id="9" name="Rounded Rectangle 8"/>
           <p:cNvSpPr/>
           <p:nvPr/>
         </p:nvSpPr>
         <p:spPr>
           <a:xfrm>
-            <a:off x="548640" y="2240280"/>
-            <a:ext cx="384048" cy="384048"/>
-          </a:xfrm>
-          <a:prstGeom prst="ellipse">
-            <a:avLst/>
-          </a:prstGeom>
-          <a:solidFill>
-            <a:srgbClr val="B5793F"/>
-          </a:solidFill>
-          <a:ln>
-            <a:noFill/>
-          </a:ln>
-        </p:spPr>
-        <p:txBody>
-          <a:bodyPr rtlCol="0" anchor="ctr" wrap="square" lIns="0" rIns="0" tIns="18288" bIns="18288">
-            <a:noAutofit/>
-          </a:bodyPr>
-          <a:lstStyle/>
-          <a:p>
-            <a:pPr algn="ctr">
-              <a:lnSpc>
-                <a:spcPct val="110000"/>
-              </a:lnSpc>
-              <a:spcAft>
-                <a:spcPts val="0"/>
-              </a:spcAft>
-            </a:pPr>
-            <a:r>
-              <a:rPr sz="1400" i="0" b="1">
-                <a:solidFill>
-                  <a:srgbClr val="FFFFFF"/>
-                </a:solidFill>
-                <a:latin typeface="Arial"/>
-              </a:rPr>
-              <a:t>1</a:t>
-            </a:r>
-          </a:p>
-        </p:txBody>
-      </p:sp>
-      <p:sp>
-        <p:nvSpPr>
-          <p:cNvPr id="11" name="TextBox 10"/>
-          <p:cNvSpPr txBox="1"/>
-          <p:nvPr/>
-        </p:nvSpPr>
-        <p:spPr>
-          <a:xfrm>
-            <a:off x="1143000" y="2231136"/>
-            <a:ext cx="4678527" cy="292608"/>
-          </a:xfrm>
-          <a:prstGeom prst="rect">
-            <a:avLst/>
-          </a:prstGeom>
-          <a:noFill/>
-        </p:spPr>
-        <p:txBody>
-          <a:bodyPr wrap="square" lIns="0" rIns="0" tIns="0" bIns="0" anchor="t">
-            <a:noAutofit/>
-          </a:bodyPr>
-          <a:lstStyle/>
-          <a:p>
-            <a:pPr algn="l">
-              <a:lnSpc>
-                <a:spcPct val="110000"/>
-              </a:lnSpc>
-              <a:spcAft>
-                <a:spcPts val="0"/>
-              </a:spcAft>
-            </a:pPr>
-            <a:r>
-              <a:rPr sz="1600" i="0" b="1">
-                <a:solidFill>
-                  <a:srgbClr val="1E2833"/>
-                </a:solidFill>
-                <a:latin typeface="Arial"/>
-              </a:rPr>
-              <a:t>Recruit review and HSA/FSA partners</a:t>
-            </a:r>
-          </a:p>
-        </p:txBody>
-      </p:sp>
-      <p:sp>
-        <p:nvSpPr>
-          <p:cNvPr id="12" name="TextBox 11"/>
-          <p:cNvSpPr txBox="1"/>
-          <p:nvPr/>
-        </p:nvSpPr>
-        <p:spPr>
-          <a:xfrm>
-            <a:off x="1143000" y="2578608"/>
-            <a:ext cx="4678527" cy="502920"/>
-          </a:xfrm>
-          <a:prstGeom prst="rect">
-            <a:avLst/>
-          </a:prstGeom>
-          <a:noFill/>
-        </p:spPr>
-        <p:txBody>
-          <a:bodyPr wrap="square" lIns="0" rIns="0" tIns="0" bIns="0" anchor="t">
-            <a:noAutofit/>
-          </a:bodyPr>
-          <a:lstStyle/>
-          <a:p>
-            <a:pPr algn="l">
-              <a:lnSpc>
-                <a:spcPct val="105000"/>
-              </a:lnSpc>
-              <a:spcAft>
-                <a:spcPts val="0"/>
-              </a:spcAft>
-            </a:pPr>
-            <a:r>
-              <a:rPr sz="1300" i="0" b="0">
-                <a:solidFill>
-                  <a:srgbClr val="647282"/>
-                </a:solidFill>
-                <a:latin typeface="Arial"/>
-              </a:rPr>
-              <a:t>Shoppers compare ~2 brands (slide 5); rivals get Mattress Clarity, buyersguide.org, Truemed</a:t>
-            </a:r>
-          </a:p>
-        </p:txBody>
-      </p:sp>
-      <p:sp>
-        <p:nvSpPr>
-          <p:cNvPr id="13" name="Oval 12"/>
-          <p:cNvSpPr/>
-          <p:nvPr/>
-        </p:nvSpPr>
-        <p:spPr>
-          <a:xfrm>
-            <a:off x="548640" y="3273552"/>
-            <a:ext cx="384048" cy="384048"/>
-          </a:xfrm>
-          <a:prstGeom prst="ellipse">
-            <a:avLst/>
-          </a:prstGeom>
-          <a:solidFill>
-            <a:srgbClr val="B5793F"/>
-          </a:solidFill>
-          <a:ln>
-            <a:noFill/>
-          </a:ln>
-        </p:spPr>
-        <p:txBody>
-          <a:bodyPr rtlCol="0" anchor="ctr" wrap="square" lIns="0" rIns="0" tIns="18288" bIns="18288">
-            <a:noAutofit/>
-          </a:bodyPr>
-          <a:lstStyle/>
-          <a:p>
-            <a:pPr algn="ctr">
-              <a:lnSpc>
-                <a:spcPct val="110000"/>
-              </a:lnSpc>
-              <a:spcAft>
-                <a:spcPts val="0"/>
-              </a:spcAft>
-            </a:pPr>
-            <a:r>
-              <a:rPr sz="1400" i="0" b="1">
-                <a:solidFill>
-                  <a:srgbClr val="FFFFFF"/>
-                </a:solidFill>
-                <a:latin typeface="Arial"/>
-              </a:rPr>
-              <a:t>2</a:t>
-            </a:r>
-          </a:p>
-        </p:txBody>
-      </p:sp>
-      <p:sp>
-        <p:nvSpPr>
-          <p:cNvPr id="14" name="TextBox 13"/>
-          <p:cNvSpPr txBox="1"/>
-          <p:nvPr/>
-        </p:nvSpPr>
-        <p:spPr>
-          <a:xfrm>
-            <a:off x="1143000" y="3264408"/>
-            <a:ext cx="4678527" cy="292608"/>
-          </a:xfrm>
-          <a:prstGeom prst="rect">
-            <a:avLst/>
-          </a:prstGeom>
-          <a:noFill/>
-        </p:spPr>
-        <p:txBody>
-          <a:bodyPr wrap="square" lIns="0" rIns="0" tIns="0" bIns="0" anchor="t">
-            <a:noAutofit/>
-          </a:bodyPr>
-          <a:lstStyle/>
-          <a:p>
-            <a:pPr algn="l">
-              <a:lnSpc>
-                <a:spcPct val="110000"/>
-              </a:lnSpc>
-              <a:spcAft>
-                <a:spcPts val="0"/>
-              </a:spcAft>
-            </a:pPr>
-            <a:r>
-              <a:rPr sz="1600" i="0" b="1">
-                <a:solidFill>
-                  <a:srgbClr val="1E2833"/>
-                </a:solidFill>
-                <a:latin typeface="Arial"/>
-              </a:rPr>
-              <a:t>Give each publisher its own coupon code</a:t>
-            </a:r>
-          </a:p>
-        </p:txBody>
-      </p:sp>
-      <p:sp>
-        <p:nvSpPr>
-          <p:cNvPr id="15" name="TextBox 14"/>
-          <p:cNvSpPr txBox="1"/>
-          <p:nvPr/>
-        </p:nvSpPr>
-        <p:spPr>
-          <a:xfrm>
-            <a:off x="1143000" y="3611880"/>
-            <a:ext cx="4678527" cy="502920"/>
-          </a:xfrm>
-          <a:prstGeom prst="rect">
-            <a:avLst/>
-          </a:prstGeom>
-          <a:noFill/>
-        </p:spPr>
-        <p:txBody>
-          <a:bodyPr wrap="square" lIns="0" rIns="0" tIns="0" bIns="0" anchor="t">
-            <a:noAutofit/>
-          </a:bodyPr>
-          <a:lstStyle/>
-          <a:p>
-            <a:pPr algn="l">
-              <a:lnSpc>
-                <a:spcPct val="105000"/>
-              </a:lnSpc>
-              <a:spcAft>
-                <a:spcPts val="0"/>
-              </a:spcAft>
-            </a:pPr>
-            <a:r>
-              <a:rPr sz="1300" i="0" b="0">
-                <a:solidFill>
-                  <a:srgbClr val="647282"/>
-                </a:solidFill>
-                <a:latin typeface="Arial"/>
-              </a:rPr>
-              <a:t>One code is shared today, so a sale can't be traced to its partner</a:t>
-            </a:r>
-          </a:p>
-        </p:txBody>
-      </p:sp>
-      <p:sp>
-        <p:nvSpPr>
-          <p:cNvPr id="16" name="Oval 15"/>
-          <p:cNvSpPr/>
-          <p:nvPr/>
-        </p:nvSpPr>
-        <p:spPr>
-          <a:xfrm>
-            <a:off x="548640" y="4306824"/>
-            <a:ext cx="384048" cy="384048"/>
-          </a:xfrm>
-          <a:prstGeom prst="ellipse">
-            <a:avLst/>
-          </a:prstGeom>
-          <a:solidFill>
-            <a:srgbClr val="B5793F"/>
-          </a:solidFill>
-          <a:ln>
-            <a:noFill/>
-          </a:ln>
-        </p:spPr>
-        <p:txBody>
-          <a:bodyPr rtlCol="0" anchor="ctr" wrap="square" lIns="0" rIns="0" tIns="18288" bIns="18288">
-            <a:noAutofit/>
-          </a:bodyPr>
-          <a:lstStyle/>
-          <a:p>
-            <a:pPr algn="ctr">
-              <a:lnSpc>
-                <a:spcPct val="110000"/>
-              </a:lnSpc>
-              <a:spcAft>
-                <a:spcPts val="0"/>
-              </a:spcAft>
-            </a:pPr>
-            <a:r>
-              <a:rPr sz="1400" i="0" b="1">
-                <a:solidFill>
-                  <a:srgbClr val="FFFFFF"/>
-                </a:solidFill>
-                <a:latin typeface="Arial"/>
-              </a:rPr>
-              <a:t>3</a:t>
-            </a:r>
-          </a:p>
-        </p:txBody>
-      </p:sp>
-      <p:sp>
-        <p:nvSpPr>
-          <p:cNvPr id="17" name="TextBox 16"/>
-          <p:cNvSpPr txBox="1"/>
-          <p:nvPr/>
-        </p:nvSpPr>
-        <p:spPr>
-          <a:xfrm>
-            <a:off x="1143000" y="4297680"/>
-            <a:ext cx="4678527" cy="292608"/>
-          </a:xfrm>
-          <a:prstGeom prst="rect">
-            <a:avLst/>
-          </a:prstGeom>
-          <a:noFill/>
-        </p:spPr>
-        <p:txBody>
-          <a:bodyPr wrap="square" lIns="0" rIns="0" tIns="0" bIns="0" anchor="t">
-            <a:noAutofit/>
-          </a:bodyPr>
-          <a:lstStyle/>
-          <a:p>
-            <a:pPr algn="l">
-              <a:lnSpc>
-                <a:spcPct val="110000"/>
-              </a:lnSpc>
-              <a:spcAft>
-                <a:spcPts val="0"/>
-              </a:spcAft>
-            </a:pPr>
-            <a:r>
-              <a:rPr sz="1600" i="0" b="1">
-                <a:solidFill>
-                  <a:srgbClr val="1E2833"/>
-                </a:solidFill>
-                <a:latin typeface="Arial"/>
-              </a:rPr>
-              <a:t>Tier commissions by the value of the click</a:t>
-            </a:r>
-          </a:p>
-        </p:txBody>
-      </p:sp>
-      <p:sp>
-        <p:nvSpPr>
-          <p:cNvPr id="18" name="TextBox 17"/>
-          <p:cNvSpPr txBox="1"/>
-          <p:nvPr/>
-        </p:nvSpPr>
-        <p:spPr>
-          <a:xfrm>
-            <a:off x="1143000" y="4645152"/>
-            <a:ext cx="4678527" cy="502920"/>
-          </a:xfrm>
-          <a:prstGeom prst="rect">
-            <a:avLst/>
-          </a:prstGeom>
-          <a:noFill/>
-        </p:spPr>
-        <p:txBody>
-          <a:bodyPr wrap="square" lIns="0" rIns="0" tIns="0" bIns="0" anchor="t">
-            <a:noAutofit/>
-          </a:bodyPr>
-          <a:lstStyle/>
-          <a:p>
-            <a:pPr algn="l">
-              <a:lnSpc>
-                <a:spcPct val="105000"/>
-              </a:lnSpc>
-              <a:spcAft>
-                <a:spcPts val="0"/>
-              </a:spcAft>
-            </a:pPr>
-            <a:r>
-              <a:rPr sz="1300" i="0" b="0">
-                <a:solidFill>
-                  <a:srgbClr val="647282"/>
-                </a:solidFill>
-                <a:latin typeface="Arial"/>
-              </a:rPr>
-              <a:t>Pay less for coupon clicks and for clicks after a cart exists</a:t>
-            </a:r>
-          </a:p>
-        </p:txBody>
-      </p:sp>
-      <p:sp>
-        <p:nvSpPr>
-          <p:cNvPr id="19" name="Oval 18"/>
-          <p:cNvSpPr/>
-          <p:nvPr/>
-        </p:nvSpPr>
-        <p:spPr>
-          <a:xfrm>
-            <a:off x="6324447" y="1645920"/>
-            <a:ext cx="182880" cy="182880"/>
-          </a:xfrm>
-          <a:prstGeom prst="ellipse">
-            <a:avLst/>
+            <a:off x="822959" y="1755648"/>
+            <a:ext cx="1645919" cy="310896"/>
+          </a:xfrm>
+          <a:prstGeom prst="roundRect">
+            <a:avLst>
+              <a:gd name="adj" fmla="val 50000"/>
+            </a:avLst>
           </a:prstGeom>
           <a:solidFill>
             <a:srgbClr val="FF9438"/>
@@ -8559,23 +8747,238 @@
           </a:ln>
         </p:spPr>
         <p:txBody>
-          <a:bodyPr rtlCol="0" anchor="ctr"/>
-          <a:lstStyle/>
-          <a:p>
-            <a:pPr algn="ctr"/>
-          </a:p>
-        </p:txBody>
-      </p:sp>
-      <p:sp>
-        <p:nvSpPr>
-          <p:cNvPr id="20" name="TextBox 19"/>
-          <p:cNvSpPr txBox="1"/>
-          <p:nvPr/>
-        </p:nvSpPr>
-        <p:spPr>
-          <a:xfrm>
-            <a:off x="6644487" y="1554480"/>
-            <a:ext cx="4952847" cy="347472"/>
+          <a:bodyPr rtlCol="0" anchor="ctr" wrap="square" lIns="73152" rIns="73152" tIns="18288" bIns="18288">
+            <a:noAutofit/>
+          </a:bodyPr>
+          <a:lstStyle/>
+          <a:p>
+            <a:pPr algn="ctr">
+              <a:lnSpc>
+                <a:spcPct val="110000"/>
+              </a:lnSpc>
+              <a:spcAft>
+                <a:spcPts val="0"/>
+              </a:spcAft>
+            </a:pPr>
+            <a:r>
+              <a:rPr sz="1200" i="0" b="1">
+                <a:solidFill>
+                  <a:srgbClr val="FFFFFF"/>
+                </a:solidFill>
+                <a:latin typeface="Arial"/>
+              </a:rPr>
+              <a:t>Cookie stuffing</a:t>
+            </a:r>
+          </a:p>
+        </p:txBody>
+      </p:sp>
+      <p:sp>
+        <p:nvSpPr>
+          <p:cNvPr id="10" name="Rounded Rectangle 9"/>
+          <p:cNvSpPr/>
+          <p:nvPr/>
+        </p:nvSpPr>
+        <p:spPr>
+          <a:xfrm>
+            <a:off x="822959" y="2377440"/>
+            <a:ext cx="2966618" cy="512064"/>
+          </a:xfrm>
+          <a:prstGeom prst="roundRect">
+            <a:avLst>
+              <a:gd name="adj" fmla="val 15000"/>
+            </a:avLst>
+          </a:prstGeom>
+          <a:solidFill>
+            <a:srgbClr val="FFFFFF"/>
+          </a:solidFill>
+          <a:ln w="9525">
+            <a:solidFill>
+              <a:srgbClr val="E3E8EE"/>
+            </a:solidFill>
+          </a:ln>
+        </p:spPr>
+        <p:txBody>
+          <a:bodyPr rtlCol="0" anchor="ctr" wrap="square" lIns="109728" rIns="109728" tIns="18288" bIns="18288">
+            <a:noAutofit/>
+          </a:bodyPr>
+          <a:lstStyle/>
+          <a:p>
+            <a:pPr algn="ctr">
+              <a:lnSpc>
+                <a:spcPct val="110000"/>
+              </a:lnSpc>
+              <a:spcAft>
+                <a:spcPts val="0"/>
+              </a:spcAft>
+            </a:pPr>
+            <a:r>
+              <a:rPr sz="1300" i="0" b="0">
+                <a:solidFill>
+                  <a:srgbClr val="1E2833"/>
+                </a:solidFill>
+                <a:latin typeface="Arial"/>
+              </a:rPr>
+              <a:t>"New tab" browser extension</a:t>
+            </a:r>
+          </a:p>
+        </p:txBody>
+      </p:sp>
+      <p:cxnSp>
+        <p:nvCxnSpPr>
+          <p:cNvPr id="11" name="Connector 10"/>
+          <p:cNvCxnSpPr/>
+          <p:nvPr/>
+        </p:nvCxnSpPr>
+        <p:spPr>
+          <a:xfrm>
+            <a:off x="2306269" y="2926080"/>
+            <a:ext cx="0" cy="201168"/>
+          </a:xfrm>
+          <a:prstGeom prst="line">
+            <a:avLst/>
+          </a:prstGeom>
+          <a:ln w="15875">
+            <a:solidFill>
+              <a:srgbClr val="647282"/>
+            </a:solidFill>
+            <a:tailEnd type="triangle" w="med" len="med"/>
+          </a:ln>
+        </p:spPr>
+      </p:cxnSp>
+      <p:sp>
+        <p:nvSpPr>
+          <p:cNvPr id="12" name="Rounded Rectangle 11"/>
+          <p:cNvSpPr/>
+          <p:nvPr/>
+        </p:nvSpPr>
+        <p:spPr>
+          <a:xfrm>
+            <a:off x="822959" y="3163824"/>
+            <a:ext cx="2966618" cy="512064"/>
+          </a:xfrm>
+          <a:prstGeom prst="roundRect">
+            <a:avLst>
+              <a:gd name="adj" fmla="val 15000"/>
+            </a:avLst>
+          </a:prstGeom>
+          <a:solidFill>
+            <a:srgbClr val="FFFFFF"/>
+          </a:solidFill>
+          <a:ln w="9525">
+            <a:solidFill>
+              <a:srgbClr val="E3E8EE"/>
+            </a:solidFill>
+          </a:ln>
+        </p:spPr>
+        <p:txBody>
+          <a:bodyPr rtlCol="0" anchor="ctr" wrap="square" lIns="109728" rIns="109728" tIns="18288" bIns="18288">
+            <a:noAutofit/>
+          </a:bodyPr>
+          <a:lstStyle/>
+          <a:p>
+            <a:pPr algn="ctr">
+              <a:lnSpc>
+                <a:spcPct val="110000"/>
+              </a:lnSpc>
+              <a:spcAft>
+                <a:spcPts val="0"/>
+              </a:spcAft>
+            </a:pPr>
+            <a:r>
+              <a:rPr sz="1300" i="0" b="0">
+                <a:solidFill>
+                  <a:srgbClr val="1E2833"/>
+                </a:solidFill>
+                <a:latin typeface="Arial"/>
+              </a:rPr>
+              <a:t>Partnerize click registered</a:t>
+            </a:r>
+          </a:p>
+        </p:txBody>
+      </p:sp>
+      <p:cxnSp>
+        <p:nvCxnSpPr>
+          <p:cNvPr id="13" name="Connector 12"/>
+          <p:cNvCxnSpPr/>
+          <p:nvPr/>
+        </p:nvCxnSpPr>
+        <p:spPr>
+          <a:xfrm>
+            <a:off x="2306269" y="3712463"/>
+            <a:ext cx="0" cy="201169"/>
+          </a:xfrm>
+          <a:prstGeom prst="line">
+            <a:avLst/>
+          </a:prstGeom>
+          <a:ln w="15875">
+            <a:solidFill>
+              <a:srgbClr val="647282"/>
+            </a:solidFill>
+            <a:tailEnd type="triangle" w="med" len="med"/>
+          </a:ln>
+        </p:spPr>
+      </p:cxnSp>
+      <p:sp>
+        <p:nvSpPr>
+          <p:cNvPr id="14" name="Rounded Rectangle 13"/>
+          <p:cNvSpPr/>
+          <p:nvPr/>
+        </p:nvSpPr>
+        <p:spPr>
+          <a:xfrm>
+            <a:off x="822959" y="3950208"/>
+            <a:ext cx="2966618" cy="512064"/>
+          </a:xfrm>
+          <a:prstGeom prst="roundRect">
+            <a:avLst>
+              <a:gd name="adj" fmla="val 15000"/>
+            </a:avLst>
+          </a:prstGeom>
+          <a:solidFill>
+            <a:srgbClr val="FFF1E5"/>
+          </a:solidFill>
+          <a:ln w="15875">
+            <a:solidFill>
+              <a:srgbClr val="FF9438"/>
+            </a:solidFill>
+          </a:ln>
+        </p:spPr>
+        <p:txBody>
+          <a:bodyPr rtlCol="0" anchor="ctr" wrap="square" lIns="109728" rIns="109728" tIns="18288" bIns="18288">
+            <a:noAutofit/>
+          </a:bodyPr>
+          <a:lstStyle/>
+          <a:p>
+            <a:pPr algn="ctr">
+              <a:lnSpc>
+                <a:spcPct val="110000"/>
+              </a:lnSpc>
+              <a:spcAft>
+                <a:spcPts val="0"/>
+              </a:spcAft>
+            </a:pPr>
+            <a:r>
+              <a:rPr sz="1300" i="0" b="1">
+                <a:solidFill>
+                  <a:srgbClr val="C9620E"/>
+                </a:solidFill>
+                <a:latin typeface="Arial"/>
+              </a:rPr>
+              <a:t>saatva.com never loads</a:t>
+            </a:r>
+          </a:p>
+        </p:txBody>
+      </p:sp>
+      <p:sp>
+        <p:nvSpPr>
+          <p:cNvPr id="15" name="TextBox 14"/>
+          <p:cNvSpPr txBox="1"/>
+          <p:nvPr/>
+        </p:nvSpPr>
+        <p:spPr>
+          <a:xfrm>
+            <a:off x="822959" y="4892040"/>
+            <a:ext cx="2966618" cy="566928"/>
           </a:xfrm>
           <a:prstGeom prst="rect">
             <a:avLst/>
@@ -8590,6 +8993,48 @@
           <a:p>
             <a:pPr algn="l">
               <a:lnSpc>
+                <a:spcPct val="105000"/>
+              </a:lnSpc>
+              <a:spcAft>
+                <a:spcPts val="0"/>
+              </a:spcAft>
+            </a:pPr>
+            <a:r>
+              <a:rPr sz="1500" i="0" b="1">
+                <a:solidFill>
+                  <a:srgbClr val="0B2A4A"/>
+                </a:solidFill>
+                <a:latin typeface="Arial"/>
+              </a:rPr>
+              <a:t>A commission without a visit</a:t>
+            </a:r>
+          </a:p>
+        </p:txBody>
+      </p:sp>
+      <p:sp>
+        <p:nvSpPr>
+          <p:cNvPr id="16" name="TextBox 15"/>
+          <p:cNvSpPr txBox="1"/>
+          <p:nvPr/>
+        </p:nvSpPr>
+        <p:spPr>
+          <a:xfrm>
+            <a:off x="822959" y="5532120"/>
+            <a:ext cx="2966618" cy="457200"/>
+          </a:xfrm>
+          <a:prstGeom prst="rect">
+            <a:avLst/>
+          </a:prstGeom>
+          <a:noFill/>
+        </p:spPr>
+        <p:txBody>
+          <a:bodyPr wrap="square" lIns="0" rIns="0" tIns="0" bIns="0" anchor="t">
+            <a:noAutofit/>
+          </a:bodyPr>
+          <a:lstStyle/>
+          <a:p>
+            <a:pPr algn="l">
+              <a:lnSpc>
                 <a:spcPct val="110000"/>
               </a:lnSpc>
               <a:spcAft>
@@ -8597,171 +9042,71 @@
               </a:spcAft>
             </a:pPr>
             <a:r>
-              <a:rPr sz="1900" i="0" b="1">
-                <a:solidFill>
-                  <a:srgbClr val="0B2A4A"/>
-                </a:solidFill>
-                <a:latin typeface="Arial"/>
-              </a:rPr>
-              <a:t>Stop paying for taken credit</a:t>
-            </a:r>
-          </a:p>
-        </p:txBody>
-      </p:sp>
-      <p:sp>
-        <p:nvSpPr>
-          <p:cNvPr id="21" name="Oval 20"/>
+              <a:rPr sz="1300" i="0" b="0">
+                <a:solidFill>
+                  <a:srgbClr val="1E2833"/>
+                </a:solidFill>
+                <a:latin typeface="Arial"/>
+              </a:rPr>
+              <a:t>→  Reconcile clicks with landings</a:t>
+            </a:r>
+          </a:p>
+        </p:txBody>
+      </p:sp>
+      <p:sp>
+        <p:nvSpPr>
+          <p:cNvPr id="17" name="Rectangle 16"/>
           <p:cNvSpPr/>
           <p:nvPr/>
         </p:nvSpPr>
         <p:spPr>
           <a:xfrm>
-            <a:off x="6324447" y="2240280"/>
-            <a:ext cx="384048" cy="384048"/>
-          </a:xfrm>
-          <a:prstGeom prst="ellipse">
+            <a:off x="4338218" y="1508760"/>
+            <a:ext cx="3515258" cy="4663440"/>
+          </a:xfrm>
+          <a:prstGeom prst="rect">
             <a:avLst/>
           </a:prstGeom>
           <a:solidFill>
-            <a:srgbClr val="FF9438"/>
+            <a:srgbClr val="F3F6F9"/>
           </a:solidFill>
           <a:ln>
             <a:noFill/>
           </a:ln>
         </p:spPr>
         <p:txBody>
-          <a:bodyPr rtlCol="0" anchor="ctr" wrap="square" lIns="0" rIns="0" tIns="18288" bIns="18288">
-            <a:noAutofit/>
-          </a:bodyPr>
-          <a:lstStyle/>
-          <a:p>
-            <a:pPr algn="ctr">
-              <a:lnSpc>
-                <a:spcPct val="110000"/>
-              </a:lnSpc>
-              <a:spcAft>
-                <a:spcPts val="0"/>
-              </a:spcAft>
-            </a:pPr>
-            <a:r>
-              <a:rPr sz="1400" i="0" b="1">
-                <a:solidFill>
-                  <a:srgbClr val="FFFFFF"/>
-                </a:solidFill>
-                <a:latin typeface="Arial"/>
-              </a:rPr>
-              <a:t>1</a:t>
-            </a:r>
-          </a:p>
-        </p:txBody>
-      </p:sp>
-      <p:sp>
-        <p:nvSpPr>
-          <p:cNvPr id="22" name="TextBox 21"/>
-          <p:cNvSpPr txBox="1"/>
-          <p:nvPr/>
-        </p:nvSpPr>
-        <p:spPr>
-          <a:xfrm>
-            <a:off x="6918807" y="2231136"/>
-            <a:ext cx="4678527" cy="292608"/>
-          </a:xfrm>
-          <a:prstGeom prst="rect">
-            <a:avLst/>
-          </a:prstGeom>
-          <a:noFill/>
-        </p:spPr>
-        <p:txBody>
-          <a:bodyPr wrap="square" lIns="0" rIns="0" tIns="0" bIns="0" anchor="t">
-            <a:noAutofit/>
-          </a:bodyPr>
-          <a:lstStyle/>
-          <a:p>
-            <a:pPr algn="l">
-              <a:lnSpc>
-                <a:spcPct val="110000"/>
-              </a:lnSpc>
-              <a:spcAft>
-                <a:spcPts val="0"/>
-              </a:spcAft>
-            </a:pPr>
-            <a:r>
-              <a:rPr sz="1600" i="0" b="1">
-                <a:solidFill>
-                  <a:srgbClr val="1E2833"/>
-                </a:solidFill>
-                <a:latin typeface="Arial"/>
-              </a:rPr>
-              <a:t>Reconcile clicks with saatva.com landings</a:t>
-            </a:r>
-          </a:p>
-        </p:txBody>
-      </p:sp>
-      <p:sp>
-        <p:nvSpPr>
-          <p:cNvPr id="23" name="TextBox 22"/>
-          <p:cNvSpPr txBox="1"/>
-          <p:nvPr/>
-        </p:nvSpPr>
-        <p:spPr>
-          <a:xfrm>
-            <a:off x="6918807" y="2578608"/>
-            <a:ext cx="4678527" cy="502920"/>
-          </a:xfrm>
-          <a:prstGeom prst="rect">
-            <a:avLst/>
-          </a:prstGeom>
-          <a:noFill/>
-        </p:spPr>
-        <p:txBody>
-          <a:bodyPr wrap="square" lIns="0" rIns="0" tIns="0" bIns="0" anchor="t">
-            <a:noAutofit/>
-          </a:bodyPr>
-          <a:lstStyle/>
-          <a:p>
-            <a:pPr algn="l">
-              <a:lnSpc>
-                <a:spcPct val="105000"/>
-              </a:lnSpc>
-              <a:spcAft>
-                <a:spcPts val="0"/>
-              </a:spcAft>
-            </a:pPr>
-            <a:r>
-              <a:rPr sz="1300" i="0" b="0">
-                <a:solidFill>
-                  <a:srgbClr val="647282"/>
-                </a:solidFill>
-                <a:latin typeface="Arial"/>
-              </a:rPr>
-              <a:t>A click that never lands is proof, with no threshold to tune</a:t>
-            </a:r>
-          </a:p>
-        </p:txBody>
-      </p:sp>
-      <p:sp>
-        <p:nvSpPr>
-          <p:cNvPr id="24" name="Oval 23"/>
+          <a:bodyPr rtlCol="0" anchor="ctr"/>
+          <a:lstStyle/>
+          <a:p>
+            <a:pPr algn="ctr"/>
+          </a:p>
+        </p:txBody>
+      </p:sp>
+      <p:sp>
+        <p:nvSpPr>
+          <p:cNvPr id="18" name="Rounded Rectangle 17"/>
           <p:cNvSpPr/>
           <p:nvPr/>
         </p:nvSpPr>
         <p:spPr>
           <a:xfrm>
-            <a:off x="6324447" y="3273552"/>
-            <a:ext cx="384048" cy="384048"/>
-          </a:xfrm>
-          <a:prstGeom prst="ellipse">
-            <a:avLst/>
+            <a:off x="4612538" y="1755648"/>
+            <a:ext cx="2350008" cy="310896"/>
+          </a:xfrm>
+          <a:prstGeom prst="roundRect">
+            <a:avLst>
+              <a:gd name="adj" fmla="val 50000"/>
+            </a:avLst>
           </a:prstGeom>
           <a:solidFill>
-            <a:srgbClr val="FF9438"/>
+            <a:srgbClr val="FFF1E5"/>
           </a:solidFill>
           <a:ln>
             <a:noFill/>
           </a:ln>
         </p:spPr>
         <p:txBody>
-          <a:bodyPr rtlCol="0" anchor="ctr" wrap="square" lIns="0" rIns="0" tIns="18288" bIns="18288">
+          <a:bodyPr rtlCol="0" anchor="ctr" wrap="square" lIns="73152" rIns="73152" tIns="18288" bIns="18288">
             <a:noAutofit/>
           </a:bodyPr>
           <a:lstStyle/>
@@ -8775,13 +9120,252 @@
               </a:spcAft>
             </a:pPr>
             <a:r>
-              <a:rPr sz="1400" i="0" b="1">
-                <a:solidFill>
-                  <a:srgbClr val="FFFFFF"/>
-                </a:solidFill>
-                <a:latin typeface="Arial"/>
-              </a:rPr>
-              <a:t>2</a:t>
+              <a:rPr sz="1200" i="0" b="1">
+                <a:solidFill>
+                  <a:srgbClr val="C9620E"/>
+                </a:solidFill>
+                <a:latin typeface="Arial"/>
+              </a:rPr>
+              <a:t>Undeclared paid search</a:t>
+            </a:r>
+          </a:p>
+        </p:txBody>
+      </p:sp>
+      <p:sp>
+        <p:nvSpPr>
+          <p:cNvPr id="19" name="Rounded Rectangle 18"/>
+          <p:cNvSpPr/>
+          <p:nvPr/>
+        </p:nvSpPr>
+        <p:spPr>
+          <a:xfrm>
+            <a:off x="4612538" y="2377440"/>
+            <a:ext cx="2966618" cy="512064"/>
+          </a:xfrm>
+          <a:prstGeom prst="roundRect">
+            <a:avLst>
+              <a:gd name="adj" fmla="val 15000"/>
+            </a:avLst>
+          </a:prstGeom>
+          <a:solidFill>
+            <a:srgbClr val="FFFFFF"/>
+          </a:solidFill>
+          <a:ln w="9525">
+            <a:solidFill>
+              <a:srgbClr val="E3E8EE"/>
+            </a:solidFill>
+          </a:ln>
+        </p:spPr>
+        <p:txBody>
+          <a:bodyPr rtlCol="0" anchor="ctr" wrap="square" lIns="109728" rIns="109728" tIns="18288" bIns="18288">
+            <a:noAutofit/>
+          </a:bodyPr>
+          <a:lstStyle/>
+          <a:p>
+            <a:pPr algn="ctr">
+              <a:lnSpc>
+                <a:spcPct val="110000"/>
+              </a:lnSpc>
+              <a:spcAft>
+                <a:spcPts val="0"/>
+              </a:spcAft>
+            </a:pPr>
+            <a:r>
+              <a:rPr sz="1300" i="0" b="0">
+                <a:solidFill>
+                  <a:srgbClr val="1E2833"/>
+                </a:solidFill>
+                <a:latin typeface="Arial"/>
+              </a:rPr>
+              <a:t>Google ad (gad_source=1)</a:t>
+            </a:r>
+          </a:p>
+        </p:txBody>
+      </p:sp>
+      <p:cxnSp>
+        <p:nvCxnSpPr>
+          <p:cNvPr id="20" name="Connector 19"/>
+          <p:cNvCxnSpPr/>
+          <p:nvPr/>
+        </p:nvCxnSpPr>
+        <p:spPr>
+          <a:xfrm>
+            <a:off x="6095847" y="2926080"/>
+            <a:ext cx="0" cy="201168"/>
+          </a:xfrm>
+          <a:prstGeom prst="line">
+            <a:avLst/>
+          </a:prstGeom>
+          <a:ln w="15875">
+            <a:solidFill>
+              <a:srgbClr val="647282"/>
+            </a:solidFill>
+            <a:tailEnd type="triangle" w="med" len="med"/>
+          </a:ln>
+        </p:spPr>
+      </p:cxnSp>
+      <p:sp>
+        <p:nvSpPr>
+          <p:cNvPr id="21" name="Rounded Rectangle 20"/>
+          <p:cNvSpPr/>
+          <p:nvPr/>
+        </p:nvSpPr>
+        <p:spPr>
+          <a:xfrm>
+            <a:off x="4612538" y="3163824"/>
+            <a:ext cx="2966618" cy="512064"/>
+          </a:xfrm>
+          <a:prstGeom prst="roundRect">
+            <a:avLst>
+              <a:gd name="adj" fmla="val 15000"/>
+            </a:avLst>
+          </a:prstGeom>
+          <a:solidFill>
+            <a:srgbClr val="FFFFFF"/>
+          </a:solidFill>
+          <a:ln w="9525">
+            <a:solidFill>
+              <a:srgbClr val="E3E8EE"/>
+            </a:solidFill>
+          </a:ln>
+        </p:spPr>
+        <p:txBody>
+          <a:bodyPr rtlCol="0" anchor="ctr" wrap="square" lIns="109728" rIns="109728" tIns="18288" bIns="18288">
+            <a:noAutofit/>
+          </a:bodyPr>
+          <a:lstStyle/>
+          <a:p>
+            <a:pPr algn="ctr">
+              <a:lnSpc>
+                <a:spcPct val="110000"/>
+              </a:lnSpc>
+              <a:spcAft>
+                <a:spcPts val="0"/>
+              </a:spcAft>
+            </a:pPr>
+            <a:r>
+              <a:rPr sz="1300" i="0" b="0">
+                <a:solidFill>
+                  <a:srgbClr val="1E2833"/>
+                </a:solidFill>
+                <a:latin typeface="Arial"/>
+              </a:rPr>
+              <a:t>brandxemail, listed as "email"</a:t>
+            </a:r>
+          </a:p>
+        </p:txBody>
+      </p:sp>
+      <p:cxnSp>
+        <p:nvCxnSpPr>
+          <p:cNvPr id="22" name="Connector 21"/>
+          <p:cNvCxnSpPr/>
+          <p:nvPr/>
+        </p:nvCxnSpPr>
+        <p:spPr>
+          <a:xfrm>
+            <a:off x="6095847" y="3712463"/>
+            <a:ext cx="0" cy="201169"/>
+          </a:xfrm>
+          <a:prstGeom prst="line">
+            <a:avLst/>
+          </a:prstGeom>
+          <a:ln w="15875">
+            <a:solidFill>
+              <a:srgbClr val="647282"/>
+            </a:solidFill>
+            <a:tailEnd type="triangle" w="med" len="med"/>
+          </a:ln>
+        </p:spPr>
+      </p:cxnSp>
+      <p:sp>
+        <p:nvSpPr>
+          <p:cNvPr id="23" name="Rounded Rectangle 22"/>
+          <p:cNvSpPr/>
+          <p:nvPr/>
+        </p:nvSpPr>
+        <p:spPr>
+          <a:xfrm>
+            <a:off x="4612538" y="3950208"/>
+            <a:ext cx="2966618" cy="512064"/>
+          </a:xfrm>
+          <a:prstGeom prst="roundRect">
+            <a:avLst>
+              <a:gd name="adj" fmla="val 15000"/>
+            </a:avLst>
+          </a:prstGeom>
+          <a:solidFill>
+            <a:srgbClr val="FFFFFF"/>
+          </a:solidFill>
+          <a:ln w="9525">
+            <a:solidFill>
+              <a:srgbClr val="E3E8EE"/>
+            </a:solidFill>
+          </a:ln>
+        </p:spPr>
+        <p:txBody>
+          <a:bodyPr rtlCol="0" anchor="ctr" wrap="square" lIns="109728" rIns="109728" tIns="18288" bIns="18288">
+            <a:noAutofit/>
+          </a:bodyPr>
+          <a:lstStyle/>
+          <a:p>
+            <a:pPr algn="ctr">
+              <a:lnSpc>
+                <a:spcPct val="110000"/>
+              </a:lnSpc>
+              <a:spcAft>
+                <a:spcPts val="0"/>
+              </a:spcAft>
+            </a:pPr>
+            <a:r>
+              <a:rPr sz="1300" i="0" b="1">
+                <a:solidFill>
+                  <a:srgbClr val="1E2833"/>
+                </a:solidFill>
+                <a:latin typeface="Arial"/>
+              </a:rPr>
+              <a:t>saatva.com/sale + auto-coupon</a:t>
+            </a:r>
+          </a:p>
+        </p:txBody>
+      </p:sp>
+      <p:sp>
+        <p:nvSpPr>
+          <p:cNvPr id="24" name="TextBox 23"/>
+          <p:cNvSpPr txBox="1"/>
+          <p:nvPr/>
+        </p:nvSpPr>
+        <p:spPr>
+          <a:xfrm>
+            <a:off x="4612538" y="4892040"/>
+            <a:ext cx="2966618" cy="566928"/>
+          </a:xfrm>
+          <a:prstGeom prst="rect">
+            <a:avLst/>
+          </a:prstGeom>
+          <a:noFill/>
+        </p:spPr>
+        <p:txBody>
+          <a:bodyPr wrap="square" lIns="0" rIns="0" tIns="0" bIns="0" anchor="t">
+            <a:noAutofit/>
+          </a:bodyPr>
+          <a:lstStyle/>
+          <a:p>
+            <a:pPr algn="l">
+              <a:lnSpc>
+                <a:spcPct val="105000"/>
+              </a:lnSpc>
+              <a:spcAft>
+                <a:spcPts val="0"/>
+              </a:spcAft>
+            </a:pPr>
+            <a:r>
+              <a:rPr sz="1500" i="0" b="1">
+                <a:solidFill>
+                  <a:srgbClr val="0B2A4A"/>
+                </a:solidFill>
+                <a:latin typeface="Arial"/>
+              </a:rPr>
+              <a:t>Paid search under an email listing</a:t>
             </a:r>
           </a:p>
         </p:txBody>
@@ -8794,8 +9378,8 @@
         </p:nvSpPr>
         <p:spPr>
           <a:xfrm>
-            <a:off x="6918807" y="3264408"/>
-            <a:ext cx="4678527" cy="292608"/>
+            <a:off x="4612538" y="5532120"/>
+            <a:ext cx="2966618" cy="457200"/>
           </a:xfrm>
           <a:prstGeom prst="rect">
             <a:avLst/>
@@ -8817,219 +9401,358 @@
               </a:spcAft>
             </a:pPr>
             <a:r>
-              <a:rPr sz="1600" i="0" b="1">
+              <a:rPr sz="1300" i="0" b="0">
                 <a:solidFill>
                   <a:srgbClr val="1E2833"/>
                 </a:solidFill>
                 <a:latin typeface="Arial"/>
               </a:rPr>
-              <a:t>No overwrite once a cart exists</a:t>
-            </a:r>
-          </a:p>
-        </p:txBody>
-      </p:sp>
-      <p:sp>
-        <p:nvSpPr>
-          <p:cNvPr id="26" name="TextBox 25"/>
-          <p:cNvSpPr txBox="1"/>
-          <p:nvPr/>
-        </p:nvSpPr>
-        <p:spPr>
-          <a:xfrm>
-            <a:off x="6918807" y="3611880"/>
-            <a:ext cx="4678527" cy="502920"/>
-          </a:xfrm>
-          <a:prstGeom prst="rect">
-            <a:avLst/>
-          </a:prstGeom>
-          <a:noFill/>
-        </p:spPr>
-        <p:txBody>
-          <a:bodyPr wrap="square" lIns="0" rIns="0" tIns="0" bIns="0" anchor="t">
-            <a:noAutofit/>
-          </a:bodyPr>
-          <a:lstStyle/>
-          <a:p>
-            <a:pPr algn="l">
-              <a:lnSpc>
-                <a:spcPct val="105000"/>
-              </a:lnSpc>
-              <a:spcAft>
-                <a:spcPts val="0"/>
-              </a:spcAft>
-            </a:pPr>
-            <a:r>
-              <a:rPr sz="1300" i="0" b="0">
-                <a:solidFill>
-                  <a:srgbClr val="647282"/>
-                </a:solidFill>
-                <a:latin typeface="Arial"/>
-              </a:rPr>
-              <a:t>Cart-stage clicks add no orders (slide 10); plus extension stand-down, PPC policy</a:t>
-            </a:r>
-          </a:p>
-        </p:txBody>
-      </p:sp>
-      <p:sp>
-        <p:nvSpPr>
-          <p:cNvPr id="27" name="Oval 26"/>
+              <a:t>→  Check it against the PPC terms</a:t>
+            </a:r>
+          </a:p>
+        </p:txBody>
+      </p:sp>
+      <p:sp>
+        <p:nvSpPr>
+          <p:cNvPr id="26" name="Rectangle 25"/>
           <p:cNvSpPr/>
           <p:nvPr/>
         </p:nvSpPr>
         <p:spPr>
           <a:xfrm>
-            <a:off x="6324447" y="4306824"/>
-            <a:ext cx="384048" cy="384048"/>
-          </a:xfrm>
-          <a:prstGeom prst="ellipse">
+            <a:off x="8127796" y="1508760"/>
+            <a:ext cx="3515258" cy="4663440"/>
+          </a:xfrm>
+          <a:prstGeom prst="rect">
             <a:avLst/>
           </a:prstGeom>
           <a:solidFill>
-            <a:srgbClr val="FF9438"/>
+            <a:srgbClr val="F3F6F9"/>
           </a:solidFill>
           <a:ln>
             <a:noFill/>
           </a:ln>
         </p:spPr>
         <p:txBody>
-          <a:bodyPr rtlCol="0" anchor="ctr" wrap="square" lIns="0" rIns="0" tIns="18288" bIns="18288">
-            <a:noAutofit/>
-          </a:bodyPr>
-          <a:lstStyle/>
-          <a:p>
-            <a:pPr algn="ctr">
-              <a:lnSpc>
-                <a:spcPct val="110000"/>
-              </a:lnSpc>
-              <a:spcAft>
-                <a:spcPts val="0"/>
-              </a:spcAft>
-            </a:pPr>
-            <a:r>
-              <a:rPr sz="1400" i="0" b="1">
-                <a:solidFill>
-                  <a:srgbClr val="FFFFFF"/>
-                </a:solidFill>
-                <a:latin typeface="Arial"/>
-              </a:rPr>
-              <a:t>3</a:t>
-            </a:r>
-          </a:p>
-        </p:txBody>
-      </p:sp>
-      <p:sp>
-        <p:nvSpPr>
-          <p:cNvPr id="28" name="TextBox 27"/>
-          <p:cNvSpPr txBox="1"/>
-          <p:nvPr/>
-        </p:nvSpPr>
-        <p:spPr>
-          <a:xfrm>
-            <a:off x="6918807" y="4297680"/>
-            <a:ext cx="4678527" cy="292608"/>
-          </a:xfrm>
-          <a:prstGeom prst="rect">
-            <a:avLst/>
-          </a:prstGeom>
-          <a:noFill/>
-        </p:spPr>
-        <p:txBody>
-          <a:bodyPr wrap="square" lIns="0" rIns="0" tIns="0" bIns="0" anchor="t">
-            <a:noAutofit/>
-          </a:bodyPr>
-          <a:lstStyle/>
-          <a:p>
-            <a:pPr algn="l">
-              <a:lnSpc>
-                <a:spcPct val="110000"/>
-              </a:lnSpc>
-              <a:spcAft>
-                <a:spcPts val="0"/>
-              </a:spcAft>
-            </a:pPr>
-            <a:r>
-              <a:rPr sz="1600" i="0" b="1">
-                <a:solidFill>
-                  <a:srgbClr val="1E2833"/>
-                </a:solidFill>
-                <a:latin typeface="Arial"/>
-              </a:rPr>
-              <a:t>Monitor every publisher (built: next slide)</a:t>
-            </a:r>
-          </a:p>
-        </p:txBody>
-      </p:sp>
-      <p:sp>
-        <p:nvSpPr>
-          <p:cNvPr id="29" name="TextBox 28"/>
-          <p:cNvSpPr txBox="1"/>
-          <p:nvPr/>
-        </p:nvSpPr>
-        <p:spPr>
-          <a:xfrm>
-            <a:off x="6918807" y="4645152"/>
-            <a:ext cx="4678527" cy="502920"/>
-          </a:xfrm>
-          <a:prstGeom prst="rect">
-            <a:avLst/>
-          </a:prstGeom>
-          <a:noFill/>
-        </p:spPr>
-        <p:txBody>
-          <a:bodyPr wrap="square" lIns="0" rIns="0" tIns="0" bIns="0" anchor="t">
-            <a:noAutofit/>
-          </a:bodyPr>
-          <a:lstStyle/>
-          <a:p>
-            <a:pPr algn="l">
-              <a:lnSpc>
-                <a:spcPct val="105000"/>
-              </a:lnSpc>
-              <a:spcAft>
-                <a:spcPts val="0"/>
-              </a:spcAft>
-            </a:pPr>
-            <a:r>
-              <a:rPr sz="1300" i="0" b="0">
-                <a:solidFill>
-                  <a:srgbClr val="647282"/>
-                </a:solidFill>
-                <a:latin typeface="Arial"/>
-              </a:rPr>
-              <a:t>Hold payouts on flagged orders; validate on reversals</a:t>
-            </a:r>
-          </a:p>
-        </p:txBody>
-      </p:sp>
-      <p:sp>
-        <p:nvSpPr>
-          <p:cNvPr id="30" name="Rectangle 29"/>
+          <a:bodyPr rtlCol="0" anchor="ctr"/>
+          <a:lstStyle/>
+          <a:p>
+            <a:pPr algn="ctr"/>
+          </a:p>
+        </p:txBody>
+      </p:sp>
+      <p:sp>
+        <p:nvSpPr>
+          <p:cNvPr id="27" name="Rounded Rectangle 26"/>
           <p:cNvSpPr/>
           <p:nvPr/>
         </p:nvSpPr>
         <p:spPr>
           <a:xfrm>
-            <a:off x="548640" y="5468112"/>
-            <a:ext cx="11094415" cy="621792"/>
-          </a:xfrm>
-          <a:prstGeom prst="rect">
-            <a:avLst/>
+            <a:off x="8402116" y="1755648"/>
+            <a:ext cx="2148840" cy="310896"/>
+          </a:xfrm>
+          <a:prstGeom prst="roundRect">
+            <a:avLst>
+              <a:gd name="adj" fmla="val 50000"/>
+            </a:avLst>
           </a:prstGeom>
           <a:solidFill>
-            <a:srgbClr val="0B2A4A"/>
+            <a:srgbClr val="EAF2FE"/>
           </a:solidFill>
           <a:ln>
             <a:noFill/>
           </a:ln>
         </p:spPr>
         <p:txBody>
-          <a:bodyPr rtlCol="0" anchor="ctr" wrap="square" lIns="274320" rIns="274320" tIns="18288" bIns="18288">
+          <a:bodyPr rtlCol="0" anchor="ctr" wrap="square" lIns="73152" rIns="73152" tIns="18288" bIns="18288">
+            <a:noAutofit/>
+          </a:bodyPr>
+          <a:lstStyle/>
+          <a:p>
+            <a:pPr algn="ctr">
+              <a:lnSpc>
+                <a:spcPct val="110000"/>
+              </a:lnSpc>
+              <a:spcAft>
+                <a:spcPts val="0"/>
+              </a:spcAft>
+            </a:pPr>
+            <a:r>
+              <a:rPr sz="1200" i="0" b="1">
+                <a:solidFill>
+                  <a:srgbClr val="006BA1"/>
+                </a:solidFill>
+                <a:latin typeface="Arial"/>
+              </a:rPr>
+              <a:t>Review before acting</a:t>
+            </a:r>
+          </a:p>
+        </p:txBody>
+      </p:sp>
+      <p:sp>
+        <p:nvSpPr>
+          <p:cNvPr id="28" name="Rounded Rectangle 27"/>
+          <p:cNvSpPr/>
+          <p:nvPr/>
+        </p:nvSpPr>
+        <p:spPr>
+          <a:xfrm>
+            <a:off x="8402116" y="2377440"/>
+            <a:ext cx="2966618" cy="512064"/>
+          </a:xfrm>
+          <a:prstGeom prst="roundRect">
+            <a:avLst>
+              <a:gd name="adj" fmla="val 15000"/>
+            </a:avLst>
+          </a:prstGeom>
+          <a:solidFill>
+            <a:srgbClr val="FFFFFF"/>
+          </a:solidFill>
+          <a:ln w="9525">
+            <a:solidFill>
+              <a:srgbClr val="E3E8EE"/>
+            </a:solidFill>
+          </a:ln>
+        </p:spPr>
+        <p:txBody>
+          <a:bodyPr rtlCol="0" anchor="ctr" wrap="square" lIns="109728" rIns="109728" tIns="18288" bIns="18288">
+            <a:noAutofit/>
+          </a:bodyPr>
+          <a:lstStyle/>
+          <a:p>
+            <a:pPr algn="ctr">
+              <a:lnSpc>
+                <a:spcPct val="110000"/>
+              </a:lnSpc>
+              <a:spcAft>
+                <a:spcPts val="0"/>
+              </a:spcAft>
+            </a:pPr>
+            <a:r>
+              <a:rPr sz="1300" i="0" b="0">
+                <a:solidFill>
+                  <a:srgbClr val="1E2833"/>
+                </a:solidFill>
+                <a:latin typeface="Arial"/>
+              </a:rPr>
+              <a:t>Search ad → TrafficPoint listicle</a:t>
+            </a:r>
+          </a:p>
+        </p:txBody>
+      </p:sp>
+      <p:cxnSp>
+        <p:nvCxnSpPr>
+          <p:cNvPr id="29" name="Connector 28"/>
+          <p:cNvCxnSpPr/>
+          <p:nvPr/>
+        </p:nvCxnSpPr>
+        <p:spPr>
+          <a:xfrm>
+            <a:off x="9885426" y="2926080"/>
+            <a:ext cx="0" cy="201168"/>
+          </a:xfrm>
+          <a:prstGeom prst="line">
+            <a:avLst/>
+          </a:prstGeom>
+          <a:ln w="15875">
+            <a:solidFill>
+              <a:srgbClr val="647282"/>
+            </a:solidFill>
+            <a:tailEnd type="triangle" w="med" len="med"/>
+          </a:ln>
+        </p:spPr>
+      </p:cxnSp>
+      <p:sp>
+        <p:nvSpPr>
+          <p:cNvPr id="30" name="Rounded Rectangle 29"/>
+          <p:cNvSpPr/>
+          <p:nvPr/>
+        </p:nvSpPr>
+        <p:spPr>
+          <a:xfrm>
+            <a:off x="8402116" y="3163824"/>
+            <a:ext cx="2966618" cy="512064"/>
+          </a:xfrm>
+          <a:prstGeom prst="roundRect">
+            <a:avLst>
+              <a:gd name="adj" fmla="val 15000"/>
+            </a:avLst>
+          </a:prstGeom>
+          <a:solidFill>
+            <a:srgbClr val="FFFFFF"/>
+          </a:solidFill>
+          <a:ln w="9525">
+            <a:solidFill>
+              <a:srgbClr val="E3E8EE"/>
+            </a:solidFill>
+          </a:ln>
+        </p:spPr>
+        <p:txBody>
+          <a:bodyPr rtlCol="0" anchor="ctr" wrap="square" lIns="109728" rIns="109728" tIns="18288" bIns="18288">
+            <a:noAutofit/>
+          </a:bodyPr>
+          <a:lstStyle/>
+          <a:p>
+            <a:pPr algn="ctr">
+              <a:lnSpc>
+                <a:spcPct val="110000"/>
+              </a:lnSpc>
+              <a:spcAft>
+                <a:spcPts val="0"/>
+              </a:spcAft>
+            </a:pPr>
+            <a:r>
+              <a:rPr sz="1300" i="0" b="0">
+                <a:solidFill>
+                  <a:srgbClr val="1E2833"/>
+                </a:solidFill>
+                <a:latin typeface="Arial"/>
+              </a:rPr>
+              <a:t>6 brands opened in ~1 minute</a:t>
+            </a:r>
+          </a:p>
+        </p:txBody>
+      </p:sp>
+      <p:cxnSp>
+        <p:nvCxnSpPr>
+          <p:cNvPr id="31" name="Connector 30"/>
+          <p:cNvCxnSpPr/>
+          <p:nvPr/>
+        </p:nvCxnSpPr>
+        <p:spPr>
+          <a:xfrm>
+            <a:off x="9885426" y="3712463"/>
+            <a:ext cx="0" cy="201169"/>
+          </a:xfrm>
+          <a:prstGeom prst="line">
+            <a:avLst/>
+          </a:prstGeom>
+          <a:ln w="15875">
+            <a:solidFill>
+              <a:srgbClr val="647282"/>
+            </a:solidFill>
+            <a:tailEnd type="triangle" w="med" len="med"/>
+          </a:ln>
+        </p:spPr>
+      </p:cxnSp>
+      <p:sp>
+        <p:nvSpPr>
+          <p:cNvPr id="32" name="Rounded Rectangle 31"/>
+          <p:cNvSpPr/>
+          <p:nvPr/>
+        </p:nvSpPr>
+        <p:spPr>
+          <a:xfrm>
+            <a:off x="8402116" y="3950208"/>
+            <a:ext cx="2966618" cy="512064"/>
+          </a:xfrm>
+          <a:prstGeom prst="roundRect">
+            <a:avLst>
+              <a:gd name="adj" fmla="val 15000"/>
+            </a:avLst>
+          </a:prstGeom>
+          <a:solidFill>
+            <a:srgbClr val="FFFFFF"/>
+          </a:solidFill>
+          <a:ln w="9525">
+            <a:solidFill>
+              <a:srgbClr val="E3E8EE"/>
+            </a:solidFill>
+          </a:ln>
+        </p:spPr>
+        <p:txBody>
+          <a:bodyPr rtlCol="0" anchor="ctr" wrap="square" lIns="109728" rIns="109728" tIns="18288" bIns="18288">
+            <a:noAutofit/>
+          </a:bodyPr>
+          <a:lstStyle/>
+          <a:p>
+            <a:pPr algn="ctr">
+              <a:lnSpc>
+                <a:spcPct val="110000"/>
+              </a:lnSpc>
+              <a:spcAft>
+                <a:spcPts val="0"/>
+              </a:spcAft>
+            </a:pPr>
+            <a:r>
+              <a:rPr sz="1300" i="0" b="1">
+                <a:solidFill>
+                  <a:srgbClr val="1E2833"/>
+                </a:solidFill>
+                <a:latin typeface="Arial"/>
+              </a:rPr>
+              <a:t>Back 9 min later via a Shopping ad</a:t>
+            </a:r>
+          </a:p>
+        </p:txBody>
+      </p:sp>
+      <p:sp>
+        <p:nvSpPr>
+          <p:cNvPr id="33" name="TextBox 32"/>
+          <p:cNvSpPr txBox="1"/>
+          <p:nvPr/>
+        </p:nvSpPr>
+        <p:spPr>
+          <a:xfrm>
+            <a:off x="8402116" y="4892040"/>
+            <a:ext cx="2966618" cy="566928"/>
+          </a:xfrm>
+          <a:prstGeom prst="rect">
+            <a:avLst/>
+          </a:prstGeom>
+          <a:noFill/>
+        </p:spPr>
+        <p:txBody>
+          <a:bodyPr wrap="square" lIns="0" rIns="0" tIns="0" bIns="0" anchor="t">
             <a:noAutofit/>
           </a:bodyPr>
           <a:lstStyle/>
           <a:p>
             <a:pPr algn="l">
               <a:lnSpc>
+                <a:spcPct val="105000"/>
+              </a:lnSpc>
+              <a:spcAft>
+                <a:spcPts val="0"/>
+              </a:spcAft>
+            </a:pPr>
+            <a:r>
+              <a:rPr sz="1500" i="0" b="1">
+                <a:solidFill>
+                  <a:srgbClr val="0B2A4A"/>
+                </a:solidFill>
+                <a:latin typeface="Arial"/>
+              </a:rPr>
+              <a:t>Real browsing, but Saatva may pay twice</a:t>
+            </a:r>
+          </a:p>
+        </p:txBody>
+      </p:sp>
+      <p:sp>
+        <p:nvSpPr>
+          <p:cNvPr id="34" name="TextBox 33"/>
+          <p:cNvSpPr txBox="1"/>
+          <p:nvPr/>
+        </p:nvSpPr>
+        <p:spPr>
+          <a:xfrm>
+            <a:off x="8402116" y="5532120"/>
+            <a:ext cx="2966618" cy="457200"/>
+          </a:xfrm>
+          <a:prstGeom prst="rect">
+            <a:avLst/>
+          </a:prstGeom>
+          <a:noFill/>
+        </p:spPr>
+        <p:txBody>
+          <a:bodyPr wrap="square" lIns="0" rIns="0" tIns="0" bIns="0" anchor="t">
+            <a:noAutofit/>
+          </a:bodyPr>
+          <a:lstStyle/>
+          <a:p>
+            <a:pPr algn="l">
+              <a:lnSpc>
                 <a:spcPct val="110000"/>
               </a:lnSpc>
               <a:spcAft>
@@ -9037,22 +9760,13 @@
               </a:spcAft>
             </a:pPr>
             <a:r>
-              <a:rPr sz="1500" i="0" b="1">
-                <a:solidFill>
-                  <a:srgbClr val="FF9438"/>
-                </a:solidFill>
-                <a:latin typeface="Arial"/>
-              </a:rPr>
-              <a:t>Next:</a:t>
-            </a:r>
-            <a:r>
-              <a:rPr sz="1500" i="0" b="0">
-                <a:solidFill>
-                  <a:srgbClr val="FFFFFF"/>
-                </a:solidFill>
-                <a:latin typeface="Arial"/>
-              </a:rPr>
-              <a:t> run the same pipeline on 90 days of data and on Saatva's Partnerize logs, to size the impact</a:t>
+              <a:rPr sz="1300" i="0" b="0">
+                <a:solidFill>
+                  <a:srgbClr val="1E2833"/>
+                </a:solidFill>
+                <a:latin typeface="Arial"/>
+              </a:rPr>
+              <a:t>→  De-duplicate with paid search</a:t>
             </a:r>
           </a:p>
         </p:txBody>
@@ -9112,7 +9826,7 @@
                 </a:solidFill>
                 <a:latin typeface="Arial"/>
               </a:rPr>
-              <a:t>FROM ANALYSIS TO MONITORING</a:t>
+              <a:t>RECOMMENDATIONS</a:t>
             </a:r>
           </a:p>
         </p:txBody>
@@ -9154,7 +9868,7 @@
                 </a:solidFill>
                 <a:latin typeface="Georgia"/>
               </a:rPr>
-              <a:t>The indicators, built into a publisher monitor</a:t>
+              <a:t>Pay for the assist, not the last touch</a:t>
             </a:r>
           </a:p>
         </p:txBody>
@@ -9301,49 +10015,25 @@
           </a:p>
         </p:txBody>
       </p:sp>
-      <p:pic>
-        <p:nvPicPr>
-          <p:cNvPr id="8" name="Picture 7" descr="dashboard_overview.png"/>
-          <p:cNvPicPr>
-            <a:picLocks noChangeAspect="1"/>
-          </p:cNvPicPr>
-          <p:nvPr/>
-        </p:nvPicPr>
-        <p:blipFill>
-          <a:blip r:embed="rId3"/>
-          <a:stretch>
-            <a:fillRect/>
-          </a:stretch>
-        </p:blipFill>
-        <p:spPr>
-          <a:xfrm>
-            <a:off x="548640" y="1463040"/>
-            <a:ext cx="5394960" cy="3624739"/>
-          </a:xfrm>
-          <a:prstGeom prst="rect">
-            <a:avLst/>
-          </a:prstGeom>
-        </p:spPr>
-      </p:pic>
-      <p:sp>
-        <p:nvSpPr>
-          <p:cNvPr id="9" name="Rectangle 8"/>
+      <p:sp>
+        <p:nvSpPr>
+          <p:cNvPr id="8" name="Oval 7"/>
           <p:cNvSpPr/>
           <p:nvPr/>
         </p:nvSpPr>
         <p:spPr>
           <a:xfrm>
-            <a:off x="548640" y="1463040"/>
-            <a:ext cx="5394960" cy="3624738"/>
-          </a:xfrm>
-          <a:prstGeom prst="rect">
-            <a:avLst/>
-          </a:prstGeom>
-          <a:noFill/>
-          <a:ln w="9525">
-            <a:solidFill>
-              <a:srgbClr val="E3E8EE"/>
-            </a:solidFill>
+            <a:off x="548640" y="1645920"/>
+            <a:ext cx="182880" cy="182880"/>
+          </a:xfrm>
+          <a:prstGeom prst="ellipse">
+            <a:avLst/>
+          </a:prstGeom>
+          <a:solidFill>
+            <a:srgbClr val="B5793F"/>
+          </a:solidFill>
+          <a:ln>
+            <a:noFill/>
           </a:ln>
         </p:spPr>
         <p:txBody>
@@ -9351,6 +10041,48 @@
           <a:lstStyle/>
           <a:p>
             <a:pPr algn="ctr"/>
+          </a:p>
+        </p:txBody>
+      </p:sp>
+      <p:sp>
+        <p:nvSpPr>
+          <p:cNvPr id="9" name="TextBox 8"/>
+          <p:cNvSpPr txBox="1"/>
+          <p:nvPr/>
+        </p:nvSpPr>
+        <p:spPr>
+          <a:xfrm>
+            <a:off x="868680" y="1554480"/>
+            <a:ext cx="4952847" cy="347472"/>
+          </a:xfrm>
+          <a:prstGeom prst="rect">
+            <a:avLst/>
+          </a:prstGeom>
+          <a:noFill/>
+        </p:spPr>
+        <p:txBody>
+          <a:bodyPr wrap="square" lIns="0" rIns="0" tIns="0" bIns="0" anchor="t">
+            <a:noAutofit/>
+          </a:bodyPr>
+          <a:lstStyle/>
+          <a:p>
+            <a:pPr algn="l">
+              <a:lnSpc>
+                <a:spcPct val="110000"/>
+              </a:lnSpc>
+              <a:spcAft>
+                <a:spcPts val="0"/>
+              </a:spcAft>
+            </a:pPr>
+            <a:r>
+              <a:rPr sz="1900" i="0" b="1">
+                <a:solidFill>
+                  <a:srgbClr val="0B2A4A"/>
+                </a:solidFill>
+                <a:latin typeface="Arial"/>
+              </a:rPr>
+              <a:t>Grow the program</a:t>
+            </a:r>
           </a:p>
         </p:txBody>
       </p:sp>
@@ -9362,8 +10094,401 @@
         </p:nvSpPr>
         <p:spPr>
           <a:xfrm>
-            <a:off x="6400800" y="1554480"/>
-            <a:ext cx="329184" cy="329184"/>
+            <a:off x="548640" y="2240280"/>
+            <a:ext cx="384048" cy="384048"/>
+          </a:xfrm>
+          <a:prstGeom prst="ellipse">
+            <a:avLst/>
+          </a:prstGeom>
+          <a:solidFill>
+            <a:srgbClr val="B5793F"/>
+          </a:solidFill>
+          <a:ln>
+            <a:noFill/>
+          </a:ln>
+        </p:spPr>
+        <p:txBody>
+          <a:bodyPr rtlCol="0" anchor="ctr" wrap="square" lIns="0" rIns="0" tIns="18288" bIns="18288">
+            <a:noAutofit/>
+          </a:bodyPr>
+          <a:lstStyle/>
+          <a:p>
+            <a:pPr algn="ctr">
+              <a:lnSpc>
+                <a:spcPct val="110000"/>
+              </a:lnSpc>
+              <a:spcAft>
+                <a:spcPts val="0"/>
+              </a:spcAft>
+            </a:pPr>
+            <a:r>
+              <a:rPr sz="1400" i="0" b="1">
+                <a:solidFill>
+                  <a:srgbClr val="FFFFFF"/>
+                </a:solidFill>
+                <a:latin typeface="Arial"/>
+              </a:rPr>
+              <a:t>1</a:t>
+            </a:r>
+          </a:p>
+        </p:txBody>
+      </p:sp>
+      <p:sp>
+        <p:nvSpPr>
+          <p:cNvPr id="11" name="TextBox 10"/>
+          <p:cNvSpPr txBox="1"/>
+          <p:nvPr/>
+        </p:nvSpPr>
+        <p:spPr>
+          <a:xfrm>
+            <a:off x="1143000" y="2231136"/>
+            <a:ext cx="4678527" cy="292608"/>
+          </a:xfrm>
+          <a:prstGeom prst="rect">
+            <a:avLst/>
+          </a:prstGeom>
+          <a:noFill/>
+        </p:spPr>
+        <p:txBody>
+          <a:bodyPr wrap="square" lIns="0" rIns="0" tIns="0" bIns="0" anchor="t">
+            <a:noAutofit/>
+          </a:bodyPr>
+          <a:lstStyle/>
+          <a:p>
+            <a:pPr algn="l">
+              <a:lnSpc>
+                <a:spcPct val="110000"/>
+              </a:lnSpc>
+              <a:spcAft>
+                <a:spcPts val="0"/>
+              </a:spcAft>
+            </a:pPr>
+            <a:r>
+              <a:rPr sz="1600" i="0" b="1">
+                <a:solidFill>
+                  <a:srgbClr val="1E2833"/>
+                </a:solidFill>
+                <a:latin typeface="Arial"/>
+              </a:rPr>
+              <a:t>Recruit review and HSA/FSA partners</a:t>
+            </a:r>
+          </a:p>
+        </p:txBody>
+      </p:sp>
+      <p:sp>
+        <p:nvSpPr>
+          <p:cNvPr id="12" name="TextBox 11"/>
+          <p:cNvSpPr txBox="1"/>
+          <p:nvPr/>
+        </p:nvSpPr>
+        <p:spPr>
+          <a:xfrm>
+            <a:off x="1143000" y="2578608"/>
+            <a:ext cx="4678527" cy="502920"/>
+          </a:xfrm>
+          <a:prstGeom prst="rect">
+            <a:avLst/>
+          </a:prstGeom>
+          <a:noFill/>
+        </p:spPr>
+        <p:txBody>
+          <a:bodyPr wrap="square" lIns="0" rIns="0" tIns="0" bIns="0" anchor="t">
+            <a:noAutofit/>
+          </a:bodyPr>
+          <a:lstStyle/>
+          <a:p>
+            <a:pPr algn="l">
+              <a:lnSpc>
+                <a:spcPct val="105000"/>
+              </a:lnSpc>
+              <a:spcAft>
+                <a:spcPts val="0"/>
+              </a:spcAft>
+            </a:pPr>
+            <a:r>
+              <a:rPr sz="1300" i="0" b="0">
+                <a:solidFill>
+                  <a:srgbClr val="647282"/>
+                </a:solidFill>
+                <a:latin typeface="Arial"/>
+              </a:rPr>
+              <a:t>Shoppers compare ~2 brands (slide 5); rivals get Mattress Clarity, buyersguide.org, Truemed</a:t>
+            </a:r>
+          </a:p>
+        </p:txBody>
+      </p:sp>
+      <p:sp>
+        <p:nvSpPr>
+          <p:cNvPr id="13" name="Oval 12"/>
+          <p:cNvSpPr/>
+          <p:nvPr/>
+        </p:nvSpPr>
+        <p:spPr>
+          <a:xfrm>
+            <a:off x="548640" y="3273552"/>
+            <a:ext cx="384048" cy="384048"/>
+          </a:xfrm>
+          <a:prstGeom prst="ellipse">
+            <a:avLst/>
+          </a:prstGeom>
+          <a:solidFill>
+            <a:srgbClr val="B5793F"/>
+          </a:solidFill>
+          <a:ln>
+            <a:noFill/>
+          </a:ln>
+        </p:spPr>
+        <p:txBody>
+          <a:bodyPr rtlCol="0" anchor="ctr" wrap="square" lIns="0" rIns="0" tIns="18288" bIns="18288">
+            <a:noAutofit/>
+          </a:bodyPr>
+          <a:lstStyle/>
+          <a:p>
+            <a:pPr algn="ctr">
+              <a:lnSpc>
+                <a:spcPct val="110000"/>
+              </a:lnSpc>
+              <a:spcAft>
+                <a:spcPts val="0"/>
+              </a:spcAft>
+            </a:pPr>
+            <a:r>
+              <a:rPr sz="1400" i="0" b="1">
+                <a:solidFill>
+                  <a:srgbClr val="FFFFFF"/>
+                </a:solidFill>
+                <a:latin typeface="Arial"/>
+              </a:rPr>
+              <a:t>2</a:t>
+            </a:r>
+          </a:p>
+        </p:txBody>
+      </p:sp>
+      <p:sp>
+        <p:nvSpPr>
+          <p:cNvPr id="14" name="TextBox 13"/>
+          <p:cNvSpPr txBox="1"/>
+          <p:nvPr/>
+        </p:nvSpPr>
+        <p:spPr>
+          <a:xfrm>
+            <a:off x="1143000" y="3264408"/>
+            <a:ext cx="4678527" cy="292608"/>
+          </a:xfrm>
+          <a:prstGeom prst="rect">
+            <a:avLst/>
+          </a:prstGeom>
+          <a:noFill/>
+        </p:spPr>
+        <p:txBody>
+          <a:bodyPr wrap="square" lIns="0" rIns="0" tIns="0" bIns="0" anchor="t">
+            <a:noAutofit/>
+          </a:bodyPr>
+          <a:lstStyle/>
+          <a:p>
+            <a:pPr algn="l">
+              <a:lnSpc>
+                <a:spcPct val="110000"/>
+              </a:lnSpc>
+              <a:spcAft>
+                <a:spcPts val="0"/>
+              </a:spcAft>
+            </a:pPr>
+            <a:r>
+              <a:rPr sz="1600" i="0" b="1">
+                <a:solidFill>
+                  <a:srgbClr val="1E2833"/>
+                </a:solidFill>
+                <a:latin typeface="Arial"/>
+              </a:rPr>
+              <a:t>Give each publisher its own coupon code</a:t>
+            </a:r>
+          </a:p>
+        </p:txBody>
+      </p:sp>
+      <p:sp>
+        <p:nvSpPr>
+          <p:cNvPr id="15" name="TextBox 14"/>
+          <p:cNvSpPr txBox="1"/>
+          <p:nvPr/>
+        </p:nvSpPr>
+        <p:spPr>
+          <a:xfrm>
+            <a:off x="1143000" y="3611880"/>
+            <a:ext cx="4678527" cy="502920"/>
+          </a:xfrm>
+          <a:prstGeom prst="rect">
+            <a:avLst/>
+          </a:prstGeom>
+          <a:noFill/>
+        </p:spPr>
+        <p:txBody>
+          <a:bodyPr wrap="square" lIns="0" rIns="0" tIns="0" bIns="0" anchor="t">
+            <a:noAutofit/>
+          </a:bodyPr>
+          <a:lstStyle/>
+          <a:p>
+            <a:pPr algn="l">
+              <a:lnSpc>
+                <a:spcPct val="105000"/>
+              </a:lnSpc>
+              <a:spcAft>
+                <a:spcPts val="0"/>
+              </a:spcAft>
+            </a:pPr>
+            <a:r>
+              <a:rPr sz="1300" i="0" b="0">
+                <a:solidFill>
+                  <a:srgbClr val="647282"/>
+                </a:solidFill>
+                <a:latin typeface="Arial"/>
+              </a:rPr>
+              <a:t>One code is shared today, so a sale can't be traced to its partner</a:t>
+            </a:r>
+          </a:p>
+        </p:txBody>
+      </p:sp>
+      <p:sp>
+        <p:nvSpPr>
+          <p:cNvPr id="16" name="Oval 15"/>
+          <p:cNvSpPr/>
+          <p:nvPr/>
+        </p:nvSpPr>
+        <p:spPr>
+          <a:xfrm>
+            <a:off x="548640" y="4306824"/>
+            <a:ext cx="384048" cy="384048"/>
+          </a:xfrm>
+          <a:prstGeom prst="ellipse">
+            <a:avLst/>
+          </a:prstGeom>
+          <a:solidFill>
+            <a:srgbClr val="B5793F"/>
+          </a:solidFill>
+          <a:ln>
+            <a:noFill/>
+          </a:ln>
+        </p:spPr>
+        <p:txBody>
+          <a:bodyPr rtlCol="0" anchor="ctr" wrap="square" lIns="0" rIns="0" tIns="18288" bIns="18288">
+            <a:noAutofit/>
+          </a:bodyPr>
+          <a:lstStyle/>
+          <a:p>
+            <a:pPr algn="ctr">
+              <a:lnSpc>
+                <a:spcPct val="110000"/>
+              </a:lnSpc>
+              <a:spcAft>
+                <a:spcPts val="0"/>
+              </a:spcAft>
+            </a:pPr>
+            <a:r>
+              <a:rPr sz="1400" i="0" b="1">
+                <a:solidFill>
+                  <a:srgbClr val="FFFFFF"/>
+                </a:solidFill>
+                <a:latin typeface="Arial"/>
+              </a:rPr>
+              <a:t>3</a:t>
+            </a:r>
+          </a:p>
+        </p:txBody>
+      </p:sp>
+      <p:sp>
+        <p:nvSpPr>
+          <p:cNvPr id="17" name="TextBox 16"/>
+          <p:cNvSpPr txBox="1"/>
+          <p:nvPr/>
+        </p:nvSpPr>
+        <p:spPr>
+          <a:xfrm>
+            <a:off x="1143000" y="4297680"/>
+            <a:ext cx="4678527" cy="292608"/>
+          </a:xfrm>
+          <a:prstGeom prst="rect">
+            <a:avLst/>
+          </a:prstGeom>
+          <a:noFill/>
+        </p:spPr>
+        <p:txBody>
+          <a:bodyPr wrap="square" lIns="0" rIns="0" tIns="0" bIns="0" anchor="t">
+            <a:noAutofit/>
+          </a:bodyPr>
+          <a:lstStyle/>
+          <a:p>
+            <a:pPr algn="l">
+              <a:lnSpc>
+                <a:spcPct val="110000"/>
+              </a:lnSpc>
+              <a:spcAft>
+                <a:spcPts val="0"/>
+              </a:spcAft>
+            </a:pPr>
+            <a:r>
+              <a:rPr sz="1600" i="0" b="1">
+                <a:solidFill>
+                  <a:srgbClr val="1E2833"/>
+                </a:solidFill>
+                <a:latin typeface="Arial"/>
+              </a:rPr>
+              <a:t>Tier commissions by the value of the click</a:t>
+            </a:r>
+          </a:p>
+        </p:txBody>
+      </p:sp>
+      <p:sp>
+        <p:nvSpPr>
+          <p:cNvPr id="18" name="TextBox 17"/>
+          <p:cNvSpPr txBox="1"/>
+          <p:nvPr/>
+        </p:nvSpPr>
+        <p:spPr>
+          <a:xfrm>
+            <a:off x="1143000" y="4645152"/>
+            <a:ext cx="4678527" cy="502920"/>
+          </a:xfrm>
+          <a:prstGeom prst="rect">
+            <a:avLst/>
+          </a:prstGeom>
+          <a:noFill/>
+        </p:spPr>
+        <p:txBody>
+          <a:bodyPr wrap="square" lIns="0" rIns="0" tIns="0" bIns="0" anchor="t">
+            <a:noAutofit/>
+          </a:bodyPr>
+          <a:lstStyle/>
+          <a:p>
+            <a:pPr algn="l">
+              <a:lnSpc>
+                <a:spcPct val="105000"/>
+              </a:lnSpc>
+              <a:spcAft>
+                <a:spcPts val="0"/>
+              </a:spcAft>
+            </a:pPr>
+            <a:r>
+              <a:rPr sz="1300" i="0" b="0">
+                <a:solidFill>
+                  <a:srgbClr val="647282"/>
+                </a:solidFill>
+                <a:latin typeface="Arial"/>
+              </a:rPr>
+              <a:t>Pay less for coupon clicks and for clicks after a cart exists</a:t>
+            </a:r>
+          </a:p>
+        </p:txBody>
+      </p:sp>
+      <p:sp>
+        <p:nvSpPr>
+          <p:cNvPr id="19" name="Oval 18"/>
+          <p:cNvSpPr/>
+          <p:nvPr/>
+        </p:nvSpPr>
+        <p:spPr>
+          <a:xfrm>
+            <a:off x="6324447" y="1645920"/>
+            <a:ext cx="182880" cy="182880"/>
           </a:xfrm>
           <a:prstGeom prst="ellipse">
             <a:avLst/>
@@ -9376,12 +10501,36 @@
           </a:ln>
         </p:spPr>
         <p:txBody>
-          <a:bodyPr rtlCol="0" anchor="ctr" wrap="square" lIns="0" rIns="0" tIns="18288" bIns="18288">
-            <a:noAutofit/>
-          </a:bodyPr>
-          <a:lstStyle/>
-          <a:p>
-            <a:pPr algn="ctr">
+          <a:bodyPr rtlCol="0" anchor="ctr"/>
+          <a:lstStyle/>
+          <a:p>
+            <a:pPr algn="ctr"/>
+          </a:p>
+        </p:txBody>
+      </p:sp>
+      <p:sp>
+        <p:nvSpPr>
+          <p:cNvPr id="20" name="TextBox 19"/>
+          <p:cNvSpPr txBox="1"/>
+          <p:nvPr/>
+        </p:nvSpPr>
+        <p:spPr>
+          <a:xfrm>
+            <a:off x="6644487" y="1554480"/>
+            <a:ext cx="4952847" cy="347472"/>
+          </a:xfrm>
+          <a:prstGeom prst="rect">
+            <a:avLst/>
+          </a:prstGeom>
+          <a:noFill/>
+        </p:spPr>
+        <p:txBody>
+          <a:bodyPr wrap="square" lIns="0" rIns="0" tIns="0" bIns="0" anchor="t">
+            <a:noAutofit/>
+          </a:bodyPr>
+          <a:lstStyle/>
+          <a:p>
+            <a:pPr algn="l">
               <a:lnSpc>
                 <a:spcPct val="110000"/>
               </a:lnSpc>
@@ -9390,111 +10539,27 @@
               </a:spcAft>
             </a:pPr>
             <a:r>
-              <a:rPr sz="1200" i="0" b="1">
-                <a:solidFill>
-                  <a:srgbClr val="FFFFFF"/>
-                </a:solidFill>
-                <a:latin typeface="Arial"/>
-              </a:rPr>
-              <a:t>1</a:t>
-            </a:r>
-          </a:p>
-        </p:txBody>
-      </p:sp>
-      <p:sp>
-        <p:nvSpPr>
-          <p:cNvPr id="11" name="TextBox 10"/>
-          <p:cNvSpPr txBox="1"/>
-          <p:nvPr/>
-        </p:nvSpPr>
-        <p:spPr>
-          <a:xfrm>
-            <a:off x="6876288" y="1536192"/>
-            <a:ext cx="4766767" cy="292608"/>
-          </a:xfrm>
-          <a:prstGeom prst="rect">
-            <a:avLst/>
-          </a:prstGeom>
-          <a:noFill/>
-        </p:spPr>
-        <p:txBody>
-          <a:bodyPr wrap="square" lIns="0" rIns="0" tIns="0" bIns="0" anchor="t">
-            <a:noAutofit/>
-          </a:bodyPr>
-          <a:lstStyle/>
-          <a:p>
-            <a:pPr algn="l">
-              <a:lnSpc>
-                <a:spcPct val="110000"/>
-              </a:lnSpc>
-              <a:spcAft>
-                <a:spcPts val="0"/>
-              </a:spcAft>
-            </a:pPr>
-            <a:r>
-              <a:rPr sz="1500" i="0" b="1">
+              <a:rPr sz="1900" i="0" b="1">
                 <a:solidFill>
                   <a:srgbClr val="0B2A4A"/>
                 </a:solidFill>
                 <a:latin typeface="Arial"/>
               </a:rPr>
-              <a:t>Any look-back, one click</a:t>
-            </a:r>
-          </a:p>
-        </p:txBody>
-      </p:sp>
-      <p:sp>
-        <p:nvSpPr>
-          <p:cNvPr id="12" name="TextBox 11"/>
-          <p:cNvSpPr txBox="1"/>
-          <p:nvPr/>
-        </p:nvSpPr>
-        <p:spPr>
-          <a:xfrm>
-            <a:off x="6876288" y="1856231"/>
-            <a:ext cx="4766767" cy="685800"/>
-          </a:xfrm>
-          <a:prstGeom prst="rect">
-            <a:avLst/>
-          </a:prstGeom>
-          <a:noFill/>
-        </p:spPr>
-        <p:txBody>
-          <a:bodyPr wrap="square" lIns="0" rIns="0" tIns="0" bIns="0" anchor="t">
-            <a:noAutofit/>
-          </a:bodyPr>
-          <a:lstStyle/>
-          <a:p>
-            <a:pPr algn="l">
-              <a:lnSpc>
-                <a:spcPct val="105000"/>
-              </a:lnSpc>
-              <a:spcAft>
-                <a:spcPts val="0"/>
-              </a:spcAft>
-            </a:pPr>
-            <a:r>
-              <a:rPr sz="1250" i="0" b="0">
-                <a:solidFill>
-                  <a:srgbClr val="647282"/>
-                </a:solidFill>
-                <a:latin typeface="Arial"/>
-              </a:rPr>
-              <a:t>Every click re-scored at 2, 10 or 30 minutes; the sensitivity test becomes a control</a:t>
-            </a:r>
-          </a:p>
-        </p:txBody>
-      </p:sp>
-      <p:sp>
-        <p:nvSpPr>
-          <p:cNvPr id="13" name="Oval 12"/>
+              <a:t>Stop paying for taken credit</a:t>
+            </a:r>
+          </a:p>
+        </p:txBody>
+      </p:sp>
+      <p:sp>
+        <p:nvSpPr>
+          <p:cNvPr id="21" name="Oval 20"/>
           <p:cNvSpPr/>
           <p:nvPr/>
         </p:nvSpPr>
         <p:spPr>
           <a:xfrm>
-            <a:off x="6400800" y="2697480"/>
-            <a:ext cx="329184" cy="329184"/>
+            <a:off x="6324447" y="2240280"/>
+            <a:ext cx="384048" cy="384048"/>
           </a:xfrm>
           <a:prstGeom prst="ellipse">
             <a:avLst/>
@@ -9521,27 +10586,27 @@
               </a:spcAft>
             </a:pPr>
             <a:r>
-              <a:rPr sz="1200" i="0" b="1">
+              <a:rPr sz="1400" i="0" b="1">
                 <a:solidFill>
                   <a:srgbClr val="FFFFFF"/>
                 </a:solidFill>
                 <a:latin typeface="Arial"/>
               </a:rPr>
-              <a:t>2</a:t>
-            </a:r>
-          </a:p>
-        </p:txBody>
-      </p:sp>
-      <p:sp>
-        <p:nvSpPr>
-          <p:cNvPr id="14" name="TextBox 13"/>
-          <p:cNvSpPr txBox="1"/>
-          <p:nvPr/>
-        </p:nvSpPr>
-        <p:spPr>
-          <a:xfrm>
-            <a:off x="6876288" y="2679192"/>
-            <a:ext cx="4766767" cy="292608"/>
+              <a:t>1</a:t>
+            </a:r>
+          </a:p>
+        </p:txBody>
+      </p:sp>
+      <p:sp>
+        <p:nvSpPr>
+          <p:cNvPr id="22" name="TextBox 21"/>
+          <p:cNvSpPr txBox="1"/>
+          <p:nvPr/>
+        </p:nvSpPr>
+        <p:spPr>
+          <a:xfrm>
+            <a:off x="6918807" y="2231136"/>
+            <a:ext cx="4678527" cy="292608"/>
           </a:xfrm>
           <a:prstGeom prst="rect">
             <a:avLst/>
@@ -9563,27 +10628,27 @@
               </a:spcAft>
             </a:pPr>
             <a:r>
-              <a:rPr sz="1500" i="0" b="1">
-                <a:solidFill>
-                  <a:srgbClr val="0B2A4A"/>
-                </a:solidFill>
-                <a:latin typeface="Arial"/>
-              </a:rPr>
-              <a:t>Ranked by money, with a status</a:t>
-            </a:r>
-          </a:p>
-        </p:txBody>
-      </p:sp>
-      <p:sp>
-        <p:nvSpPr>
-          <p:cNvPr id="15" name="TextBox 14"/>
-          <p:cNvSpPr txBox="1"/>
-          <p:nvPr/>
-        </p:nvSpPr>
-        <p:spPr>
-          <a:xfrm>
-            <a:off x="6876288" y="2999232"/>
-            <a:ext cx="4766767" cy="685800"/>
+              <a:rPr sz="1600" i="0" b="1">
+                <a:solidFill>
+                  <a:srgbClr val="1E2833"/>
+                </a:solidFill>
+                <a:latin typeface="Arial"/>
+              </a:rPr>
+              <a:t>Reconcile clicks with saatva.com landings</a:t>
+            </a:r>
+          </a:p>
+        </p:txBody>
+      </p:sp>
+      <p:sp>
+        <p:nvSpPr>
+          <p:cNvPr id="23" name="TextBox 22"/>
+          <p:cNvSpPr txBox="1"/>
+          <p:nvPr/>
+        </p:nvSpPr>
+        <p:spPr>
+          <a:xfrm>
+            <a:off x="6918807" y="2578608"/>
+            <a:ext cx="4678527" cy="502920"/>
           </a:xfrm>
           <a:prstGeom prst="rect">
             <a:avLst/>
@@ -9605,27 +10670,27 @@
               </a:spcAft>
             </a:pPr>
             <a:r>
-              <a:rPr sz="1250" i="0" b="0">
+              <a:rPr sz="1300" i="0" b="0">
                 <a:solidFill>
                   <a:srgbClr val="647282"/>
                 </a:solidFill>
                 <a:latin typeface="Arial"/>
               </a:rPr>
-              <a:t>Hold, Review or OK per publisher, by commission on flagged orders; AOV and rate are inputs</a:t>
-            </a:r>
-          </a:p>
-        </p:txBody>
-      </p:sp>
-      <p:sp>
-        <p:nvSpPr>
-          <p:cNvPr id="16" name="Oval 15"/>
+              <a:t>A click that never lands is proof, with no threshold to tune</a:t>
+            </a:r>
+          </a:p>
+        </p:txBody>
+      </p:sp>
+      <p:sp>
+        <p:nvSpPr>
+          <p:cNvPr id="24" name="Oval 23"/>
           <p:cNvSpPr/>
           <p:nvPr/>
         </p:nvSpPr>
         <p:spPr>
           <a:xfrm>
-            <a:off x="6400800" y="3840480"/>
-            <a:ext cx="329184" cy="329184"/>
+            <a:off x="6324447" y="3273552"/>
+            <a:ext cx="384048" cy="384048"/>
           </a:xfrm>
           <a:prstGeom prst="ellipse">
             <a:avLst/>
@@ -9652,12 +10717,143 @@
               </a:spcAft>
             </a:pPr>
             <a:r>
-              <a:rPr sz="1200" i="0" b="1">
+              <a:rPr sz="1400" i="0" b="1">
                 <a:solidFill>
                   <a:srgbClr val="FFFFFF"/>
                 </a:solidFill>
                 <a:latin typeface="Arial"/>
               </a:rPr>
+              <a:t>2</a:t>
+            </a:r>
+          </a:p>
+        </p:txBody>
+      </p:sp>
+      <p:sp>
+        <p:nvSpPr>
+          <p:cNvPr id="25" name="TextBox 24"/>
+          <p:cNvSpPr txBox="1"/>
+          <p:nvPr/>
+        </p:nvSpPr>
+        <p:spPr>
+          <a:xfrm>
+            <a:off x="6918807" y="3264408"/>
+            <a:ext cx="4678527" cy="292608"/>
+          </a:xfrm>
+          <a:prstGeom prst="rect">
+            <a:avLst/>
+          </a:prstGeom>
+          <a:noFill/>
+        </p:spPr>
+        <p:txBody>
+          <a:bodyPr wrap="square" lIns="0" rIns="0" tIns="0" bIns="0" anchor="t">
+            <a:noAutofit/>
+          </a:bodyPr>
+          <a:lstStyle/>
+          <a:p>
+            <a:pPr algn="l">
+              <a:lnSpc>
+                <a:spcPct val="110000"/>
+              </a:lnSpc>
+              <a:spcAft>
+                <a:spcPts val="0"/>
+              </a:spcAft>
+            </a:pPr>
+            <a:r>
+              <a:rPr sz="1600" i="0" b="1">
+                <a:solidFill>
+                  <a:srgbClr val="1E2833"/>
+                </a:solidFill>
+                <a:latin typeface="Arial"/>
+              </a:rPr>
+              <a:t>No overwrite once a cart exists</a:t>
+            </a:r>
+          </a:p>
+        </p:txBody>
+      </p:sp>
+      <p:sp>
+        <p:nvSpPr>
+          <p:cNvPr id="26" name="TextBox 25"/>
+          <p:cNvSpPr txBox="1"/>
+          <p:nvPr/>
+        </p:nvSpPr>
+        <p:spPr>
+          <a:xfrm>
+            <a:off x="6918807" y="3611880"/>
+            <a:ext cx="4678527" cy="502920"/>
+          </a:xfrm>
+          <a:prstGeom prst="rect">
+            <a:avLst/>
+          </a:prstGeom>
+          <a:noFill/>
+        </p:spPr>
+        <p:txBody>
+          <a:bodyPr wrap="square" lIns="0" rIns="0" tIns="0" bIns="0" anchor="t">
+            <a:noAutofit/>
+          </a:bodyPr>
+          <a:lstStyle/>
+          <a:p>
+            <a:pPr algn="l">
+              <a:lnSpc>
+                <a:spcPct val="105000"/>
+              </a:lnSpc>
+              <a:spcAft>
+                <a:spcPts val="0"/>
+              </a:spcAft>
+            </a:pPr>
+            <a:r>
+              <a:rPr sz="1300" i="0" b="0">
+                <a:solidFill>
+                  <a:srgbClr val="647282"/>
+                </a:solidFill>
+                <a:latin typeface="Arial"/>
+              </a:rPr>
+              <a:t>Cart-stage clicks add no orders (slide 10); plus extension stand-down, PPC policy</a:t>
+            </a:r>
+          </a:p>
+        </p:txBody>
+      </p:sp>
+      <p:sp>
+        <p:nvSpPr>
+          <p:cNvPr id="27" name="Oval 26"/>
+          <p:cNvSpPr/>
+          <p:nvPr/>
+        </p:nvSpPr>
+        <p:spPr>
+          <a:xfrm>
+            <a:off x="6324447" y="4306824"/>
+            <a:ext cx="384048" cy="384048"/>
+          </a:xfrm>
+          <a:prstGeom prst="ellipse">
+            <a:avLst/>
+          </a:prstGeom>
+          <a:solidFill>
+            <a:srgbClr val="FF9438"/>
+          </a:solidFill>
+          <a:ln>
+            <a:noFill/>
+          </a:ln>
+        </p:spPr>
+        <p:txBody>
+          <a:bodyPr rtlCol="0" anchor="ctr" wrap="square" lIns="0" rIns="0" tIns="18288" bIns="18288">
+            <a:noAutofit/>
+          </a:bodyPr>
+          <a:lstStyle/>
+          <a:p>
+            <a:pPr algn="ctr">
+              <a:lnSpc>
+                <a:spcPct val="110000"/>
+              </a:lnSpc>
+              <a:spcAft>
+                <a:spcPts val="0"/>
+              </a:spcAft>
+            </a:pPr>
+            <a:r>
+              <a:rPr sz="1400" i="0" b="1">
+                <a:solidFill>
+                  <a:srgbClr val="FFFFFF"/>
+                </a:solidFill>
+                <a:latin typeface="Arial"/>
+              </a:rPr>
               <a:t>3</a:t>
             </a:r>
           </a:p>
@@ -9665,14 +10861,14 @@
       </p:sp>
       <p:sp>
         <p:nvSpPr>
-          <p:cNvPr id="17" name="TextBox 16"/>
-          <p:cNvSpPr txBox="1"/>
-          <p:nvPr/>
-        </p:nvSpPr>
-        <p:spPr>
-          <a:xfrm>
-            <a:off x="6876288" y="3822192"/>
-            <a:ext cx="4766767" cy="292608"/>
+          <p:cNvPr id="28" name="TextBox 27"/>
+          <p:cNvSpPr txBox="1"/>
+          <p:nvPr/>
+        </p:nvSpPr>
+        <p:spPr>
+          <a:xfrm>
+            <a:off x="6918807" y="4297680"/>
+            <a:ext cx="4678527" cy="292608"/>
           </a:xfrm>
           <a:prstGeom prst="rect">
             <a:avLst/>
@@ -9694,125 +10890,115 @@
               </a:spcAft>
             </a:pPr>
             <a:r>
+              <a:rPr sz="1600" i="0" b="1">
+                <a:solidFill>
+                  <a:srgbClr val="1E2833"/>
+                </a:solidFill>
+                <a:latin typeface="Arial"/>
+              </a:rPr>
+              <a:t>Monitor every publisher (built: next slide)</a:t>
+            </a:r>
+          </a:p>
+        </p:txBody>
+      </p:sp>
+      <p:sp>
+        <p:nvSpPr>
+          <p:cNvPr id="29" name="TextBox 28"/>
+          <p:cNvSpPr txBox="1"/>
+          <p:nvPr/>
+        </p:nvSpPr>
+        <p:spPr>
+          <a:xfrm>
+            <a:off x="6918807" y="4645152"/>
+            <a:ext cx="4678527" cy="502920"/>
+          </a:xfrm>
+          <a:prstGeom prst="rect">
+            <a:avLst/>
+          </a:prstGeom>
+          <a:noFill/>
+        </p:spPr>
+        <p:txBody>
+          <a:bodyPr wrap="square" lIns="0" rIns="0" tIns="0" bIns="0" anchor="t">
+            <a:noAutofit/>
+          </a:bodyPr>
+          <a:lstStyle/>
+          <a:p>
+            <a:pPr algn="l">
+              <a:lnSpc>
+                <a:spcPct val="105000"/>
+              </a:lnSpc>
+              <a:spcAft>
+                <a:spcPts val="0"/>
+              </a:spcAft>
+            </a:pPr>
+            <a:r>
+              <a:rPr sz="1300" i="0" b="0">
+                <a:solidFill>
+                  <a:srgbClr val="647282"/>
+                </a:solidFill>
+                <a:latin typeface="Arial"/>
+              </a:rPr>
+              <a:t>Hold payouts on flagged orders; validate on reversals</a:t>
+            </a:r>
+          </a:p>
+        </p:txBody>
+      </p:sp>
+      <p:sp>
+        <p:nvSpPr>
+          <p:cNvPr id="30" name="Rectangle 29"/>
+          <p:cNvSpPr/>
+          <p:nvPr/>
+        </p:nvSpPr>
+        <p:spPr>
+          <a:xfrm>
+            <a:off x="548640" y="5468112"/>
+            <a:ext cx="11094415" cy="621792"/>
+          </a:xfrm>
+          <a:prstGeom prst="rect">
+            <a:avLst/>
+          </a:prstGeom>
+          <a:solidFill>
+            <a:srgbClr val="0B2A4A"/>
+          </a:solidFill>
+          <a:ln>
+            <a:noFill/>
+          </a:ln>
+        </p:spPr>
+        <p:txBody>
+          <a:bodyPr rtlCol="0" anchor="ctr" wrap="square" lIns="274320" rIns="274320" tIns="18288" bIns="18288">
+            <a:noAutofit/>
+          </a:bodyPr>
+          <a:lstStyle/>
+          <a:p>
+            <a:pPr algn="l">
+              <a:lnSpc>
+                <a:spcPct val="110000"/>
+              </a:lnSpc>
+              <a:spcAft>
+                <a:spcPts val="0"/>
+              </a:spcAft>
+            </a:pPr>
+            <a:r>
               <a:rPr sz="1500" i="0" b="1">
                 <a:solidFill>
-                  <a:srgbClr val="0B2A4A"/>
-                </a:solidFill>
-                <a:latin typeface="Arial"/>
-              </a:rPr>
-              <a:t>Every flag has a journey</a:t>
-            </a:r>
-          </a:p>
-        </p:txBody>
-      </p:sp>
-      <p:sp>
-        <p:nvSpPr>
-          <p:cNvPr id="18" name="TextBox 17"/>
-          <p:cNvSpPr txBox="1"/>
-          <p:nvPr/>
-        </p:nvSpPr>
-        <p:spPr>
-          <a:xfrm>
-            <a:off x="6876288" y="4142232"/>
-            <a:ext cx="4766767" cy="685800"/>
-          </a:xfrm>
-          <a:prstGeom prst="rect">
-            <a:avLst/>
-          </a:prstGeom>
-          <a:noFill/>
-        </p:spPr>
-        <p:txBody>
-          <a:bodyPr wrap="square" lIns="0" rIns="0" tIns="0" bIns="0" anchor="t">
-            <a:noAutofit/>
-          </a:bodyPr>
-          <a:lstStyle/>
-          <a:p>
-            <a:pPr algn="l">
-              <a:lnSpc>
-                <a:spcPct val="105000"/>
-              </a:lnSpc>
-              <a:spcAft>
-                <a:spcPts val="0"/>
-              </a:spcAft>
-            </a:pPr>
-            <a:r>
-              <a:rPr sz="1250" i="0" b="0">
-                <a:solidFill>
-                  <a:srgbClr val="647282"/>
-                </a:solidFill>
-                <a:latin typeface="Arial"/>
-              </a:rPr>
-              <a:t>The sites before and after each click, so a reviewer sees the evidence, not a score</a:t>
-            </a:r>
-          </a:p>
-        </p:txBody>
-      </p:sp>
-      <p:sp>
-        <p:nvSpPr>
-          <p:cNvPr id="19" name="TextBox 18"/>
-          <p:cNvSpPr txBox="1"/>
-          <p:nvPr/>
-        </p:nvSpPr>
-        <p:spPr>
-          <a:xfrm>
-            <a:off x="548640" y="5230368"/>
-            <a:ext cx="11094415" cy="256032"/>
-          </a:xfrm>
-          <a:prstGeom prst="rect">
-            <a:avLst/>
-          </a:prstGeom>
-          <a:noFill/>
-        </p:spPr>
-        <p:txBody>
-          <a:bodyPr wrap="square" lIns="0" rIns="0" tIns="0" bIns="0" anchor="t">
-            <a:noAutofit/>
-          </a:bodyPr>
-          <a:lstStyle/>
-          <a:p>
-            <a:pPr algn="l">
-              <a:lnSpc>
-                <a:spcPct val="110000"/>
-              </a:lnSpc>
-              <a:spcAft>
-                <a:spcPts val="0"/>
-              </a:spcAft>
-            </a:pPr>
-            <a:r>
-              <a:rPr sz="1200" i="0" b="1">
-                <a:solidFill>
-                  <a:srgbClr val="647282"/>
-                </a:solidFill>
-                <a:latin typeface="Arial"/>
-              </a:rPr>
-              <a:t>One of impact:150372's 32 orders: the click "lands" on the order confirmation page</a:t>
-            </a:r>
-          </a:p>
-        </p:txBody>
-      </p:sp>
-      <p:pic>
-        <p:nvPicPr>
-          <p:cNvPr id="20" name="Picture 19" descr="dashboard_journey.png"/>
-          <p:cNvPicPr>
-            <a:picLocks noChangeAspect="1"/>
-          </p:cNvPicPr>
-          <p:nvPr/>
-        </p:nvPicPr>
-        <p:blipFill>
-          <a:blip r:embed="rId4"/>
-          <a:stretch>
-            <a:fillRect/>
-          </a:stretch>
-        </p:blipFill>
-        <p:spPr>
-          <a:xfrm>
-            <a:off x="548640" y="5522976"/>
-            <a:ext cx="9430252" cy="697646"/>
-          </a:xfrm>
-          <a:prstGeom prst="rect">
-            <a:avLst/>
-          </a:prstGeom>
-        </p:spPr>
-      </p:pic>
+                  <a:srgbClr val="FF9438"/>
+                </a:solidFill>
+                <a:latin typeface="Arial"/>
+              </a:rPr>
+              <a:t>Next:</a:t>
+            </a:r>
+            <a:r>
+              <a:rPr sz="1500" i="0" b="0">
+                <a:solidFill>
+                  <a:srgbClr val="FFFFFF"/>
+                </a:solidFill>
+                <a:latin typeface="Arial"/>
+              </a:rPr>
+              <a:t> run the same pipeline on 90 days of data and on Saatva's Partnerize logs, to size the impact</a:t>
+            </a:r>
+          </a:p>
+        </p:txBody>
+      </p:sp>
     </p:spTree>
   </p:cSld>
   <p:clrMapOvr>
@@ -9868,7 +11054,7 @@
                 </a:solidFill>
                 <a:latin typeface="Arial"/>
               </a:rPr>
-              <a:t>BACKUP</a:t>
+              <a:t>FROM ANALYSIS TO MONITORING</a:t>
             </a:r>
           </a:p>
         </p:txBody>
@@ -9910,7 +11096,7 @@
                 </a:solidFill>
                 <a:latin typeface="Georgia"/>
               </a:rPr>
-              <a:t>Results by brand</a:t>
+              <a:t>The indicators, built into a publisher monitor</a:t>
             </a:r>
           </a:p>
         </p:txBody>
@@ -10053,6 +11239,762 @@
                 <a:latin typeface="Arial"/>
               </a:rPr>
               <a:t>14</a:t>
+            </a:r>
+          </a:p>
+        </p:txBody>
+      </p:sp>
+      <p:pic>
+        <p:nvPicPr>
+          <p:cNvPr id="8" name="Picture 7" descr="dashboard_overview.png"/>
+          <p:cNvPicPr>
+            <a:picLocks noChangeAspect="1"/>
+          </p:cNvPicPr>
+          <p:nvPr/>
+        </p:nvPicPr>
+        <p:blipFill>
+          <a:blip r:embed="rId3"/>
+          <a:stretch>
+            <a:fillRect/>
+          </a:stretch>
+        </p:blipFill>
+        <p:spPr>
+          <a:xfrm>
+            <a:off x="548640" y="1463040"/>
+            <a:ext cx="5394960" cy="3624739"/>
+          </a:xfrm>
+          <a:prstGeom prst="rect">
+            <a:avLst/>
+          </a:prstGeom>
+        </p:spPr>
+      </p:pic>
+      <p:sp>
+        <p:nvSpPr>
+          <p:cNvPr id="9" name="Rectangle 8"/>
+          <p:cNvSpPr/>
+          <p:nvPr/>
+        </p:nvSpPr>
+        <p:spPr>
+          <a:xfrm>
+            <a:off x="548640" y="1463040"/>
+            <a:ext cx="5394960" cy="3624738"/>
+          </a:xfrm>
+          <a:prstGeom prst="rect">
+            <a:avLst/>
+          </a:prstGeom>
+          <a:noFill/>
+          <a:ln w="9525">
+            <a:solidFill>
+              <a:srgbClr val="E3E8EE"/>
+            </a:solidFill>
+          </a:ln>
+        </p:spPr>
+        <p:txBody>
+          <a:bodyPr rtlCol="0" anchor="ctr"/>
+          <a:lstStyle/>
+          <a:p>
+            <a:pPr algn="ctr"/>
+          </a:p>
+        </p:txBody>
+      </p:sp>
+      <p:sp>
+        <p:nvSpPr>
+          <p:cNvPr id="10" name="Oval 9"/>
+          <p:cNvSpPr/>
+          <p:nvPr/>
+        </p:nvSpPr>
+        <p:spPr>
+          <a:xfrm>
+            <a:off x="6400800" y="1554480"/>
+            <a:ext cx="329184" cy="329184"/>
+          </a:xfrm>
+          <a:prstGeom prst="ellipse">
+            <a:avLst/>
+          </a:prstGeom>
+          <a:solidFill>
+            <a:srgbClr val="FF9438"/>
+          </a:solidFill>
+          <a:ln>
+            <a:noFill/>
+          </a:ln>
+        </p:spPr>
+        <p:txBody>
+          <a:bodyPr rtlCol="0" anchor="ctr" wrap="square" lIns="0" rIns="0" tIns="18288" bIns="18288">
+            <a:noAutofit/>
+          </a:bodyPr>
+          <a:lstStyle/>
+          <a:p>
+            <a:pPr algn="ctr">
+              <a:lnSpc>
+                <a:spcPct val="110000"/>
+              </a:lnSpc>
+              <a:spcAft>
+                <a:spcPts val="0"/>
+              </a:spcAft>
+            </a:pPr>
+            <a:r>
+              <a:rPr sz="1200" i="0" b="1">
+                <a:solidFill>
+                  <a:srgbClr val="FFFFFF"/>
+                </a:solidFill>
+                <a:latin typeface="Arial"/>
+              </a:rPr>
+              <a:t>1</a:t>
+            </a:r>
+          </a:p>
+        </p:txBody>
+      </p:sp>
+      <p:sp>
+        <p:nvSpPr>
+          <p:cNvPr id="11" name="TextBox 10"/>
+          <p:cNvSpPr txBox="1"/>
+          <p:nvPr/>
+        </p:nvSpPr>
+        <p:spPr>
+          <a:xfrm>
+            <a:off x="6876288" y="1536192"/>
+            <a:ext cx="4766767" cy="292608"/>
+          </a:xfrm>
+          <a:prstGeom prst="rect">
+            <a:avLst/>
+          </a:prstGeom>
+          <a:noFill/>
+        </p:spPr>
+        <p:txBody>
+          <a:bodyPr wrap="square" lIns="0" rIns="0" tIns="0" bIns="0" anchor="t">
+            <a:noAutofit/>
+          </a:bodyPr>
+          <a:lstStyle/>
+          <a:p>
+            <a:pPr algn="l">
+              <a:lnSpc>
+                <a:spcPct val="110000"/>
+              </a:lnSpc>
+              <a:spcAft>
+                <a:spcPts val="0"/>
+              </a:spcAft>
+            </a:pPr>
+            <a:r>
+              <a:rPr sz="1500" i="0" b="1">
+                <a:solidFill>
+                  <a:srgbClr val="0B2A4A"/>
+                </a:solidFill>
+                <a:latin typeface="Arial"/>
+              </a:rPr>
+              <a:t>Any look-back, one click</a:t>
+            </a:r>
+          </a:p>
+        </p:txBody>
+      </p:sp>
+      <p:sp>
+        <p:nvSpPr>
+          <p:cNvPr id="12" name="TextBox 11"/>
+          <p:cNvSpPr txBox="1"/>
+          <p:nvPr/>
+        </p:nvSpPr>
+        <p:spPr>
+          <a:xfrm>
+            <a:off x="6876288" y="1856231"/>
+            <a:ext cx="4766767" cy="685800"/>
+          </a:xfrm>
+          <a:prstGeom prst="rect">
+            <a:avLst/>
+          </a:prstGeom>
+          <a:noFill/>
+        </p:spPr>
+        <p:txBody>
+          <a:bodyPr wrap="square" lIns="0" rIns="0" tIns="0" bIns="0" anchor="t">
+            <a:noAutofit/>
+          </a:bodyPr>
+          <a:lstStyle/>
+          <a:p>
+            <a:pPr algn="l">
+              <a:lnSpc>
+                <a:spcPct val="105000"/>
+              </a:lnSpc>
+              <a:spcAft>
+                <a:spcPts val="0"/>
+              </a:spcAft>
+            </a:pPr>
+            <a:r>
+              <a:rPr sz="1250" i="0" b="0">
+                <a:solidFill>
+                  <a:srgbClr val="647282"/>
+                </a:solidFill>
+                <a:latin typeface="Arial"/>
+              </a:rPr>
+              <a:t>Every click re-scored at 2, 10 or 30 minutes; the sensitivity test becomes a control</a:t>
+            </a:r>
+          </a:p>
+        </p:txBody>
+      </p:sp>
+      <p:sp>
+        <p:nvSpPr>
+          <p:cNvPr id="13" name="Oval 12"/>
+          <p:cNvSpPr/>
+          <p:nvPr/>
+        </p:nvSpPr>
+        <p:spPr>
+          <a:xfrm>
+            <a:off x="6400800" y="2697480"/>
+            <a:ext cx="329184" cy="329184"/>
+          </a:xfrm>
+          <a:prstGeom prst="ellipse">
+            <a:avLst/>
+          </a:prstGeom>
+          <a:solidFill>
+            <a:srgbClr val="FF9438"/>
+          </a:solidFill>
+          <a:ln>
+            <a:noFill/>
+          </a:ln>
+        </p:spPr>
+        <p:txBody>
+          <a:bodyPr rtlCol="0" anchor="ctr" wrap="square" lIns="0" rIns="0" tIns="18288" bIns="18288">
+            <a:noAutofit/>
+          </a:bodyPr>
+          <a:lstStyle/>
+          <a:p>
+            <a:pPr algn="ctr">
+              <a:lnSpc>
+                <a:spcPct val="110000"/>
+              </a:lnSpc>
+              <a:spcAft>
+                <a:spcPts val="0"/>
+              </a:spcAft>
+            </a:pPr>
+            <a:r>
+              <a:rPr sz="1200" i="0" b="1">
+                <a:solidFill>
+                  <a:srgbClr val="FFFFFF"/>
+                </a:solidFill>
+                <a:latin typeface="Arial"/>
+              </a:rPr>
+              <a:t>2</a:t>
+            </a:r>
+          </a:p>
+        </p:txBody>
+      </p:sp>
+      <p:sp>
+        <p:nvSpPr>
+          <p:cNvPr id="14" name="TextBox 13"/>
+          <p:cNvSpPr txBox="1"/>
+          <p:nvPr/>
+        </p:nvSpPr>
+        <p:spPr>
+          <a:xfrm>
+            <a:off x="6876288" y="2679192"/>
+            <a:ext cx="4766767" cy="292608"/>
+          </a:xfrm>
+          <a:prstGeom prst="rect">
+            <a:avLst/>
+          </a:prstGeom>
+          <a:noFill/>
+        </p:spPr>
+        <p:txBody>
+          <a:bodyPr wrap="square" lIns="0" rIns="0" tIns="0" bIns="0" anchor="t">
+            <a:noAutofit/>
+          </a:bodyPr>
+          <a:lstStyle/>
+          <a:p>
+            <a:pPr algn="l">
+              <a:lnSpc>
+                <a:spcPct val="110000"/>
+              </a:lnSpc>
+              <a:spcAft>
+                <a:spcPts val="0"/>
+              </a:spcAft>
+            </a:pPr>
+            <a:r>
+              <a:rPr sz="1500" i="0" b="1">
+                <a:solidFill>
+                  <a:srgbClr val="0B2A4A"/>
+                </a:solidFill>
+                <a:latin typeface="Arial"/>
+              </a:rPr>
+              <a:t>Ranked by money, with a status</a:t>
+            </a:r>
+          </a:p>
+        </p:txBody>
+      </p:sp>
+      <p:sp>
+        <p:nvSpPr>
+          <p:cNvPr id="15" name="TextBox 14"/>
+          <p:cNvSpPr txBox="1"/>
+          <p:nvPr/>
+        </p:nvSpPr>
+        <p:spPr>
+          <a:xfrm>
+            <a:off x="6876288" y="2999232"/>
+            <a:ext cx="4766767" cy="685800"/>
+          </a:xfrm>
+          <a:prstGeom prst="rect">
+            <a:avLst/>
+          </a:prstGeom>
+          <a:noFill/>
+        </p:spPr>
+        <p:txBody>
+          <a:bodyPr wrap="square" lIns="0" rIns="0" tIns="0" bIns="0" anchor="t">
+            <a:noAutofit/>
+          </a:bodyPr>
+          <a:lstStyle/>
+          <a:p>
+            <a:pPr algn="l">
+              <a:lnSpc>
+                <a:spcPct val="105000"/>
+              </a:lnSpc>
+              <a:spcAft>
+                <a:spcPts val="0"/>
+              </a:spcAft>
+            </a:pPr>
+            <a:r>
+              <a:rPr sz="1250" i="0" b="0">
+                <a:solidFill>
+                  <a:srgbClr val="647282"/>
+                </a:solidFill>
+                <a:latin typeface="Arial"/>
+              </a:rPr>
+              <a:t>Hold, Review or OK per publisher, by commission on flagged orders; AOV and rate are inputs</a:t>
+            </a:r>
+          </a:p>
+        </p:txBody>
+      </p:sp>
+      <p:sp>
+        <p:nvSpPr>
+          <p:cNvPr id="16" name="Oval 15"/>
+          <p:cNvSpPr/>
+          <p:nvPr/>
+        </p:nvSpPr>
+        <p:spPr>
+          <a:xfrm>
+            <a:off x="6400800" y="3840480"/>
+            <a:ext cx="329184" cy="329184"/>
+          </a:xfrm>
+          <a:prstGeom prst="ellipse">
+            <a:avLst/>
+          </a:prstGeom>
+          <a:solidFill>
+            <a:srgbClr val="FF9438"/>
+          </a:solidFill>
+          <a:ln>
+            <a:noFill/>
+          </a:ln>
+        </p:spPr>
+        <p:txBody>
+          <a:bodyPr rtlCol="0" anchor="ctr" wrap="square" lIns="0" rIns="0" tIns="18288" bIns="18288">
+            <a:noAutofit/>
+          </a:bodyPr>
+          <a:lstStyle/>
+          <a:p>
+            <a:pPr algn="ctr">
+              <a:lnSpc>
+                <a:spcPct val="110000"/>
+              </a:lnSpc>
+              <a:spcAft>
+                <a:spcPts val="0"/>
+              </a:spcAft>
+            </a:pPr>
+            <a:r>
+              <a:rPr sz="1200" i="0" b="1">
+                <a:solidFill>
+                  <a:srgbClr val="FFFFFF"/>
+                </a:solidFill>
+                <a:latin typeface="Arial"/>
+              </a:rPr>
+              <a:t>3</a:t>
+            </a:r>
+          </a:p>
+        </p:txBody>
+      </p:sp>
+      <p:sp>
+        <p:nvSpPr>
+          <p:cNvPr id="17" name="TextBox 16"/>
+          <p:cNvSpPr txBox="1"/>
+          <p:nvPr/>
+        </p:nvSpPr>
+        <p:spPr>
+          <a:xfrm>
+            <a:off x="6876288" y="3822192"/>
+            <a:ext cx="4766767" cy="292608"/>
+          </a:xfrm>
+          <a:prstGeom prst="rect">
+            <a:avLst/>
+          </a:prstGeom>
+          <a:noFill/>
+        </p:spPr>
+        <p:txBody>
+          <a:bodyPr wrap="square" lIns="0" rIns="0" tIns="0" bIns="0" anchor="t">
+            <a:noAutofit/>
+          </a:bodyPr>
+          <a:lstStyle/>
+          <a:p>
+            <a:pPr algn="l">
+              <a:lnSpc>
+                <a:spcPct val="110000"/>
+              </a:lnSpc>
+              <a:spcAft>
+                <a:spcPts val="0"/>
+              </a:spcAft>
+            </a:pPr>
+            <a:r>
+              <a:rPr sz="1500" i="0" b="1">
+                <a:solidFill>
+                  <a:srgbClr val="0B2A4A"/>
+                </a:solidFill>
+                <a:latin typeface="Arial"/>
+              </a:rPr>
+              <a:t>Every flag has a journey</a:t>
+            </a:r>
+          </a:p>
+        </p:txBody>
+      </p:sp>
+      <p:sp>
+        <p:nvSpPr>
+          <p:cNvPr id="18" name="TextBox 17"/>
+          <p:cNvSpPr txBox="1"/>
+          <p:nvPr/>
+        </p:nvSpPr>
+        <p:spPr>
+          <a:xfrm>
+            <a:off x="6876288" y="4142232"/>
+            <a:ext cx="4766767" cy="685800"/>
+          </a:xfrm>
+          <a:prstGeom prst="rect">
+            <a:avLst/>
+          </a:prstGeom>
+          <a:noFill/>
+        </p:spPr>
+        <p:txBody>
+          <a:bodyPr wrap="square" lIns="0" rIns="0" tIns="0" bIns="0" anchor="t">
+            <a:noAutofit/>
+          </a:bodyPr>
+          <a:lstStyle/>
+          <a:p>
+            <a:pPr algn="l">
+              <a:lnSpc>
+                <a:spcPct val="105000"/>
+              </a:lnSpc>
+              <a:spcAft>
+                <a:spcPts val="0"/>
+              </a:spcAft>
+            </a:pPr>
+            <a:r>
+              <a:rPr sz="1250" i="0" b="0">
+                <a:solidFill>
+                  <a:srgbClr val="647282"/>
+                </a:solidFill>
+                <a:latin typeface="Arial"/>
+              </a:rPr>
+              <a:t>The sites before and after each click, so a reviewer sees the evidence, not a score</a:t>
+            </a:r>
+          </a:p>
+        </p:txBody>
+      </p:sp>
+      <p:sp>
+        <p:nvSpPr>
+          <p:cNvPr id="19" name="TextBox 18"/>
+          <p:cNvSpPr txBox="1"/>
+          <p:nvPr/>
+        </p:nvSpPr>
+        <p:spPr>
+          <a:xfrm>
+            <a:off x="548640" y="5230368"/>
+            <a:ext cx="11094415" cy="256032"/>
+          </a:xfrm>
+          <a:prstGeom prst="rect">
+            <a:avLst/>
+          </a:prstGeom>
+          <a:noFill/>
+        </p:spPr>
+        <p:txBody>
+          <a:bodyPr wrap="square" lIns="0" rIns="0" tIns="0" bIns="0" anchor="t">
+            <a:noAutofit/>
+          </a:bodyPr>
+          <a:lstStyle/>
+          <a:p>
+            <a:pPr algn="l">
+              <a:lnSpc>
+                <a:spcPct val="110000"/>
+              </a:lnSpc>
+              <a:spcAft>
+                <a:spcPts val="0"/>
+              </a:spcAft>
+            </a:pPr>
+            <a:r>
+              <a:rPr sz="1200" i="0" b="1">
+                <a:solidFill>
+                  <a:srgbClr val="647282"/>
+                </a:solidFill>
+                <a:latin typeface="Arial"/>
+              </a:rPr>
+              <a:t>One of impact:150372's 32 orders: the click "lands" on the order confirmation page</a:t>
+            </a:r>
+          </a:p>
+        </p:txBody>
+      </p:sp>
+      <p:pic>
+        <p:nvPicPr>
+          <p:cNvPr id="20" name="Picture 19" descr="dashboard_journey.png"/>
+          <p:cNvPicPr>
+            <a:picLocks noChangeAspect="1"/>
+          </p:cNvPicPr>
+          <p:nvPr/>
+        </p:nvPicPr>
+        <p:blipFill>
+          <a:blip r:embed="rId4"/>
+          <a:stretch>
+            <a:fillRect/>
+          </a:stretch>
+        </p:blipFill>
+        <p:spPr>
+          <a:xfrm>
+            <a:off x="548640" y="5522976"/>
+            <a:ext cx="9430252" cy="697646"/>
+          </a:xfrm>
+          <a:prstGeom prst="rect">
+            <a:avLst/>
+          </a:prstGeom>
+        </p:spPr>
+      </p:pic>
+    </p:spTree>
+  </p:cSld>
+  <p:clrMapOvr>
+    <a:masterClrMapping/>
+  </p:clrMapOvr>
+</p:sld>
+</file>
+
+<file path=ppt/slides/slide15.xml><?xml version="1.0" encoding="utf-8"?>
+<p:sld xmlns:a="http://schemas.openxmlformats.org/drawingml/2006/main" xmlns:p="http://schemas.openxmlformats.org/presentationml/2006/main" xmlns:r="http://schemas.openxmlformats.org/officeDocument/2006/relationships">
+  <p:cSld>
+    <p:spTree>
+      <p:nvGrpSpPr>
+        <p:cNvPr id="1" name=""/>
+        <p:cNvGrpSpPr/>
+        <p:nvPr/>
+      </p:nvGrpSpPr>
+      <p:grpSpPr/>
+      <p:sp>
+        <p:nvSpPr>
+          <p:cNvPr id="2" name="TextBox 1"/>
+          <p:cNvSpPr txBox="1"/>
+          <p:nvPr/>
+        </p:nvSpPr>
+        <p:spPr>
+          <a:xfrm>
+            <a:off x="548640" y="384048"/>
+            <a:ext cx="9144000" cy="274320"/>
+          </a:xfrm>
+          <a:prstGeom prst="rect">
+            <a:avLst/>
+          </a:prstGeom>
+          <a:noFill/>
+        </p:spPr>
+        <p:txBody>
+          <a:bodyPr wrap="square" lIns="0" rIns="0" tIns="0" bIns="0" anchor="t">
+            <a:noAutofit/>
+          </a:bodyPr>
+          <a:lstStyle/>
+          <a:p>
+            <a:pPr algn="l">
+              <a:lnSpc>
+                <a:spcPct val="110000"/>
+              </a:lnSpc>
+              <a:spcAft>
+                <a:spcPts val="0"/>
+              </a:spcAft>
+            </a:pPr>
+            <a:r>
+              <a:rPr sz="1100" i="0" b="1" spc="150">
+                <a:solidFill>
+                  <a:srgbClr val="C9620E"/>
+                </a:solidFill>
+                <a:latin typeface="Arial"/>
+              </a:rPr>
+              <a:t>BACKUP</a:t>
+            </a:r>
+          </a:p>
+        </p:txBody>
+      </p:sp>
+      <p:sp>
+        <p:nvSpPr>
+          <p:cNvPr id="3" name="TextBox 2"/>
+          <p:cNvSpPr txBox="1"/>
+          <p:nvPr/>
+        </p:nvSpPr>
+        <p:spPr>
+          <a:xfrm>
+            <a:off x="548640" y="658368"/>
+            <a:ext cx="11094415" cy="685800"/>
+          </a:xfrm>
+          <a:prstGeom prst="rect">
+            <a:avLst/>
+          </a:prstGeom>
+          <a:noFill/>
+        </p:spPr>
+        <p:txBody>
+          <a:bodyPr wrap="square" lIns="0" rIns="0" tIns="0" bIns="0" anchor="t">
+            <a:noAutofit/>
+          </a:bodyPr>
+          <a:lstStyle/>
+          <a:p>
+            <a:pPr algn="l">
+              <a:lnSpc>
+                <a:spcPct val="100000"/>
+              </a:lnSpc>
+              <a:spcAft>
+                <a:spcPts val="0"/>
+              </a:spcAft>
+            </a:pPr>
+            <a:r>
+              <a:rPr sz="3200" i="0" b="0">
+                <a:solidFill>
+                  <a:srgbClr val="0B2A4A"/>
+                </a:solidFill>
+                <a:latin typeface="Georgia"/>
+              </a:rPr>
+              <a:t>Results by brand</a:t>
+            </a:r>
+          </a:p>
+        </p:txBody>
+      </p:sp>
+      <p:sp>
+        <p:nvSpPr>
+          <p:cNvPr id="4" name="TextBox 3"/>
+          <p:cNvSpPr txBox="1"/>
+          <p:nvPr/>
+        </p:nvSpPr>
+        <p:spPr>
+          <a:xfrm>
+            <a:off x="548640" y="6419088"/>
+            <a:ext cx="8229600" cy="228600"/>
+          </a:xfrm>
+          <a:prstGeom prst="rect">
+            <a:avLst/>
+          </a:prstGeom>
+          <a:noFill/>
+        </p:spPr>
+        <p:txBody>
+          <a:bodyPr wrap="square" lIns="0" rIns="0" tIns="0" bIns="0" anchor="t">
+            <a:noAutofit/>
+          </a:bodyPr>
+          <a:lstStyle/>
+          <a:p>
+            <a:pPr algn="l">
+              <a:lnSpc>
+                <a:spcPct val="110000"/>
+              </a:lnSpc>
+              <a:spcAft>
+                <a:spcPts val="0"/>
+              </a:spcAft>
+            </a:pPr>
+            <a:r>
+              <a:rPr sz="900" i="0" b="0">
+                <a:solidFill>
+                  <a:srgbClr val="647282"/>
+                </a:solidFill>
+                <a:latin typeface="Arial"/>
+              </a:rPr>
+              <a:t>Saatva affiliate analysis  ·  Hagay Gross</a:t>
+            </a:r>
+          </a:p>
+        </p:txBody>
+      </p:sp>
+      <p:sp>
+        <p:nvSpPr>
+          <p:cNvPr id="5" name="Oval 4"/>
+          <p:cNvSpPr/>
+          <p:nvPr/>
+        </p:nvSpPr>
+        <p:spPr>
+          <a:xfrm>
+            <a:off x="11185855" y="6460236"/>
+            <a:ext cx="128016" cy="128016"/>
+          </a:xfrm>
+          <a:prstGeom prst="ellipse">
+            <a:avLst/>
+          </a:prstGeom>
+          <a:solidFill>
+            <a:srgbClr val="FF9438"/>
+          </a:solidFill>
+          <a:ln>
+            <a:noFill/>
+          </a:ln>
+        </p:spPr>
+        <p:txBody>
+          <a:bodyPr rtlCol="0" anchor="ctr"/>
+          <a:lstStyle/>
+          <a:p>
+            <a:pPr algn="ctr"/>
+          </a:p>
+        </p:txBody>
+      </p:sp>
+      <p:sp>
+        <p:nvSpPr>
+          <p:cNvPr id="6" name="Oval 5"/>
+          <p:cNvSpPr/>
+          <p:nvPr/>
+        </p:nvSpPr>
+        <p:spPr>
+          <a:xfrm>
+            <a:off x="11268151" y="6460236"/>
+            <a:ext cx="128016" cy="128016"/>
+          </a:xfrm>
+          <a:prstGeom prst="ellipse">
+            <a:avLst/>
+          </a:prstGeom>
+          <a:solidFill>
+            <a:srgbClr val="368EF8"/>
+          </a:solidFill>
+          <a:ln>
+            <a:noFill/>
+          </a:ln>
+        </p:spPr>
+        <p:txBody>
+          <a:bodyPr rtlCol="0" anchor="ctr"/>
+          <a:lstStyle/>
+          <a:p>
+            <a:pPr algn="ctr"/>
+          </a:p>
+        </p:txBody>
+      </p:sp>
+      <p:sp>
+        <p:nvSpPr>
+          <p:cNvPr id="7" name="TextBox 6"/>
+          <p:cNvSpPr txBox="1"/>
+          <p:nvPr/>
+        </p:nvSpPr>
+        <p:spPr>
+          <a:xfrm>
+            <a:off x="11350447" y="6419088"/>
+            <a:ext cx="292608" cy="228600"/>
+          </a:xfrm>
+          <a:prstGeom prst="rect">
+            <a:avLst/>
+          </a:prstGeom>
+          <a:noFill/>
+        </p:spPr>
+        <p:txBody>
+          <a:bodyPr wrap="square" lIns="0" rIns="0" tIns="0" bIns="0" anchor="t">
+            <a:noAutofit/>
+          </a:bodyPr>
+          <a:lstStyle/>
+          <a:p>
+            <a:pPr algn="r">
+              <a:lnSpc>
+                <a:spcPct val="110000"/>
+              </a:lnSpc>
+              <a:spcAft>
+                <a:spcPts val="0"/>
+              </a:spcAft>
+            </a:pPr>
+            <a:r>
+              <a:rPr sz="900" i="0" b="0">
+                <a:solidFill>
+                  <a:srgbClr val="647282"/>
+                </a:solidFill>
+                <a:latin typeface="Arial"/>
+              </a:rPr>
+              <a:t>15</a:t>
             </a:r>
           </a:p>
         </p:txBody>
@@ -12586,7 +14528,7 @@
 </p:sld>
 </file>
 
-<file path=ppt/slides/slide15.xml><?xml version="1.0" encoding="utf-8"?>
+<file path=ppt/slides/slide16.xml><?xml version="1.0" encoding="utf-8"?>
 <p:sld xmlns:a="http://schemas.openxmlformats.org/drawingml/2006/main" xmlns:p="http://schemas.openxmlformats.org/presentationml/2006/main" xmlns:r="http://schemas.openxmlformats.org/officeDocument/2006/relationships">
   <p:cSld>
     <p:spTree>
@@ -12817,7 +14759,7 @@
                 </a:solidFill>
                 <a:latin typeface="Arial"/>
               </a:rPr>
-              <a:t>15</a:t>
+              <a:t>16</a:t>
             </a:r>
           </a:p>
         </p:txBody>
@@ -13923,7 +15865,7 @@
 </p:sld>
 </file>
 
-<file path=ppt/slides/slide16.xml><?xml version="1.0" encoding="utf-8"?>
+<file path=ppt/slides/slide17.xml><?xml version="1.0" encoding="utf-8"?>
 <p:sld xmlns:a="http://schemas.openxmlformats.org/drawingml/2006/main" xmlns:p="http://schemas.openxmlformats.org/presentationml/2006/main" xmlns:r="http://schemas.openxmlformats.org/officeDocument/2006/relationships">
   <p:cSld>
     <p:spTree>
@@ -14154,7 +16096,7 @@
                 </a:solidFill>
                 <a:latin typeface="Arial"/>
               </a:rPr>
-              <a:t>16</a:t>
+              <a:t>17</a:t>
             </a:r>
           </a:p>
         </p:txBody>
@@ -17703,7 +19645,7 @@
                 </a:solidFill>
                 <a:latin typeface="Arial"/>
               </a:rPr>
-              <a:t>52–79%</a:t>
+              <a:t>51–79%</a:t>
             </a:r>
           </a:p>
         </p:txBody>
@@ -17787,7 +19729,7 @@
                 </a:solidFill>
                 <a:latin typeface="Arial"/>
               </a:rPr>
-              <a:t>Only 13–24% of clicks carry the signals</a:t>
+              <a:t>26–41% of shoppers' clicks carry the signals</a:t>
             </a:r>
           </a:p>
         </p:txBody>
@@ -21315,7 +23257,7 @@
                 </a:solidFill>
                 <a:latin typeface="Arial"/>
               </a:rPr>
-              <a:t>The intervals overlap: one day can't rank the mattress brands by volume.  Walmart, for scale: ~7.0M clicks a day, 1.72% convert (~121K).</a:t>
+              <a:t>The intervals overlap: one day can't rank the mattress brands by volume.  Walmart, for scale: ~7.0M recorded clicks a day (~2.0M without click flooding), 1.72% convert (~121K).</a:t>
             </a:r>
           </a:p>
         </p:txBody>
@@ -26597,7 +28539,7 @@
                 </a:solidFill>
                 <a:latin typeface="Georgia"/>
               </a:rPr>
-              <a:t>13–24% of clicks take 52–79% of affiliate orders</a:t>
+              <a:t>26–41% of shoppers' clicks take 51–79% of affiliate orders</a:t>
             </a:r>
           </a:p>
         </p:txBody>
@@ -26781,7 +28723,7 @@
                 </a:solidFill>
                 <a:latin typeface="Arial"/>
               </a:rPr>
-              <a:t>Share of Walmart affiliate clicks flagged, and the orders they take</a:t>
+              <a:t>Share of Walmart shoppers' affiliate clicks flagged, and the orders they take</a:t>
             </a:r>
           </a:p>
         </p:txBody>
@@ -26978,8 +28920,8 @@
         </p:nvSpPr>
         <p:spPr>
           <a:xfrm rot="5400000">
-            <a:off x="2758196" y="2042403"/>
-            <a:ext cx="274320" cy="1035832"/>
+            <a:off x="3142244" y="1658355"/>
+            <a:ext cx="274320" cy="1803928"/>
           </a:xfrm>
           <a:prstGeom prst="round2SameRect">
             <a:avLst>
@@ -27010,7 +28952,7 @@
         </p:nvSpPr>
         <p:spPr>
           <a:xfrm>
-            <a:off x="3504712" y="2432303"/>
+            <a:off x="4272808" y="2432303"/>
             <a:ext cx="822960" cy="256032"/>
           </a:xfrm>
           <a:prstGeom prst="rect">
@@ -27039,7 +28981,7 @@
                 </a:solidFill>
                 <a:latin typeface="Arial"/>
               </a:rPr>
-              <a:t>24%</a:t>
+              <a:t>41%</a:t>
             </a:r>
           </a:p>
         </p:txBody>
@@ -27052,8 +28994,8 @@
         </p:nvSpPr>
         <p:spPr>
           <a:xfrm rot="5400000">
-            <a:off x="3980566" y="1149217"/>
-            <a:ext cx="274320" cy="3480572"/>
+            <a:off x="3963009" y="1166774"/>
+            <a:ext cx="274320" cy="3445459"/>
           </a:xfrm>
           <a:prstGeom prst="round2SameRect">
             <a:avLst>
@@ -27084,7 +29026,7 @@
         </p:nvSpPr>
         <p:spPr>
           <a:xfrm>
-            <a:off x="5949452" y="2761487"/>
+            <a:off x="5914339" y="2761487"/>
             <a:ext cx="822960" cy="256032"/>
           </a:xfrm>
           <a:prstGeom prst="rect">
@@ -27168,8 +29110,8 @@
         </p:nvSpPr>
         <p:spPr>
           <a:xfrm rot="5400000">
-            <a:off x="2652857" y="3171870"/>
-            <a:ext cx="274320" cy="825154"/>
+            <a:off x="3012765" y="2811962"/>
+            <a:ext cx="274320" cy="1544970"/>
           </a:xfrm>
           <a:prstGeom prst="round2SameRect">
             <a:avLst>
@@ -27200,7 +29142,7 @@
         </p:nvSpPr>
         <p:spPr>
           <a:xfrm>
-            <a:off x="3294034" y="3456432"/>
+            <a:off x="4013850" y="3456432"/>
             <a:ext cx="822960" cy="256032"/>
           </a:xfrm>
           <a:prstGeom prst="rect">
@@ -27229,7 +29171,7 @@
                 </a:solidFill>
                 <a:latin typeface="Arial"/>
               </a:rPr>
-              <a:t>19%</a:t>
+              <a:t>35%</a:t>
             </a:r>
           </a:p>
         </p:txBody>
@@ -27242,8 +29184,8 @@
         </p:nvSpPr>
         <p:spPr>
           <a:xfrm rot="5400000">
-            <a:off x="3822557" y="2331354"/>
-            <a:ext cx="274320" cy="3164555"/>
+            <a:off x="3798417" y="2355494"/>
+            <a:ext cx="274320" cy="3116275"/>
           </a:xfrm>
           <a:prstGeom prst="round2SameRect">
             <a:avLst>
@@ -27274,7 +29216,7 @@
         </p:nvSpPr>
         <p:spPr>
           <a:xfrm>
-            <a:off x="5633435" y="3785615"/>
+            <a:off x="5585155" y="3785615"/>
             <a:ext cx="822960" cy="256032"/>
           </a:xfrm>
           <a:prstGeom prst="rect">
@@ -27303,7 +29245,7 @@
                 </a:solidFill>
                 <a:latin typeface="Arial"/>
               </a:rPr>
-              <a:t>72%</a:t>
+              <a:t>71%</a:t>
             </a:r>
           </a:p>
         </p:txBody>
@@ -27358,8 +29300,8 @@
         </p:nvSpPr>
         <p:spPr>
           <a:xfrm rot="5400000">
-            <a:off x="2532156" y="4316699"/>
-            <a:ext cx="274320" cy="583752"/>
+            <a:off x="2819643" y="4029212"/>
+            <a:ext cx="274320" cy="1158727"/>
           </a:xfrm>
           <a:prstGeom prst="round2SameRect">
             <a:avLst>
@@ -27390,7 +29332,7 @@
         </p:nvSpPr>
         <p:spPr>
           <a:xfrm>
-            <a:off x="3052632" y="4480560"/>
+            <a:off x="3627607" y="4480560"/>
             <a:ext cx="822960" cy="256032"/>
           </a:xfrm>
           <a:prstGeom prst="rect">
@@ -27419,7 +29361,7 @@
                 </a:solidFill>
                 <a:latin typeface="Arial"/>
               </a:rPr>
-              <a:t>13%</a:t>
+              <a:t>26%</a:t>
             </a:r>
           </a:p>
         </p:txBody>
@@ -27432,8 +29374,8 @@
         </p:nvSpPr>
         <p:spPr>
           <a:xfrm rot="5400000">
-            <a:off x="3388034" y="3790005"/>
-            <a:ext cx="274320" cy="2295509"/>
+            <a:off x="3348532" y="3829507"/>
+            <a:ext cx="274320" cy="2216505"/>
           </a:xfrm>
           <a:prstGeom prst="round2SameRect">
             <a:avLst>
@@ -27464,7 +29406,7 @@
         </p:nvSpPr>
         <p:spPr>
           <a:xfrm>
-            <a:off x="4764389" y="4809744"/>
+            <a:off x="4685385" y="4809744"/>
             <a:ext cx="822960" cy="256032"/>
           </a:xfrm>
           <a:prstGeom prst="rect">
@@ -27493,7 +29435,7 @@
                 </a:solidFill>
                 <a:latin typeface="Arial"/>
               </a:rPr>
-              <a:t>52%</a:t>
+              <a:t>51%</a:t>
             </a:r>
           </a:p>
         </p:txBody>
@@ -28037,7 +29979,7 @@
                 </a:solidFill>
                 <a:latin typeface="Arial"/>
               </a:rPr>
-              <a:t>Flagged: a click without a landing, fired at the cart or while already on the site, or from a publisher-bought search ad.</a:t>
+              <a:t>Flagged: a click without a landing, fired at the cart or while already on the site, or from a publisher-bought search ad. Click flooding excluded; over all clicks, 13–24% are flagged.</a:t>
             </a:r>
           </a:p>
         </p:txBody>
@@ -28097,7 +30039,7 @@
                 </a:solidFill>
                 <a:latin typeface="Arial"/>
               </a:rPr>
-              <a:t>ATTRIBUTION HIJACKING · THE FUNNEL VIEW</a:t>
+              <a:t>CLICK FLOODING · WALMART</a:t>
             </a:r>
           </a:p>
         </p:txBody>
@@ -28139,7 +30081,7 @@
                 </a:solidFill>
                 <a:latin typeface="Georgia"/>
               </a:rPr>
-              <a:t>3% of clicks land after the cart and take 42% of orders</a:t>
+              <a:t>58 people make 71% of the clicks and 4% of the orders</a:t>
             </a:r>
           </a:p>
         </p:txBody>
@@ -28323,7 +30265,7 @@
                 </a:solidFill>
                 <a:latin typeface="Arial"/>
               </a:rPr>
-              <a:t>Walmart affiliate clicks, by the stage the shopper had reached</a:t>
+              <a:t>Walmart affiliate clicks, by the person's clicks that day</a:t>
             </a:r>
           </a:p>
         </p:txBody>
@@ -28478,7 +30420,7 @@
         </p:nvSpPr>
         <p:spPr>
           <a:xfrm>
-            <a:off x="548640" y="2468880"/>
+            <a:off x="548640" y="2395728"/>
             <a:ext cx="1920240" cy="274320"/>
           </a:xfrm>
           <a:prstGeom prst="rect">
@@ -28507,21 +30449,63 @@
                 </a:solidFill>
                 <a:latin typeface="Arial"/>
               </a:rPr>
-              <a:t>Click starts the visit</a:t>
-            </a:r>
-          </a:p>
-        </p:txBody>
-      </p:sp>
-      <p:sp>
-        <p:nvSpPr>
-          <p:cNvPr id="14" name="Round Same Side Corner Rectangle 13"/>
+              <a:t>1–3 a day</a:t>
+            </a:r>
+          </a:p>
+        </p:txBody>
+      </p:sp>
+      <p:sp>
+        <p:nvSpPr>
+          <p:cNvPr id="14" name="TextBox 13"/>
+          <p:cNvSpPr txBox="1"/>
+          <p:nvPr/>
+        </p:nvSpPr>
+        <p:spPr>
+          <a:xfrm>
+            <a:off x="548640" y="2651760"/>
+            <a:ext cx="1920240" cy="228600"/>
+          </a:xfrm>
+          <a:prstGeom prst="rect">
+            <a:avLst/>
+          </a:prstGeom>
+          <a:noFill/>
+        </p:spPr>
+        <p:txBody>
+          <a:bodyPr wrap="square" lIns="0" rIns="0" tIns="0" bIns="0" anchor="t">
+            <a:noAutofit/>
+          </a:bodyPr>
+          <a:lstStyle/>
+          <a:p>
+            <a:pPr algn="l">
+              <a:lnSpc>
+                <a:spcPct val="110000"/>
+              </a:lnSpc>
+              <a:spcAft>
+                <a:spcPts val="0"/>
+              </a:spcAft>
+            </a:pPr>
+            <a:r>
+              <a:rPr sz="1100" i="0" b="0">
+                <a:solidFill>
+                  <a:srgbClr val="647282"/>
+                </a:solidFill>
+                <a:latin typeface="Arial"/>
+              </a:rPr>
+              <a:t>835 people</a:t>
+            </a:r>
+          </a:p>
+        </p:txBody>
+      </p:sp>
+      <p:sp>
+        <p:nvSpPr>
+          <p:cNvPr id="15" name="Round Same Side Corner Rectangle 14"/>
           <p:cNvSpPr/>
           <p:nvPr/>
         </p:nvSpPr>
         <p:spPr>
           <a:xfrm rot="5400000">
-            <a:off x="4259458" y="632581"/>
-            <a:ext cx="228600" cy="3718316"/>
+            <a:off x="2949166" y="1942873"/>
+            <a:ext cx="228600" cy="1097733"/>
           </a:xfrm>
           <a:prstGeom prst="round2SameRect">
             <a:avLst>
@@ -28546,13 +30530,13 @@
       </p:sp>
       <p:sp>
         <p:nvSpPr>
-          <p:cNvPr id="15" name="TextBox 14"/>
-          <p:cNvSpPr txBox="1"/>
-          <p:nvPr/>
-        </p:nvSpPr>
-        <p:spPr>
-          <a:xfrm>
-            <a:off x="6324356" y="2359152"/>
+          <p:cNvPr id="16" name="TextBox 15"/>
+          <p:cNvSpPr txBox="1"/>
+          <p:nvPr/>
+        </p:nvSpPr>
+        <p:spPr>
+          <a:xfrm>
+            <a:off x="3703773" y="2359152"/>
             <a:ext cx="822960" cy="256032"/>
           </a:xfrm>
           <a:prstGeom prst="rect">
@@ -28581,21 +30565,21 @@
                 </a:solidFill>
                 <a:latin typeface="Arial"/>
               </a:rPr>
-              <a:t>78%</a:t>
-            </a:r>
-          </a:p>
-        </p:txBody>
-      </p:sp>
-      <p:sp>
-        <p:nvSpPr>
-          <p:cNvPr id="16" name="Round Same Side Corner Rectangle 15"/>
+              <a:t>17%</a:t>
+            </a:r>
+          </a:p>
+        </p:txBody>
+      </p:sp>
+      <p:sp>
+        <p:nvSpPr>
+          <p:cNvPr id="17" name="Round Same Side Corner Rectangle 16"/>
           <p:cNvSpPr/>
           <p:nvPr/>
         </p:nvSpPr>
         <p:spPr>
           <a:xfrm rot="5400000">
-            <a:off x="3127796" y="2029419"/>
-            <a:ext cx="228600" cy="1454993"/>
+            <a:off x="4476235" y="680980"/>
+            <a:ext cx="228600" cy="4151870"/>
           </a:xfrm>
           <a:prstGeom prst="round2SameRect">
             <a:avLst>
@@ -28620,13 +30604,13 @@
       </p:sp>
       <p:sp>
         <p:nvSpPr>
-          <p:cNvPr id="17" name="TextBox 16"/>
-          <p:cNvSpPr txBox="1"/>
-          <p:nvPr/>
-        </p:nvSpPr>
-        <p:spPr>
-          <a:xfrm>
-            <a:off x="4061033" y="2624328"/>
+          <p:cNvPr id="18" name="TextBox 17"/>
+          <p:cNvSpPr txBox="1"/>
+          <p:nvPr/>
+        </p:nvSpPr>
+        <p:spPr>
+          <a:xfrm>
+            <a:off x="6757910" y="2624328"/>
             <a:ext cx="822960" cy="256032"/>
           </a:xfrm>
           <a:prstGeom prst="rect">
@@ -28655,20 +30639,20 @@
                 </a:solidFill>
                 <a:latin typeface="Arial"/>
               </a:rPr>
-              <a:t>31%</a:t>
-            </a:r>
-          </a:p>
-        </p:txBody>
-      </p:sp>
-      <p:sp>
-        <p:nvSpPr>
-          <p:cNvPr id="18" name="TextBox 17"/>
-          <p:cNvSpPr txBox="1"/>
-          <p:nvPr/>
-        </p:nvSpPr>
-        <p:spPr>
-          <a:xfrm>
-            <a:off x="548640" y="3182112"/>
+              <a:t>65%</a:t>
+            </a:r>
+          </a:p>
+        </p:txBody>
+      </p:sp>
+      <p:sp>
+        <p:nvSpPr>
+          <p:cNvPr id="19" name="TextBox 18"/>
+          <p:cNvSpPr txBox="1"/>
+          <p:nvPr/>
+        </p:nvSpPr>
+        <p:spPr>
+          <a:xfrm>
+            <a:off x="548640" y="3108960"/>
             <a:ext cx="1920240" cy="274320"/>
           </a:xfrm>
           <a:prstGeom prst="rect">
@@ -28697,24 +30681,69 @@
                 </a:solidFill>
                 <a:latin typeface="Arial"/>
               </a:rPr>
-              <a:t>Already browsing</a:t>
-            </a:r>
-          </a:p>
-        </p:txBody>
-      </p:sp>
-      <p:sp>
-        <p:nvSpPr>
-          <p:cNvPr id="19" name="Rectangle 18"/>
+              <a:t>4–9</a:t>
+            </a:r>
+          </a:p>
+        </p:txBody>
+      </p:sp>
+      <p:sp>
+        <p:nvSpPr>
+          <p:cNvPr id="20" name="TextBox 19"/>
+          <p:cNvSpPr txBox="1"/>
+          <p:nvPr/>
+        </p:nvSpPr>
+        <p:spPr>
+          <a:xfrm>
+            <a:off x="548640" y="3364991"/>
+            <a:ext cx="1920240" cy="228600"/>
+          </a:xfrm>
+          <a:prstGeom prst="rect">
+            <a:avLst/>
+          </a:prstGeom>
+          <a:noFill/>
+        </p:spPr>
+        <p:txBody>
+          <a:bodyPr wrap="square" lIns="0" rIns="0" tIns="0" bIns="0" anchor="t">
+            <a:noAutofit/>
+          </a:bodyPr>
+          <a:lstStyle/>
+          <a:p>
+            <a:pPr algn="l">
+              <a:lnSpc>
+                <a:spcPct val="110000"/>
+              </a:lnSpc>
+              <a:spcAft>
+                <a:spcPts val="0"/>
+              </a:spcAft>
+            </a:pPr>
+            <a:r>
+              <a:rPr sz="1100" i="0" b="0">
+                <a:solidFill>
+                  <a:srgbClr val="647282"/>
+                </a:solidFill>
+                <a:latin typeface="Arial"/>
+              </a:rPr>
+              <a:t>90 people</a:t>
+            </a:r>
+          </a:p>
+        </p:txBody>
+      </p:sp>
+      <p:sp>
+        <p:nvSpPr>
+          <p:cNvPr id="21" name="Round Same Side Corner Rectangle 20"/>
           <p:cNvSpPr/>
           <p:nvPr/>
         </p:nvSpPr>
         <p:spPr>
-          <a:xfrm>
-            <a:off x="2514600" y="3090672"/>
-            <a:ext cx="194950" cy="228600"/>
-          </a:xfrm>
-          <a:prstGeom prst="rect">
-            <a:avLst/>
+          <a:xfrm rot="5400000">
+            <a:off x="2642476" y="2962795"/>
+            <a:ext cx="228600" cy="484352"/>
+          </a:xfrm>
+          <a:prstGeom prst="round2SameRect">
+            <a:avLst>
+              <a:gd name="adj1" fmla="val 14000"/>
+              <a:gd name="adj2" fmla="val 0"/>
+            </a:avLst>
           </a:prstGeom>
           <a:solidFill>
             <a:srgbClr val="B7C1CC"/>
@@ -28733,13 +30762,13 @@
       </p:sp>
       <p:sp>
         <p:nvSpPr>
-          <p:cNvPr id="20" name="TextBox 19"/>
-          <p:cNvSpPr txBox="1"/>
-          <p:nvPr/>
-        </p:nvSpPr>
-        <p:spPr>
-          <a:xfrm>
-            <a:off x="2800990" y="3072384"/>
+          <p:cNvPr id="22" name="TextBox 21"/>
+          <p:cNvSpPr txBox="1"/>
+          <p:nvPr/>
+        </p:nvSpPr>
+        <p:spPr>
+          <a:xfrm>
+            <a:off x="3090392" y="3072384"/>
             <a:ext cx="822960" cy="256032"/>
           </a:xfrm>
           <a:prstGeom prst="rect">
@@ -28768,21 +30797,21 @@
                 </a:solidFill>
                 <a:latin typeface="Arial"/>
               </a:rPr>
-              <a:t>4%</a:t>
-            </a:r>
-          </a:p>
-        </p:txBody>
-      </p:sp>
-      <p:sp>
-        <p:nvSpPr>
-          <p:cNvPr id="21" name="Round Same Side Corner Rectangle 20"/>
+              <a:t>8%</a:t>
+            </a:r>
+          </a:p>
+        </p:txBody>
+      </p:sp>
+      <p:sp>
+        <p:nvSpPr>
+          <p:cNvPr id="23" name="Round Same Side Corner Rectangle 22"/>
           <p:cNvSpPr/>
           <p:nvPr/>
         </p:nvSpPr>
         <p:spPr>
           <a:xfrm rot="5400000">
-            <a:off x="2721254" y="3149193"/>
-            <a:ext cx="228600" cy="641908"/>
+            <a:off x="3265272" y="2605175"/>
+            <a:ext cx="228600" cy="1729945"/>
           </a:xfrm>
           <a:prstGeom prst="round2SameRect">
             <a:avLst>
@@ -28807,13 +30836,13 @@
       </p:sp>
       <p:sp>
         <p:nvSpPr>
-          <p:cNvPr id="22" name="TextBox 21"/>
-          <p:cNvSpPr txBox="1"/>
-          <p:nvPr/>
-        </p:nvSpPr>
-        <p:spPr>
-          <a:xfrm>
-            <a:off x="3247948" y="3337560"/>
+          <p:cNvPr id="24" name="TextBox 23"/>
+          <p:cNvSpPr txBox="1"/>
+          <p:nvPr/>
+        </p:nvSpPr>
+        <p:spPr>
+          <a:xfrm>
+            <a:off x="4335985" y="3337560"/>
             <a:ext cx="822960" cy="256032"/>
           </a:xfrm>
           <a:prstGeom prst="rect">
@@ -28842,20 +30871,20 @@
                 </a:solidFill>
                 <a:latin typeface="Arial"/>
               </a:rPr>
-              <a:t>14%</a:t>
-            </a:r>
-          </a:p>
-        </p:txBody>
-      </p:sp>
-      <p:sp>
-        <p:nvSpPr>
-          <p:cNvPr id="23" name="TextBox 22"/>
-          <p:cNvSpPr txBox="1"/>
-          <p:nvPr/>
-        </p:nvSpPr>
-        <p:spPr>
-          <a:xfrm>
-            <a:off x="548640" y="3895344"/>
+              <a:t>27%</a:t>
+            </a:r>
+          </a:p>
+        </p:txBody>
+      </p:sp>
+      <p:sp>
+        <p:nvSpPr>
+          <p:cNvPr id="25" name="TextBox 24"/>
+          <p:cNvSpPr txBox="1"/>
+          <p:nvPr/>
+        </p:nvSpPr>
+        <p:spPr>
+          <a:xfrm>
+            <a:off x="548640" y="3822191"/>
             <a:ext cx="1920240" cy="274320"/>
           </a:xfrm>
           <a:prstGeom prst="rect">
@@ -28884,21 +30913,63 @@
                 </a:solidFill>
                 <a:latin typeface="Arial"/>
               </a:rPr>
-              <a:t>On a product page</a:t>
-            </a:r>
-          </a:p>
-        </p:txBody>
-      </p:sp>
-      <p:sp>
-        <p:nvSpPr>
-          <p:cNvPr id="24" name="Round Same Side Corner Rectangle 23"/>
+              <a:t>10–19</a:t>
+            </a:r>
+          </a:p>
+        </p:txBody>
+      </p:sp>
+      <p:sp>
+        <p:nvSpPr>
+          <p:cNvPr id="26" name="TextBox 25"/>
+          <p:cNvSpPr txBox="1"/>
+          <p:nvPr/>
+        </p:nvSpPr>
+        <p:spPr>
+          <a:xfrm>
+            <a:off x="548640" y="4078224"/>
+            <a:ext cx="1920240" cy="228600"/>
+          </a:xfrm>
+          <a:prstGeom prst="rect">
+            <a:avLst/>
+          </a:prstGeom>
+          <a:noFill/>
+        </p:spPr>
+        <p:txBody>
+          <a:bodyPr wrap="square" lIns="0" rIns="0" tIns="0" bIns="0" anchor="t">
+            <a:noAutofit/>
+          </a:bodyPr>
+          <a:lstStyle/>
+          <a:p>
+            <a:pPr algn="l">
+              <a:lnSpc>
+                <a:spcPct val="110000"/>
+              </a:lnSpc>
+              <a:spcAft>
+                <a:spcPts val="0"/>
+              </a:spcAft>
+            </a:pPr>
+            <a:r>
+              <a:rPr sz="1100" i="0" b="0">
+                <a:solidFill>
+                  <a:srgbClr val="647282"/>
+                </a:solidFill>
+                <a:latin typeface="Arial"/>
+              </a:rPr>
+              <a:t>20 people</a:t>
+            </a:r>
+          </a:p>
+        </p:txBody>
+      </p:sp>
+      <p:sp>
+        <p:nvSpPr>
+          <p:cNvPr id="27" name="Round Same Side Corner Rectangle 26"/>
           <p:cNvSpPr/>
           <p:nvPr/>
         </p:nvSpPr>
         <p:spPr>
           <a:xfrm rot="5400000">
-            <a:off x="2747406" y="3571097"/>
-            <a:ext cx="228600" cy="694212"/>
+            <a:off x="2529824" y="3788679"/>
+            <a:ext cx="228600" cy="259049"/>
           </a:xfrm>
           <a:prstGeom prst="round2SameRect">
             <a:avLst>
@@ -28923,13 +30994,13 @@
       </p:sp>
       <p:sp>
         <p:nvSpPr>
-          <p:cNvPr id="25" name="TextBox 24"/>
-          <p:cNvSpPr txBox="1"/>
-          <p:nvPr/>
-        </p:nvSpPr>
-        <p:spPr>
-          <a:xfrm>
-            <a:off x="3300252" y="3785616"/>
+          <p:cNvPr id="28" name="TextBox 27"/>
+          <p:cNvSpPr txBox="1"/>
+          <p:nvPr/>
+        </p:nvSpPr>
+        <p:spPr>
+          <a:xfrm>
+            <a:off x="2865089" y="3785616"/>
             <a:ext cx="822960" cy="256032"/>
           </a:xfrm>
           <a:prstGeom prst="rect">
@@ -28958,21 +31029,21 @@
                 </a:solidFill>
                 <a:latin typeface="Arial"/>
               </a:rPr>
-              <a:t>15%</a:t>
-            </a:r>
-          </a:p>
-        </p:txBody>
-      </p:sp>
-      <p:sp>
-        <p:nvSpPr>
-          <p:cNvPr id="26" name="Round Same Side Corner Rectangle 25"/>
+              <a:t>4%</a:t>
+            </a:r>
+          </a:p>
+        </p:txBody>
+      </p:sp>
+      <p:sp>
+        <p:nvSpPr>
+          <p:cNvPr id="29" name="Round Same Side Corner Rectangle 28"/>
           <p:cNvSpPr/>
           <p:nvPr/>
         </p:nvSpPr>
         <p:spPr>
           <a:xfrm rot="5400000">
-            <a:off x="2721254" y="3862425"/>
-            <a:ext cx="228600" cy="641908"/>
+            <a:off x="2544462" y="4039217"/>
+            <a:ext cx="228600" cy="288324"/>
           </a:xfrm>
           <a:prstGeom prst="round2SameRect">
             <a:avLst>
@@ -28997,13 +31068,13 @@
       </p:sp>
       <p:sp>
         <p:nvSpPr>
-          <p:cNvPr id="27" name="TextBox 26"/>
-          <p:cNvSpPr txBox="1"/>
-          <p:nvPr/>
-        </p:nvSpPr>
-        <p:spPr>
-          <a:xfrm>
-            <a:off x="3247948" y="4050792"/>
+          <p:cNvPr id="30" name="TextBox 29"/>
+          <p:cNvSpPr txBox="1"/>
+          <p:nvPr/>
+        </p:nvSpPr>
+        <p:spPr>
+          <a:xfrm>
+            <a:off x="2894364" y="4050792"/>
             <a:ext cx="822960" cy="256032"/>
           </a:xfrm>
           <a:prstGeom prst="rect">
@@ -29032,20 +31103,20 @@
                 </a:solidFill>
                 <a:latin typeface="Arial"/>
               </a:rPr>
-              <a:t>14%</a:t>
-            </a:r>
-          </a:p>
-        </p:txBody>
-      </p:sp>
-      <p:sp>
-        <p:nvSpPr>
-          <p:cNvPr id="28" name="TextBox 27"/>
-          <p:cNvSpPr txBox="1"/>
-          <p:nvPr/>
-        </p:nvSpPr>
-        <p:spPr>
-          <a:xfrm>
-            <a:off x="548640" y="4608575"/>
+              <a:t>5%</a:t>
+            </a:r>
+          </a:p>
+        </p:txBody>
+      </p:sp>
+      <p:sp>
+        <p:nvSpPr>
+          <p:cNvPr id="31" name="TextBox 30"/>
+          <p:cNvSpPr txBox="1"/>
+          <p:nvPr/>
+        </p:nvSpPr>
+        <p:spPr>
+          <a:xfrm>
+            <a:off x="548640" y="4535423"/>
             <a:ext cx="1920240" cy="274320"/>
           </a:xfrm>
           <a:prstGeom prst="rect">
@@ -29074,24 +31145,69 @@
                 </a:solidFill>
                 <a:latin typeface="Arial"/>
               </a:rPr>
-              <a:t>In the cart</a:t>
-            </a:r>
-          </a:p>
-        </p:txBody>
-      </p:sp>
-      <p:sp>
-        <p:nvSpPr>
-          <p:cNvPr id="29" name="Rectangle 28"/>
+              <a:t>20–49</a:t>
+            </a:r>
+          </a:p>
+        </p:txBody>
+      </p:sp>
+      <p:sp>
+        <p:nvSpPr>
+          <p:cNvPr id="32" name="TextBox 31"/>
+          <p:cNvSpPr txBox="1"/>
+          <p:nvPr/>
+        </p:nvSpPr>
+        <p:spPr>
+          <a:xfrm>
+            <a:off x="548640" y="4791455"/>
+            <a:ext cx="1920240" cy="228600"/>
+          </a:xfrm>
+          <a:prstGeom prst="rect">
+            <a:avLst/>
+          </a:prstGeom>
+          <a:noFill/>
+        </p:spPr>
+        <p:txBody>
+          <a:bodyPr wrap="square" lIns="0" rIns="0" tIns="0" bIns="0" anchor="t">
+            <a:noAutofit/>
+          </a:bodyPr>
+          <a:lstStyle/>
+          <a:p>
+            <a:pPr algn="l">
+              <a:lnSpc>
+                <a:spcPct val="110000"/>
+              </a:lnSpc>
+              <a:spcAft>
+                <a:spcPts val="0"/>
+              </a:spcAft>
+            </a:pPr>
+            <a:r>
+              <a:rPr sz="1100" i="0" b="0">
+                <a:solidFill>
+                  <a:srgbClr val="647282"/>
+                </a:solidFill>
+                <a:latin typeface="Arial"/>
+              </a:rPr>
+              <a:t>18 people</a:t>
+            </a:r>
+          </a:p>
+        </p:txBody>
+      </p:sp>
+      <p:sp>
+        <p:nvSpPr>
+          <p:cNvPr id="33" name="Round Same Side Corner Rectangle 32"/>
           <p:cNvSpPr/>
           <p:nvPr/>
         </p:nvSpPr>
         <p:spPr>
-          <a:xfrm>
-            <a:off x="2514600" y="4517136"/>
-            <a:ext cx="80832" cy="228600"/>
-          </a:xfrm>
-          <a:prstGeom prst="rect">
-            <a:avLst/>
+          <a:xfrm rot="5400000">
+            <a:off x="2694087" y="4337648"/>
+            <a:ext cx="228600" cy="587575"/>
+          </a:xfrm>
+          <a:prstGeom prst="round2SameRect">
+            <a:avLst>
+              <a:gd name="adj1" fmla="val 14000"/>
+              <a:gd name="adj2" fmla="val 0"/>
+            </a:avLst>
           </a:prstGeom>
           <a:solidFill>
             <a:srgbClr val="B7C1CC"/>
@@ -29110,13 +31226,13 @@
       </p:sp>
       <p:sp>
         <p:nvSpPr>
-          <p:cNvPr id="30" name="TextBox 29"/>
-          <p:cNvSpPr txBox="1"/>
-          <p:nvPr/>
-        </p:nvSpPr>
-        <p:spPr>
-          <a:xfrm>
-            <a:off x="2686872" y="4498848"/>
+          <p:cNvPr id="34" name="TextBox 33"/>
+          <p:cNvSpPr txBox="1"/>
+          <p:nvPr/>
+        </p:nvSpPr>
+        <p:spPr>
+          <a:xfrm>
+            <a:off x="3193615" y="4498848"/>
             <a:ext cx="822960" cy="256032"/>
           </a:xfrm>
           <a:prstGeom prst="rect">
@@ -29145,27 +31261,24 @@
                 </a:solidFill>
                 <a:latin typeface="Arial"/>
               </a:rPr>
-              <a:t>2%</a:t>
-            </a:r>
-          </a:p>
-        </p:txBody>
-      </p:sp>
-      <p:sp>
-        <p:nvSpPr>
-          <p:cNvPr id="31" name="Round Same Side Corner Rectangle 30"/>
+              <a:t>9%</a:t>
+            </a:r>
+          </a:p>
+        </p:txBody>
+      </p:sp>
+      <p:sp>
+        <p:nvSpPr>
+          <p:cNvPr id="35" name="Rectangle 34"/>
           <p:cNvSpPr/>
           <p:nvPr/>
         </p:nvSpPr>
         <p:spPr>
-          <a:xfrm rot="5400000">
-            <a:off x="2806842" y="4490069"/>
-            <a:ext cx="228600" cy="813084"/>
-          </a:xfrm>
-          <a:prstGeom prst="round2SameRect">
-            <a:avLst>
-              <a:gd name="adj1" fmla="val 14000"/>
-              <a:gd name="adj2" fmla="val 0"/>
-            </a:avLst>
+          <a:xfrm>
+            <a:off x="2514600" y="4782312"/>
+            <a:ext cx="18288" cy="228600"/>
+          </a:xfrm>
+          <a:prstGeom prst="rect">
+            <a:avLst/>
           </a:prstGeom>
           <a:solidFill>
             <a:srgbClr val="FF9438"/>
@@ -29184,13 +31297,13 @@
       </p:sp>
       <p:sp>
         <p:nvSpPr>
-          <p:cNvPr id="32" name="TextBox 31"/>
-          <p:cNvSpPr txBox="1"/>
-          <p:nvPr/>
-        </p:nvSpPr>
-        <p:spPr>
-          <a:xfrm>
-            <a:off x="3419124" y="4764024"/>
+          <p:cNvPr id="36" name="TextBox 35"/>
+          <p:cNvSpPr txBox="1"/>
+          <p:nvPr/>
+        </p:nvSpPr>
+        <p:spPr>
+          <a:xfrm>
+            <a:off x="2606040" y="4764024"/>
             <a:ext cx="822960" cy="256032"/>
           </a:xfrm>
           <a:prstGeom prst="rect">
@@ -29219,20 +31332,20 @@
                 </a:solidFill>
                 <a:latin typeface="Arial"/>
               </a:rPr>
-              <a:t>17%</a:t>
-            </a:r>
-          </a:p>
-        </p:txBody>
-      </p:sp>
-      <p:sp>
-        <p:nvSpPr>
-          <p:cNvPr id="33" name="TextBox 32"/>
-          <p:cNvSpPr txBox="1"/>
-          <p:nvPr/>
-        </p:nvSpPr>
-        <p:spPr>
-          <a:xfrm>
-            <a:off x="548640" y="5321808"/>
+              <a:t>0%</a:t>
+            </a:r>
+          </a:p>
+        </p:txBody>
+      </p:sp>
+      <p:sp>
+        <p:nvSpPr>
+          <p:cNvPr id="37" name="TextBox 36"/>
+          <p:cNvSpPr txBox="1"/>
+          <p:nvPr/>
+        </p:nvSpPr>
+        <p:spPr>
+          <a:xfrm>
+            <a:off x="548640" y="5248656"/>
             <a:ext cx="1920240" cy="274320"/>
           </a:xfrm>
           <a:prstGeom prst="rect">
@@ -29261,24 +31374,69 @@
                 </a:solidFill>
                 <a:latin typeface="Arial"/>
               </a:rPr>
-              <a:t>At checkout</a:t>
-            </a:r>
-          </a:p>
-        </p:txBody>
-      </p:sp>
-      <p:sp>
-        <p:nvSpPr>
-          <p:cNvPr id="34" name="Rectangle 33"/>
+              <a:t>50 or more</a:t>
+            </a:r>
+          </a:p>
+        </p:txBody>
+      </p:sp>
+      <p:sp>
+        <p:nvSpPr>
+          <p:cNvPr id="38" name="TextBox 37"/>
+          <p:cNvSpPr txBox="1"/>
+          <p:nvPr/>
+        </p:nvSpPr>
+        <p:spPr>
+          <a:xfrm>
+            <a:off x="548640" y="5504688"/>
+            <a:ext cx="1920240" cy="228600"/>
+          </a:xfrm>
+          <a:prstGeom prst="rect">
+            <a:avLst/>
+          </a:prstGeom>
+          <a:noFill/>
+        </p:spPr>
+        <p:txBody>
+          <a:bodyPr wrap="square" lIns="0" rIns="0" tIns="0" bIns="0" anchor="t">
+            <a:noAutofit/>
+          </a:bodyPr>
+          <a:lstStyle/>
+          <a:p>
+            <a:pPr algn="l">
+              <a:lnSpc>
+                <a:spcPct val="110000"/>
+              </a:lnSpc>
+              <a:spcAft>
+                <a:spcPts val="0"/>
+              </a:spcAft>
+            </a:pPr>
+            <a:r>
+              <a:rPr sz="1100" i="0" b="0">
+                <a:solidFill>
+                  <a:srgbClr val="647282"/>
+                </a:solidFill>
+                <a:latin typeface="Arial"/>
+              </a:rPr>
+              <a:t>40 people</a:t>
+            </a:r>
+          </a:p>
+        </p:txBody>
+      </p:sp>
+      <p:sp>
+        <p:nvSpPr>
+          <p:cNvPr id="39" name="Round Same Side Corner Rectangle 38"/>
           <p:cNvSpPr/>
           <p:nvPr/>
         </p:nvSpPr>
         <p:spPr>
-          <a:xfrm>
-            <a:off x="2514600" y="5230368"/>
-            <a:ext cx="66568" cy="228600"/>
-          </a:xfrm>
-          <a:prstGeom prst="rect">
-            <a:avLst/>
+          <a:xfrm rot="5400000">
+            <a:off x="4386344" y="3358623"/>
+            <a:ext cx="228600" cy="3972088"/>
+          </a:xfrm>
+          <a:prstGeom prst="round2SameRect">
+            <a:avLst>
+              <a:gd name="adj1" fmla="val 14000"/>
+              <a:gd name="adj2" fmla="val 0"/>
+            </a:avLst>
           </a:prstGeom>
           <a:solidFill>
             <a:srgbClr val="B7C1CC"/>
@@ -29297,13 +31455,13 @@
       </p:sp>
       <p:sp>
         <p:nvSpPr>
-          <p:cNvPr id="35" name="TextBox 34"/>
-          <p:cNvSpPr txBox="1"/>
-          <p:nvPr/>
-        </p:nvSpPr>
-        <p:spPr>
-          <a:xfrm>
-            <a:off x="2672608" y="5212080"/>
+          <p:cNvPr id="40" name="TextBox 39"/>
+          <p:cNvSpPr txBox="1"/>
+          <p:nvPr/>
+        </p:nvSpPr>
+        <p:spPr>
+          <a:xfrm>
+            <a:off x="6578128" y="5212080"/>
             <a:ext cx="822960" cy="256032"/>
           </a:xfrm>
           <a:prstGeom prst="rect">
@@ -29332,21 +31490,21 @@
                 </a:solidFill>
                 <a:latin typeface="Arial"/>
               </a:rPr>
-              <a:t>1%</a:t>
-            </a:r>
-          </a:p>
-        </p:txBody>
-      </p:sp>
-      <p:sp>
-        <p:nvSpPr>
-          <p:cNvPr id="36" name="Round Same Side Corner Rectangle 35"/>
+              <a:t>62%</a:t>
+            </a:r>
+          </a:p>
+        </p:txBody>
+      </p:sp>
+      <p:sp>
+        <p:nvSpPr>
+          <p:cNvPr id="41" name="Round Same Side Corner Rectangle 40"/>
           <p:cNvSpPr/>
           <p:nvPr/>
         </p:nvSpPr>
         <p:spPr>
           <a:xfrm rot="5400000">
-            <a:off x="2999414" y="5010729"/>
-            <a:ext cx="228600" cy="1198229"/>
+            <a:off x="2515629" y="5494514"/>
+            <a:ext cx="228600" cy="230659"/>
           </a:xfrm>
           <a:prstGeom prst="round2SameRect">
             <a:avLst>
@@ -29371,13 +31529,13 @@
       </p:sp>
       <p:sp>
         <p:nvSpPr>
-          <p:cNvPr id="37" name="TextBox 36"/>
-          <p:cNvSpPr txBox="1"/>
-          <p:nvPr/>
-        </p:nvSpPr>
-        <p:spPr>
-          <a:xfrm>
-            <a:off x="3804269" y="5477256"/>
+          <p:cNvPr id="42" name="TextBox 41"/>
+          <p:cNvSpPr txBox="1"/>
+          <p:nvPr/>
+        </p:nvSpPr>
+        <p:spPr>
+          <a:xfrm>
+            <a:off x="2836699" y="5477256"/>
             <a:ext cx="822960" cy="256032"/>
           </a:xfrm>
           <a:prstGeom prst="rect">
@@ -29406,14 +31564,14 @@
                 </a:solidFill>
                 <a:latin typeface="Arial"/>
               </a:rPr>
-              <a:t>25%</a:t>
+              <a:t>4%</a:t>
             </a:r>
           </a:p>
         </p:txBody>
       </p:sp>
       <p:cxnSp>
         <p:nvCxnSpPr>
-          <p:cNvPr id="38" name="Connector 37"/>
+          <p:cNvPr id="43" name="Connector 42"/>
           <p:cNvCxnSpPr/>
           <p:nvPr/>
         </p:nvCxnSpPr>
@@ -29434,7 +31592,7 @@
       </p:cxnSp>
       <p:sp>
         <p:nvSpPr>
-          <p:cNvPr id="39" name="Rectangle 38"/>
+          <p:cNvPr id="44" name="Rectangle 43"/>
           <p:cNvSpPr/>
           <p:nvPr/>
         </p:nvSpPr>
@@ -29463,7 +31621,7 @@
       </p:sp>
       <p:sp>
         <p:nvSpPr>
-          <p:cNvPr id="40" name="Oval 39"/>
+          <p:cNvPr id="45" name="Oval 44"/>
           <p:cNvSpPr/>
           <p:nvPr/>
         </p:nvSpPr>
@@ -29492,7 +31650,7 @@
       </p:sp>
       <p:sp>
         <p:nvSpPr>
-          <p:cNvPr id="41" name="TextBox 40"/>
+          <p:cNvPr id="46" name="TextBox 45"/>
           <p:cNvSpPr txBox="1"/>
           <p:nvPr/>
         </p:nvSpPr>
@@ -29527,14 +31685,14 @@
                 </a:solidFill>
                 <a:latin typeface="Arial"/>
               </a:rPr>
-              <a:t>Conversion of the click</a:t>
-            </a:r>
-          </a:p>
-        </p:txBody>
-      </p:sp>
-      <p:sp>
-        <p:nvSpPr>
-          <p:cNvPr id="42" name="TextBox 41"/>
+              <a:t>Clicks an hour, median</a:t>
+            </a:r>
+          </a:p>
+        </p:txBody>
+      </p:sp>
+      <p:sp>
+        <p:nvSpPr>
+          <p:cNvPr id="47" name="TextBox 46"/>
           <p:cNvSpPr txBox="1"/>
           <p:nvPr/>
         </p:nvSpPr>
@@ -29563,20 +31721,20 @@
               </a:spcAft>
             </a:pPr>
             <a:r>
-              <a:rPr sz="4000" i="0" b="1">
+              <a:rPr sz="3400" i="0" b="1">
                 <a:solidFill>
                   <a:srgbClr val="0B2A4A"/>
                 </a:solidFill>
                 <a:latin typeface="Arial"/>
               </a:rPr>
-              <a:t>31% vs 0.7%</a:t>
-            </a:r>
-          </a:p>
-        </p:txBody>
-      </p:sp>
-      <p:sp>
-        <p:nvSpPr>
-          <p:cNvPr id="43" name="TextBox 42"/>
+              <a:t>13–15 vs under 2</a:t>
+            </a:r>
+          </a:p>
+        </p:txBody>
+      </p:sp>
+      <p:sp>
+        <p:nvSpPr>
+          <p:cNvPr id="48" name="TextBox 47"/>
           <p:cNvSpPr txBox="1"/>
           <p:nvPr/>
         </p:nvSpPr>
@@ -29611,14 +31769,14 @@
                 </a:solidFill>
                 <a:latin typeface="Arial"/>
               </a:rPr>
-              <a:t>at checkout vs starting the visit</a:t>
-            </a:r>
-          </a:p>
-        </p:txBody>
-      </p:sp>
-      <p:sp>
-        <p:nvSpPr>
-          <p:cNvPr id="44" name="TextBox 43"/>
+              <a:t>20+ clicks a day vs fewer</a:t>
+            </a:r>
+          </a:p>
+        </p:txBody>
+      </p:sp>
+      <p:sp>
+        <p:nvSpPr>
+          <p:cNvPr id="49" name="TextBox 48"/>
           <p:cNvSpPr txBox="1"/>
           <p:nvPr/>
         </p:nvSpPr>
@@ -29653,14 +31811,14 @@
                 </a:solidFill>
                 <a:latin typeface="Arial"/>
               </a:rPr>
-              <a:t>and the next slide shows the click adds no orders</a:t>
-            </a:r>
-          </a:p>
-        </p:txBody>
-      </p:sp>
-      <p:sp>
-        <p:nvSpPr>
-          <p:cNvPr id="45" name="TextBox 44"/>
+              <a:t>on 6–9 sites all day, vs 13–15</a:t>
+            </a:r>
+          </a:p>
+        </p:txBody>
+      </p:sp>
+      <p:sp>
+        <p:nvSpPr>
+          <p:cNvPr id="50" name="TextBox 49"/>
           <p:cNvSpPr txBox="1"/>
           <p:nvPr/>
         </p:nvSpPr>
@@ -29695,14 +31853,14 @@
                 </a:solidFill>
                 <a:latin typeface="Arial"/>
               </a:rPr>
-              <a:t>What it means for a program</a:t>
-            </a:r>
-          </a:p>
-        </p:txBody>
-      </p:sp>
-      <p:sp>
-        <p:nvSpPr>
-          <p:cNvPr id="46" name="Oval 45"/>
+              <a:t>What it means for Saatva</a:t>
+            </a:r>
+          </a:p>
+        </p:txBody>
+      </p:sp>
+      <p:sp>
+        <p:nvSpPr>
+          <p:cNvPr id="51" name="Oval 50"/>
           <p:cNvSpPr/>
           <p:nvPr/>
         </p:nvSpPr>
@@ -29731,7 +31889,7 @@
       </p:sp>
       <p:sp>
         <p:nvSpPr>
-          <p:cNvPr id="47" name="TextBox 46"/>
+          <p:cNvPr id="52" name="TextBox 51"/>
           <p:cNvSpPr txBox="1"/>
           <p:nvPr/>
         </p:nvSpPr>
@@ -29766,14 +31924,14 @@
                 </a:solidFill>
                 <a:latin typeface="Arial"/>
               </a:rPr>
-              <a:t>Pay on the stage the click arrived at</a:t>
-            </a:r>
-          </a:p>
-        </p:txBody>
-      </p:sp>
-      <p:sp>
-        <p:nvSpPr>
-          <p:cNvPr id="48" name="Oval 47"/>
+              <a:t>Cap clicks per device per day in EPC</a:t>
+            </a:r>
+          </a:p>
+        </p:txBody>
+      </p:sp>
+      <p:sp>
+        <p:nvSpPr>
+          <p:cNvPr id="53" name="Oval 52"/>
           <p:cNvSpPr/>
           <p:nvPr/>
         </p:nvSpPr>
@@ -29802,7 +31960,7 @@
       </p:sp>
       <p:sp>
         <p:nvSpPr>
-          <p:cNvPr id="49" name="TextBox 48"/>
+          <p:cNvPr id="54" name="TextBox 53"/>
           <p:cNvSpPr txBox="1"/>
           <p:nvPr/>
         </p:nvSpPr>
@@ -29837,14 +31995,14 @@
                 </a:solidFill>
                 <a:latin typeface="Arial"/>
               </a:rPr>
-              <a:t>Lock credit once a cart exists</a:t>
-            </a:r>
-          </a:p>
-        </p:txBody>
-      </p:sp>
-      <p:sp>
-        <p:nvSpPr>
-          <p:cNvPr id="50" name="Oval 49"/>
+              <a:t>Never pay per click on these partners</a:t>
+            </a:r>
+          </a:p>
+        </p:txBody>
+      </p:sp>
+      <p:sp>
+        <p:nvSpPr>
+          <p:cNvPr id="55" name="Oval 54"/>
           <p:cNvSpPr/>
           <p:nvPr/>
         </p:nvSpPr>
@@ -29873,7 +32031,7 @@
       </p:sp>
       <p:sp>
         <p:nvSpPr>
-          <p:cNvPr id="51" name="TextBox 50"/>
+          <p:cNvPr id="56" name="TextBox 55"/>
           <p:cNvSpPr txBox="1"/>
           <p:nvPr/>
         </p:nvSpPr>
@@ -29908,7 +32066,49 @@
                 </a:solidFill>
                 <a:latin typeface="Arial"/>
               </a:rPr>
-              <a:t>Report the funnel stage per publisher</a:t>
+              <a:t>Alert on click velocity per publisher</a:t>
+            </a:r>
+          </a:p>
+        </p:txBody>
+      </p:sp>
+      <p:sp>
+        <p:nvSpPr>
+          <p:cNvPr id="57" name="TextBox 56"/>
+          <p:cNvSpPr txBox="1"/>
+          <p:nvPr/>
+        </p:nvSpPr>
+        <p:spPr>
+          <a:xfrm>
+            <a:off x="548640" y="5852160"/>
+            <a:ext cx="11094415" cy="274320"/>
+          </a:xfrm>
+          <a:prstGeom prst="rect">
+            <a:avLst/>
+          </a:prstGeom>
+          <a:noFill/>
+        </p:spPr>
+        <p:txBody>
+          <a:bodyPr wrap="square" lIns="0" rIns="0" tIns="0" bIns="0" anchor="t">
+            <a:noAutofit/>
+          </a:bodyPr>
+          <a:lstStyle/>
+          <a:p>
+            <a:pPr algn="l">
+              <a:lnSpc>
+                <a:spcPct val="110000"/>
+              </a:lnSpc>
+              <a:spcAft>
+                <a:spcPts val="0"/>
+              </a:spcAft>
+            </a:pPr>
+            <a:r>
+              <a:rPr sz="1200" i="0" b="0">
+                <a:solidFill>
+                  <a:srgbClr val="647282"/>
+                </a:solidFill>
+                <a:latin typeface="Arial"/>
+              </a:rPr>
+              <a:t>US panel, 1 May 2026. Threshold 20 clicks a day; at 10 or 50 the flood share is 75% or 62% of clicks. No mattress-brand user crosses it.</a:t>
             </a:r>
           </a:p>
         </p:txBody>

--- a/deck/saatva_affiliate_analysis.pptx
+++ b/deck/saatva_affiliate_analysis.pptx
@@ -661,7 +661,7 @@
           <a:lstStyle/>
           <a:p>
             <a:r>
-              <a:t>The obvious objection to slides 8 and 9: shoppers in the cart convert at a high rate anyway, so of course these clicks convert. That is the point, and it can be tested. Take every US Walmart shopper at the moment they first view the cart, and separately the checkout. The stage is fixed before any click, and shoppers an affiliate brought to the cart are left out. Then compare those who got an affiliate click afterwards with those who did not. At the cart, 34.2% vs 31.7% order within two hours; at the checkout, 66.7% vs 75.8%. Across the 56 shoppers who got a click, 25 ordered; 25.7 would have without it. The interval is wide (ratio 0.63–1.44), so at most about 31% of these orders could be incremental, and the best estimate is none. The design favours the click, since a shopper who got one stayed on the site at least until it fired. Clicks fired at the cart carry half of Walmart's affiliate-credited orders. At an average order of $100–125 and 1–4% commission, that is $22.3M–111.3M a year paid for sales that were already happening. Saatva's panel has no orders to measure its share, so the Saatva figure is per 10% of orders hijacked: about $860 per order and 3–10% commission.</a:t>
+              <a:t>The obvious objection to slides 8 and 9: shoppers in the cart convert at a high rate anyway, so of course these clicks convert. That is the point, and it can be tested. Take every US Walmart shopper at the moment they first view the cart, and separately the checkout. The stage is fixed before any click, and shoppers an affiliate brought to the cart are left out. Then compare those who got an affiliate click afterwards with those who did not. At the cart, 34.2% vs 31.7% order within two hours; at the checkout, 66.7% vs 75.8%. Across the 56 shoppers who got a click, 25 ordered; 25.7 would have without it. The interval is wide (ratio 0.63–1.44), so at most about 31% of these orders could be incremental, and the best estimate is none. The design favours the click, since a shopper who got one stayed on the site at least until it fired. Clicks fired at the cart carry half of Walmart's affiliate-credited orders. At an average order of $100–125 and 1–4% commission, that is $22.3M–111.3M a year paid for sales that, on this evidence, were happening anyway; with 56 shoppers that is a strong lead, not proof. Saatva's panel has no orders to measure its share, so the Saatva figure is per 10% of orders hijacked: about $860 per order and 3–10% commission.</a:t>
             </a:r>
           </a:p>
         </p:txBody>
@@ -1151,7 +1151,7 @@
           <a:lstStyle/>
           <a:p>
             <a:r>
-              <a:t>Three numbers. First, 16% of Saatva's visits start with an affiliate click, against 4–11% for the other mattress brands, and Similarweb independently ranks affiliate as Saatva's #1 channel. Second, scaled to the US, that is about 16.7K affiliate clicks a day. The range is wide, 6.1K–36.4K, because it rests on six panel clicks; at category conversion rates it means roughly 84–334 orders a day. Third, where the data has volume (Walmart), the clicks that carry a hijack signal take 51–79% of the affiliate-credited orders, though they are only 26–41% of ordinary shoppers' clicks; most of the remaining click volume is click flooding by a few dozen people. Saatva's own clicks already show the same hijacking patterns. So the recommendations split in two: grow the channel, and stop paying for credit that was taken, not earned.</a:t>
+              <a:t>Three numbers. First, Similarweb ranks affiliate as Saatva's #1 channel (23.7% of traffic), and the panel points the same way: 16% of Saatva's visits start with an affiliate click, against 4–11% for the other mattress brands. That is 4 of 25 visits, so the panel alone cannot separate Saatva from its rivals; the external source carries the claim. Second, scaled to the US, that is about 16.7K affiliate clicks a day. The range is wide, 6.1K–36.4K, because it rests on six panel clicks. No mattress order followed an affiliate click in the panel day, so orders are an assumption, not a finding: at a 0.5–2% category conversion rate, roughly 84–334 a day. Third, where the data has volume (Walmart), the clicks that carry a hijack signal take 51–79% of the affiliate-credited orders, though they are only 26–41% of ordinary shoppers' clicks; most of the remaining click volume is click flooding by a few dozen people. Saatva's own clicks already show the same hijacking patterns. So the recommendations split in two: grow the channel, and stop paying for credit that was taken, not earned.</a:t>
             </a:r>
           </a:p>
         </p:txBody>
@@ -1221,7 +1221,7 @@
           <a:lstStyle/>
           <a:p>
             <a:r>
-              <a:t>The share of visits that start with an affiliate click is the most robust comparison, because it doesn't depend on scaling: Saatva 16%, Helix 10.5%, DreamCloud 7.4%, Nectar 3.9%. Nectar and DreamCloud lean on paid search instead, 43% and 37% of their visits. Similarweb agrees independently: affiliate is the #1 channel for Saatva (23.7% of traffic) and Helix (21.0%), paid search for Nectar and DreamCloud. Caveat: one day gives 19–51 visits per mattress brand, so read the order, not the decimals.</a:t>
+              <a:t>The share of visits that start with an affiliate click is the most robust comparison, because it doesn't depend on scaling: Saatva 16%, Helix 10.5%, DreamCloud 7.4%, Nectar 3.9%. Nectar and DreamCloud lean on paid search instead, 43% and 37% of their visits. Similarweb agrees independently: affiliate is the #1 channel for Saatva (23.7% of traffic) and Helix (21.0%), paid search for Nectar and DreamCloud. Caveat: one day gives 19–51 visits per mattress brand. Saatva's 16% is 4 of 25 visits, with a 95% interval of 6–35% that overlaps every rival, so the panel shows the direction and Similarweb confirms it.</a:t>
             </a:r>
           </a:p>
         </p:txBody>
@@ -1431,7 +1431,7 @@
           <a:lstStyle/>
           <a:p>
             <a:r>
-              <a:t>Validation changed the answer. 14.7% of rows were exact duplicates, and some people were recorded under two user ids, one a partial copy of the other; left as is, that inflated brand visits by 14–28% and orders by 20%. I merged ids that share three or more identical events. One pass selects the users who touched any of the five brands, so everything runs on 3.4% of the data, in about 30 seconds. Scaling: a factor calibrated on walmart.com recovers only 35–50% of the mattress sites' Similarweb traffic, because the panel under-covers that audience. The mattress brands therefore use a factor calibrated on the mattress sites themselves, which reproduces each brand within 0.89–1.27×. Caveat: Similarweb's latest public month is August, while the panel day is 1 May. Google Trends puts mattress search interest around 1 May at 1.5–2.8× August, so moved to that day the mattress estimates roughly double (Saatva about 33K clicks a day). The headline keeps the August factor as the lower estimate.</a:t>
+              <a:t>Validation changed the answer. 14.7% of rows were exact duplicates, and some people were recorded under two user ids, one a partial copy of the other; left as is, that inflated brand visits by 14–28% and orders by 20%. I merged ids that share three or more identical events. One pass selects the users who touched any of the five brands, so everything runs on 3.4% of the data, in about 30 seconds. Scaling: a factor calibrated on walmart.com recovers only 35–50% of the mattress sites' Similarweb traffic, because the panel under-covers that audience. The mattress brands therefore use a factor calibrated on the mattress sites themselves. It fits each of them within 0.89–1.27×; that is a fit check on the same figures, not an independent test. Caveat: Similarweb's latest public month is August, while the panel day is 1 May. Google Trends puts mattress search interest around 1 May at 1.5–2.8× August, so moved to that day the mattress estimates roughly double (Saatva about 33K clicks a day). The headline keeps the August factor as the lower estimate.</a:t>
             </a:r>
           </a:p>
         </p:txBody>
@@ -1571,7 +1571,7 @@
           <a:lstStyle/>
           <a:p>
             <a:r>
-              <a:t>Walmart has the volume to test the indicators. Flagged clicks are clicks without a landing, clicks fired while the shopper was already in the cart or on the site, and clicks from a publisher-bought search ad. Click-flooding clicks (next slide) are left out: they are most of the volume and almost never convert, so they would make the flagged share look smaller than it is. Among ordinary shoppers' clicks, flagged clicks are 26–41% of clicks but take 51–79% of the affiliate-credited orders, depending on how strict the look-back window is, from 2 to 30 minutes. Counted over all clicks, the same flags are 13–24%. Clicks fired after the shopper had already viewed the cart convert at 13%, against 0.4% for clicks with no signal, and the order follows a median 2.3 minutes later: these clicks close sales that were already happening. Mechanisms: 258 clicks fired from walmart.com itself a median 2 seconds after a walmart.com page, with no publisher page in between; price-comparison redirects (rd.bizrate.com, 461 flagged clicks); and coupon and cash-back extensions (Capital One Shopping, Slickdeals, Rakuten).</a:t>
+              <a:t>Walmart has the volume to test the indicators. Flagged clicks are clicks without a landing, clicks fired while the shopper was already in the cart or on the site, and clicks from a publisher-bought search ad. Click-flooding clicks (next slide) are left out: they are most of the volume and almost never convert, so they would make the flagged share look smaller than it is. Among ordinary shoppers' clicks, flagged clicks are 26–41% of clicks but take 51–79% of the affiliate-credited orders, depending on how strict the look-back window is, from 2 to 30 minutes. Counted over all clicks, the same flags are 13–24%. Clicks fired after the shopper had already viewed the cart convert at 13%, against 0.4% for clicks with no signal, and the order follows a median 2.3 minutes later: these clicks look like they close sales that were already happening. Mechanisms: 258 clicks fired from walmart.com itself a median 2 seconds after a walmart.com page, with no publisher page in between; price-comparison redirects (rd.bizrate.com, 461 flagged clicks); and coupon and cash-back extensions (Capital One Shopping, Slickdeals, Rakuten).</a:t>
             </a:r>
           </a:p>
         </p:txBody>
@@ -6896,7 +6896,7 @@
                 </a:solidFill>
                 <a:latin typeface="Arial"/>
               </a:rPr>
-              <a:t>and the next slide shows the click adds no orders</a:t>
+              <a:t>and the next slide finds no sign it adds orders</a:t>
             </a:r>
           </a:p>
         </p:txBody>
@@ -7253,7 +7253,7 @@
                 </a:solidFill>
                 <a:latin typeface="Georgia"/>
               </a:rPr>
-              <a:t>A click fired at the cart adds no orders</a:t>
+              <a:t>No sign that a click fired at the cart adds orders</a:t>
             </a:r>
           </a:p>
         </p:txBody>
@@ -8403,7 +8403,7 @@
                 </a:solidFill>
                 <a:latin typeface="Arial"/>
               </a:rPr>
-              <a:t>a year at Walmart (half its affiliate orders)</a:t>
+              <a:t>a year at Walmart, if they add no orders</a:t>
             </a:r>
           </a:p>
         </p:txBody>
@@ -10807,7 +10807,7 @@
                 </a:solidFill>
                 <a:latin typeface="Arial"/>
               </a:rPr>
-              <a:t>Cart-stage clicks add no orders (slide 10); plus extension stand-down, PPC policy</a:t>
+              <a:t>Cart-stage clicks show no added orders (slide 10); plus extension stand-down, PPC policy</a:t>
             </a:r>
           </a:p>
         </p:txBody>
@@ -18909,7 +18909,7 @@
                 </a:solidFill>
                 <a:latin typeface="Georgia"/>
               </a:rPr>
-              <a:t>Affiliate is Saatva's edge; quality is the next lever</a:t>
+              <a:t>Affiliate is Saatva's #1 channel; quality is the next lever</a:t>
             </a:r>
           </a:p>
         </p:txBody>
@@ -19277,7 +19277,7 @@
                 </a:solidFill>
                 <a:latin typeface="Arial"/>
               </a:rPr>
-              <a:t>Rivals: 4–11%</a:t>
+              <a:t>Rivals: 4–11%  ·  Similarweb: #1</a:t>
             </a:r>
           </a:p>
         </p:txBody>
@@ -19503,7 +19503,7 @@
                 </a:solidFill>
                 <a:latin typeface="Arial"/>
               </a:rPr>
-              <a:t>Range 6.1K–36.4K  ·  84–334 orders a day</a:t>
+              <a:t>Range 6.1K–36.4K  ·  84–334 orders a day, assumed</a:t>
             </a:r>
           </a:p>
         </p:txBody>
@@ -20507,7 +20507,7 @@
                 </a:solidFill>
                 <a:latin typeface="Georgia"/>
               </a:rPr>
-              <a:t>Affiliate drives 16% of Saatva's visits, the top share</a:t>
+              <a:t>Saatva leans on affiliate more than its rivals</a:t>
             </a:r>
           </a:p>
         </p:txBody>
@@ -20817,7 +20817,7 @@
                 </a:solidFill>
                 <a:latin typeface="Arial"/>
               </a:rPr>
-              <a:t>25 visits</a:t>
+              <a:t>4 of 25 visits</a:t>
             </a:r>
           </a:p>
         </p:txBody>
@@ -21024,7 +21024,7 @@
                 </a:solidFill>
                 <a:latin typeface="Arial"/>
               </a:rPr>
-              <a:t>19 visits</a:t>
+              <a:t>2 of 19 visits</a:t>
             </a:r>
           </a:p>
         </p:txBody>
@@ -21231,7 +21231,7 @@
                 </a:solidFill>
                 <a:latin typeface="Arial"/>
               </a:rPr>
-              <a:t>27 visits</a:t>
+              <a:t>2 of 27 visits</a:t>
             </a:r>
           </a:p>
         </p:txBody>
@@ -21440,7 +21440,7 @@
                 </a:solidFill>
                 <a:latin typeface="Arial"/>
               </a:rPr>
-              <a:t>51 visits</a:t>
+              <a:t>2 of 51 visits</a:t>
             </a:r>
           </a:p>
         </p:txBody>
@@ -21786,7 +21786,7 @@
                 </a:solidFill>
                 <a:latin typeface="Arial"/>
               </a:rPr>
-              <a:t>US panel visits, 1 May 2026. Nectar and DreamCloud lean on paid search: 43% and 37% of their visits.</a:t>
+              <a:t>US panel visits, 1 May 2026. Nectar and DreamCloud lean on paid search: 43% and 37% of their visits. Small counts: the 95% intervals overlap (Saatva 6–35%), so the ranking rests on Similarweb.</a:t>
             </a:r>
           </a:p>
         </p:txBody>
@@ -22429,7 +22429,7 @@
                 </a:solidFill>
                 <a:latin typeface="Arial"/>
               </a:rPr>
-              <a:t>Orders a day (est.)</a:t>
+              <a:t>Orders a day (assumed)</a:t>
             </a:r>
           </a:p>
         </p:txBody>
@@ -23215,7 +23215,7 @@
                 </a:solidFill>
                 <a:latin typeface="Arial"/>
               </a:rPr>
-              <a:t>At a 0.5–2% category conversion rate</a:t>
+              <a:t>Not observed: 0.5–2% category conversion applied to the clicks</a:t>
             </a:r>
           </a:p>
         </p:txBody>
@@ -26731,7 +26731,7 @@
                 </a:solidFill>
                 <a:latin typeface="Arial"/>
               </a:rPr>
-              <a:t>The mattress factor matches each site within </a:t>
+              <a:t>The mattress factor fits each site within </a:t>
             </a:r>
             <a:r>
               <a:rPr sz="1300" i="0" b="1">
@@ -26749,7 +26749,7 @@
                 </a:solidFill>
                 <a:latin typeface="Arial"/>
               </a:rPr>
-              <a:t>.</a:t>
+              <a:t> (calibrated on the same sites, so a fit check).</a:t>
             </a:r>
           </a:p>
         </p:txBody>
